--- a/docs/ecostats_lectures/lecture_11/11_01_lecture_powerpoint.pptx
+++ b/docs/ecostats_lectures/lecture_11/11_01_lecture_powerpoint.pptx
@@ -6905,8 +6905,8 @@
         </p:blipFill>
         <p:spPr bwMode="auto">
           <a:xfrm>
-            <a:off x="3657600" y="1244600"/>
-            <a:ext cx="5232400" cy="3225800"/>
+            <a:off x="4368800" y="952500"/>
+            <a:ext cx="3797300" cy="3797300"/>
           </a:xfrm>
           <a:prstGeom prst="rect">
             <a:avLst/>

--- a/docs/ecostats_lectures/lecture_11/11_01_lecture_powerpoint.pptx
+++ b/docs/ecostats_lectures/lecture_11/11_01_lecture_powerpoint.pptx
@@ -3808,8 +3808,8 @@
                                 <m:d>
                                   <m:dPr>
                                     <m:begChr m:val="("/>
+                                    <m:sepChr m:val=""/>
                                     <m:endChr m:val=")"/>
-                                    <m:sepChr m:val=""/>
                                     <m:grow/>
                                   </m:dPr>
                                   <m:e>
@@ -3975,8 +3975,8 @@
                                 <m:d>
                                   <m:dPr>
                                     <m:begChr m:val="("/>
+                                    <m:sepChr m:val=""/>
                                     <m:endChr m:val=")"/>
-                                    <m:sepChr m:val=""/>
                                     <m:grow/>
                                   </m:dPr>
                                   <m:e>
@@ -4069,8 +4069,8 @@
                             <m:d>
                               <m:dPr>
                                 <m:begChr m:val="("/>
+                                <m:sepChr m:val=""/>
                                 <m:endChr m:val=")"/>
-                                <m:sepChr m:val=""/>
                                 <m:grow/>
                               </m:dPr>
                               <m:e>
@@ -4232,8 +4232,8 @@
                                 <m:d>
                                   <m:dPr>
                                     <m:begChr m:val="("/>
+                                    <m:sepChr m:val=""/>
                                     <m:endChr m:val=")"/>
-                                    <m:sepChr m:val=""/>
                                     <m:grow/>
                                   </m:dPr>
                                   <m:e>

--- a/docs/ecostats_lectures/lecture_11/11_01_lecture_powerpoint.pptx
+++ b/docs/ecostats_lectures/lecture_11/11_01_lecture_powerpoint.pptx
@@ -38,6 +38,14 @@
     <p:sldId id="286" r:id="rId32"/>
     <p:sldId id="287" r:id="rId33"/>
     <p:sldId id="288" r:id="rId34"/>
+    <p:sldId id="289" r:id="rId35"/>
+    <p:sldId id="290" r:id="rId36"/>
+    <p:sldId id="291" r:id="rId37"/>
+    <p:sldId id="292" r:id="rId38"/>
+    <p:sldId id="293" r:id="rId39"/>
+    <p:sldId id="294" r:id="rId40"/>
+    <p:sldId id="295" r:id="rId41"/>
+    <p:sldId id="296" r:id="rId42"/>
   </p:sldIdLst>
   <p:sldSz cx="9144000" cy="5143500" type="screen16x9"/>
   <p:notesSz cx="6858000" cy="9144000"/>
@@ -11803,6 +11811,4495 @@
           <a:chExt cx="0" cy="0"/>
         </a:xfrm>
       </p:grpSpPr>
+      <p:sp>
+        <p:nvSpPr>
+          <p:cNvPr id="2" name="Title 1"/>
+          <p:cNvSpPr>
+            <a:spLocks noGrp="1"/>
+          </p:cNvSpPr>
+          <p:nvPr>
+            <p:ph type="title"/>
+          </p:nvPr>
+        </p:nvSpPr>
+        <p:spPr>
+          <a:xfrm>
+            <a:off x="0" y="0"/>
+            <a:ext cx="9144000" cy="602780"/>
+          </a:xfrm>
+          <a:solidFill>
+            <a:srgbClr val="70121D"/>
+          </a:solidFill>
+        </p:spPr>
+        <p:txBody>
+          <a:bodyPr/>
+          <a:lstStyle/>
+          <a:p>
+            <a:pPr lvl="0" indent="0" marL="0">
+              <a:buNone/>
+            </a:pPr>
+            <a:r>
+              <a:rPr/>
+              <a:t>Overview of Non-Parametric Tests</a:t>
+            </a:r>
+          </a:p>
+        </p:txBody>
+      </p:sp>
+      <p:sp>
+        <p:nvSpPr>
+          <p:cNvPr id="3" name="Content Placeholder 2"/>
+          <p:cNvSpPr>
+            <a:spLocks noGrp="1"/>
+          </p:cNvSpPr>
+          <p:nvPr>
+            <p:ph idx="1" sz="half"/>
+          </p:nvPr>
+        </p:nvSpPr>
+        <p:spPr/>
+        <p:txBody>
+          <a:bodyPr/>
+          <a:lstStyle/>
+          <a:p>
+            <a:pPr lvl="0" indent="0" marL="0">
+              <a:spcBef>
+                <a:spcPts val="3000"/>
+              </a:spcBef>
+              <a:buNone/>
+            </a:pPr>
+            <a:r>
+              <a:rPr b="1"/>
+              <a:t>Common Non-Parametric Alternatives to ANOVA</a:t>
+            </a:r>
+          </a:p>
+          <a:p>
+            <a:pPr lvl="0" indent="0" marL="0">
+              <a:buNone/>
+            </a:pPr>
+            <a:r>
+              <a:rPr b="1"/>
+              <a:t>Non-parametric tests make fewer assumptions about the data distribution</a:t>
+            </a:r>
+          </a:p>
+          <a:p>
+            <a:pPr lvl="0" indent="-342900" marL="342900">
+              <a:buAutoNum type="arabicPeriod"/>
+            </a:pPr>
+            <a:r>
+              <a:rPr b="1"/>
+              <a:t>Kruskal-Wallis Test</a:t>
+            </a:r>
+          </a:p>
+          <a:p>
+            <a:pPr lvl="1"/>
+            <a:r>
+              <a:rPr/>
+              <a:t>Non-parametric alternative to one-way ANOVA</a:t>
+            </a:r>
+          </a:p>
+          <a:p>
+            <a:pPr lvl="1"/>
+            <a:r>
+              <a:rPr/>
+              <a:t>Tests for differences in median ranks</a:t>
+            </a:r>
+          </a:p>
+          <a:p>
+            <a:pPr lvl="1"/>
+            <a:r>
+              <a:rPr/>
+              <a:t>Works with ordinal or continuous data</a:t>
+            </a:r>
+          </a:p>
+          <a:p>
+            <a:pPr lvl="1"/>
+            <a:r>
+              <a:rPr/>
+              <a:t>Assumptions: Independent observations, similar distribution shapes</a:t>
+            </a:r>
+          </a:p>
+          <a:p>
+            <a:pPr lvl="0" indent="-342900" marL="342900">
+              <a:buAutoNum type="arabicPeriod"/>
+            </a:pPr>
+            <a:r>
+              <a:rPr b="1"/>
+              <a:t>Mood’s Median Test</a:t>
+            </a:r>
+            <a:r>
+              <a:rPr/>
+              <a:t> not covered here</a:t>
+            </a:r>
+          </a:p>
+          <a:p>
+            <a:pPr lvl="0"/>
+            <a:r>
+              <a:rPr/>
+              <a:t>Tests whether medians differ across groups</a:t>
+            </a:r>
+          </a:p>
+          <a:p>
+            <a:pPr lvl="0"/>
+            <a:r>
+              <a:rPr/>
+              <a:t>More robust but less powerful than Kruskal-Wallis</a:t>
+            </a:r>
+          </a:p>
+          <a:p>
+            <a:pPr lvl="0"/>
+            <a:r>
+              <a:rPr/>
+              <a:t>Good for highly skewed data</a:t>
+            </a:r>
+          </a:p>
+        </p:txBody>
+      </p:sp>
+      <p:sp>
+        <p:nvSpPr>
+          <p:cNvPr id="4" name="Content Placeholder 3"/>
+          <p:cNvSpPr>
+            <a:spLocks noGrp="1"/>
+          </p:cNvSpPr>
+          <p:nvPr>
+            <p:ph idx="2" sz="half"/>
+          </p:nvPr>
+        </p:nvSpPr>
+        <p:spPr/>
+        <p:txBody>
+          <a:bodyPr/>
+          <a:lstStyle/>
+          <a:p>
+            <a:pPr lvl="0" indent="0" marL="0">
+              <a:spcBef>
+                <a:spcPts val="3000"/>
+              </a:spcBef>
+              <a:buNone/>
+            </a:pPr>
+            <a:r>
+              <a:rPr b="1"/>
+              <a:t>When to Use Non-Parametric Tests</a:t>
+            </a:r>
+          </a:p>
+          <a:p>
+            <a:pPr lvl="0" indent="0" marL="0">
+              <a:buNone/>
+            </a:pPr>
+            <a:r>
+              <a:rPr b="1"/>
+              <a:t>Consider non-parametric tests when:</a:t>
+            </a:r>
+          </a:p>
+          <a:p>
+            <a:pPr lvl="0"/>
+            <a:r>
+              <a:rPr/>
+              <a:t>Sample sizes are small</a:t>
+            </a:r>
+          </a:p>
+          <a:p>
+            <a:pPr lvl="0"/>
+            <a:r>
+              <a:rPr/>
+              <a:t>Data are heavily skewed</a:t>
+            </a:r>
+          </a:p>
+          <a:p>
+            <a:pPr lvl="0"/>
+            <a:r>
+              <a:rPr/>
+              <a:t>Outliers are present and legitimate</a:t>
+            </a:r>
+          </a:p>
+          <a:p>
+            <a:pPr lvl="0"/>
+            <a:r>
+              <a:rPr/>
+              <a:t>Variances are very unequal</a:t>
+            </a:r>
+          </a:p>
+          <a:p>
+            <a:pPr lvl="0"/>
+            <a:r>
+              <a:rPr/>
+              <a:t>Data are ordinal (ranked)</a:t>
+            </a:r>
+          </a:p>
+          <a:p>
+            <a:pPr lvl="0"/>
+            <a:r>
+              <a:rPr/>
+              <a:t>Assumptions checks clearly fail</a:t>
+            </a:r>
+          </a:p>
+          <a:p>
+            <a:pPr lvl="0" indent="0" marL="0">
+              <a:buNone/>
+            </a:pPr>
+            <a:r>
+              <a:rPr b="1"/>
+              <a:t>Trade-offs:</a:t>
+            </a:r>
+          </a:p>
+          <a:p>
+            <a:pPr lvl="0"/>
+            <a:r>
+              <a:rPr/>
+              <a:t>✓ Fewer assumptions</a:t>
+            </a:r>
+          </a:p>
+          <a:p>
+            <a:pPr lvl="0"/>
+            <a:r>
+              <a:rPr/>
+              <a:t>✓ More robust to outliers</a:t>
+            </a:r>
+          </a:p>
+          <a:p>
+            <a:pPr lvl="0"/>
+            <a:r>
+              <a:rPr/>
+              <a:t>✗ Less statistical power</a:t>
+            </a:r>
+          </a:p>
+          <a:p>
+            <a:pPr lvl="0"/>
+            <a:r>
+              <a:rPr/>
+              <a:t>✗ Test medians/ranks, not means</a:t>
+            </a:r>
+          </a:p>
+        </p:txBody>
+      </p:sp>
+    </p:spTree>
+  </p:cSld>
+</p:sld>
+</file>
+
+<file path=ppt/slides/slide34.xml><?xml version="1.0" encoding="utf-8"?>
+<p:sld xmlns:a="http://schemas.openxmlformats.org/drawingml/2006/main" xmlns:r="http://schemas.openxmlformats.org/officeDocument/2006/relationships" xmlns:p="http://schemas.openxmlformats.org/presentationml/2006/main">
+  <p:cSld>
+    <p:spTree>
+      <p:nvGrpSpPr>
+        <p:cNvPr id="1" name=""/>
+        <p:cNvGrpSpPr/>
+        <p:nvPr/>
+      </p:nvGrpSpPr>
+      <p:grpSpPr>
+        <a:xfrm>
+          <a:off x="0" y="0"/>
+          <a:ext cx="0" cy="0"/>
+          <a:chOff x="0" y="0"/>
+          <a:chExt cx="0" cy="0"/>
+        </a:xfrm>
+      </p:grpSpPr>
+      <p:sp>
+        <p:nvSpPr>
+          <p:cNvPr id="2" name="Title 1"/>
+          <p:cNvSpPr>
+            <a:spLocks noGrp="1"/>
+          </p:cNvSpPr>
+          <p:nvPr>
+            <p:ph type="title"/>
+          </p:nvPr>
+        </p:nvSpPr>
+        <p:spPr>
+          <a:xfrm>
+            <a:off x="0" y="0"/>
+            <a:ext cx="9144000" cy="602780"/>
+          </a:xfrm>
+          <a:solidFill>
+            <a:srgbClr val="70121D"/>
+          </a:solidFill>
+        </p:spPr>
+        <p:txBody>
+          <a:bodyPr/>
+          <a:lstStyle/>
+          <a:p>
+            <a:pPr lvl="0" indent="0" marL="0">
+              <a:buNone/>
+            </a:pPr>
+            <a:r>
+              <a:rPr/>
+              <a:t>Kruskal-Wallis Test: Overview</a:t>
+            </a:r>
+          </a:p>
+        </p:txBody>
+      </p:sp>
+      <mc:AlternateContent xmlns:mc="http://schemas.openxmlformats.org/markup-compatibility/2006">
+        <mc:Choice xmlns:a14="http://schemas.microsoft.com/office/drawing/2010/main" Requires="a14">
+          <p:sp>
+            <p:nvSpPr>
+              <p:cNvPr id="3" name="Content Placeholder 2"/>
+              <p:cNvSpPr>
+                <a:spLocks noGrp="1"/>
+              </p:cNvSpPr>
+              <p:nvPr>
+                <p:ph idx="1" sz="half"/>
+              </p:nvPr>
+            </p:nvSpPr>
+            <p:spPr/>
+            <p:txBody>
+              <a:bodyPr/>
+              <a:lstStyle/>
+              <a:p>
+                <a:pPr lvl="0" indent="0" marL="0">
+                  <a:spcBef>
+                    <a:spcPts val="3000"/>
+                  </a:spcBef>
+                  <a:buNone/>
+                </a:pPr>
+                <a:r>
+                  <a:rPr b="1"/>
+                  <a:t>The Kruskal-Wallis H Test</a:t>
+                </a:r>
+              </a:p>
+              <a:p>
+                <a:pPr lvl="0" indent="0" marL="0">
+                  <a:buNone/>
+                </a:pPr>
+                <a:r>
+                  <a:rPr b="1"/>
+                  <a:t>Most common non-parametric alternative to one-way ANOVA</a:t>
+                </a:r>
+              </a:p>
+              <a:p>
+                <a:pPr lvl="0"/>
+                <a:r>
+                  <a:rPr b="1"/>
+                  <a:t>What it does:</a:t>
+                </a:r>
+              </a:p>
+              <a:p>
+                <a:pPr lvl="1"/>
+                <a:r>
+                  <a:rPr/>
+                  <a:t>Ranks all observations from smallest to largest</a:t>
+                </a:r>
+              </a:p>
+              <a:p>
+                <a:pPr lvl="1"/>
+                <a:r>
+                  <a:rPr/>
+                  <a:t>Compares the sum of ranks between groups</a:t>
+                </a:r>
+              </a:p>
+              <a:p>
+                <a:pPr lvl="1"/>
+                <a:r>
+                  <a:rPr/>
+                  <a:t>Tests if groups come from the same distribution</a:t>
+                </a:r>
+              </a:p>
+              <a:p>
+                <a:pPr lvl="0"/>
+                <a:r>
+                  <a:rPr b="1"/>
+                  <a:t>Hypotheses:</a:t>
+                </a:r>
+              </a:p>
+              <a:p>
+                <a:pPr lvl="1"/>
+                <a:r>
+                  <a:rPr b="1"/>
+                  <a:t>H₀</a:t>
+                </a:r>
+                <a:r>
+                  <a:rPr/>
+                  <a:t>: All groups have the same distribution (same median)</a:t>
+                </a:r>
+              </a:p>
+              <a:p>
+                <a:pPr lvl="1"/>
+                <a:r>
+                  <a:rPr b="1"/>
+                  <a:t>H₁</a:t>
+                </a:r>
+                <a:r>
+                  <a:rPr/>
+                  <a:t>: At least one group has a different distribution</a:t>
+                </a:r>
+              </a:p>
+              <a:p>
+                <a:pPr lvl="0"/>
+                <a:r>
+                  <a:rPr b="1"/>
+                  <a:t>Test statistic (H):</a:t>
+                </a:r>
+              </a:p>
+              <a:p>
+                <a:pPr lvl="0"/>
+                <a14:m>
+                  <m:oMathPara xmlns:m="http://schemas.openxmlformats.org/officeDocument/2006/math">
+                    <m:oMathParaPr>
+                      <m:jc m:val="center"/>
+                    </m:oMathParaPr>
+                    <m:oMath>
+                      <m:r>
+                        <m:t>H</m:t>
+                      </m:r>
+                      <m:r>
+                        <m:rPr>
+                          <m:sty m:val="p"/>
+                        </m:rPr>
+                        <m:t>=</m:t>
+                      </m:r>
+                      <m:f>
+                        <m:fPr>
+                          <m:type m:val="bar"/>
+                        </m:fPr>
+                        <m:num>
+                          <m:r>
+                            <m:t>12</m:t>
+                          </m:r>
+                        </m:num>
+                        <m:den>
+                          <m:r>
+                            <m:t>N</m:t>
+                          </m:r>
+                          <m:d>
+                            <m:dPr>
+                              <m:begChr m:val="("/>
+                              <m:sepChr m:val=""/>
+                              <m:endChr m:val=")"/>
+                              <m:grow/>
+                            </m:dPr>
+                            <m:e>
+                              <m:r>
+                                <m:t>N</m:t>
+                              </m:r>
+                              <m:r>
+                                <m:rPr>
+                                  <m:sty m:val="p"/>
+                                </m:rPr>
+                                <m:t>+</m:t>
+                              </m:r>
+                              <m:r>
+                                <m:t>1</m:t>
+                              </m:r>
+                            </m:e>
+                          </m:d>
+                        </m:den>
+                      </m:f>
+                      <m:nary>
+                        <m:naryPr>
+                          <m:chr m:val="∑"/>
+                          <m:limLoc m:val="undOvr"/>
+                          <m:subHide m:val="off"/>
+                          <m:supHide m:val="off"/>
+                        </m:naryPr>
+                        <m:sub>
+                          <m:r>
+                            <m:t>i</m:t>
+                          </m:r>
+                          <m:r>
+                            <m:rPr>
+                              <m:sty m:val="p"/>
+                            </m:rPr>
+                            <m:t>=</m:t>
+                          </m:r>
+                          <m:r>
+                            <m:t>1</m:t>
+                          </m:r>
+                        </m:sub>
+                        <m:sup>
+                          <m:r>
+                            <m:t>k</m:t>
+                          </m:r>
+                        </m:sup>
+                        <m:e>
+                          <m:sSub>
+                            <m:e>
+                              <m:r>
+                                <m:t>n</m:t>
+                              </m:r>
+                            </m:e>
+                            <m:sub>
+                              <m:r>
+                                <m:t>i</m:t>
+                              </m:r>
+                            </m:sub>
+                          </m:sSub>
+                        </m:e>
+                      </m:nary>
+                      <m:sSup>
+                        <m:e>
+                          <m:d>
+                            <m:dPr>
+                              <m:begChr m:val="("/>
+                              <m:sepChr m:val=""/>
+                              <m:endChr m:val=")"/>
+                              <m:grow/>
+                            </m:dPr>
+                            <m:e>
+                              <m:sSub>
+                                <m:e>
+                                  <m:acc>
+                                    <m:accPr>
+                                      <m:chr m:val="‾"/>
+                                    </m:accPr>
+                                    <m:e>
+                                      <m:r>
+                                        <m:t>R</m:t>
+                                      </m:r>
+                                    </m:e>
+                                  </m:acc>
+                                </m:e>
+                                <m:sub>
+                                  <m:r>
+                                    <m:t>i</m:t>
+                                  </m:r>
+                                </m:sub>
+                              </m:sSub>
+                              <m:r>
+                                <m:rPr>
+                                  <m:sty m:val="p"/>
+                                </m:rPr>
+                                <m:t>−</m:t>
+                              </m:r>
+                              <m:acc>
+                                <m:accPr>
+                                  <m:chr m:val="‾"/>
+                                </m:accPr>
+                                <m:e>
+                                  <m:r>
+                                    <m:t>R</m:t>
+                                  </m:r>
+                                </m:e>
+                              </m:acc>
+                            </m:e>
+                          </m:d>
+                        </m:e>
+                        <m:sup>
+                          <m:r>
+                            <m:t>2</m:t>
+                          </m:r>
+                        </m:sup>
+                      </m:sSup>
+                      <m:r>
+                        <m:rPr>
+                          <m:sty m:val="p"/>
+                        </m:rPr>
+                        <m:t>−</m:t>
+                      </m:r>
+                      <m:r>
+                        <m:t>3</m:t>
+                      </m:r>
+                      <m:d>
+                        <m:dPr>
+                          <m:begChr m:val="("/>
+                          <m:sepChr m:val=""/>
+                          <m:endChr m:val=")"/>
+                          <m:grow/>
+                        </m:dPr>
+                        <m:e>
+                          <m:r>
+                            <m:t>N</m:t>
+                          </m:r>
+                          <m:r>
+                            <m:rPr>
+                              <m:sty m:val="p"/>
+                            </m:rPr>
+                            <m:t>+</m:t>
+                          </m:r>
+                          <m:r>
+                            <m:t>1</m:t>
+                          </m:r>
+                        </m:e>
+                      </m:d>
+                    </m:oMath>
+                  </m:oMathPara>
+                </a14:m>
+              </a:p>
+              <a:p>
+                <a:pPr lvl="0"/>
+                <a:r>
+                  <a:rPr/>
+                  <a:t>Where:</a:t>
+                </a:r>
+              </a:p>
+              <a:p>
+                <a:pPr lvl="1"/>
+                <a:r>
+                  <a:rPr/>
+                  <a:t>N = total sample size</a:t>
+                </a:r>
+              </a:p>
+              <a:p>
+                <a:pPr lvl="1"/>
+                <a:r>
+                  <a:rPr/>
+                  <a:t>k = number of groups</a:t>
+                </a:r>
+              </a:p>
+              <a:p>
+                <a:pPr lvl="1"/>
+                <a14:m>
+                  <m:oMath xmlns:m="http://schemas.openxmlformats.org/officeDocument/2006/math">
+                    <m:sSub>
+                      <m:e>
+                        <m:acc>
+                          <m:accPr>
+                            <m:chr m:val="‾"/>
+                          </m:accPr>
+                          <m:e>
+                            <m:r>
+                              <m:t>R</m:t>
+                            </m:r>
+                          </m:e>
+                        </m:acc>
+                      </m:e>
+                      <m:sub>
+                        <m:r>
+                          <m:t>i</m:t>
+                        </m:r>
+                      </m:sub>
+                    </m:sSub>
+                  </m:oMath>
+                </a14:m>
+                <a:r>
+                  <a:rPr/>
+                  <a:t> = mean rank for group i</a:t>
+                </a:r>
+              </a:p>
+              <a:p>
+                <a:pPr lvl="1"/>
+                <a14:m>
+                  <m:oMath xmlns:m="http://schemas.openxmlformats.org/officeDocument/2006/math">
+                    <m:acc>
+                      <m:accPr>
+                        <m:chr m:val="‾"/>
+                      </m:accPr>
+                      <m:e>
+                        <m:r>
+                          <m:t>R</m:t>
+                        </m:r>
+                      </m:e>
+                    </m:acc>
+                  </m:oMath>
+                </a14:m>
+                <a:r>
+                  <a:rPr/>
+                  <a:t>= overall mean rank = (N+1)/2</a:t>
+                </a:r>
+              </a:p>
+              <a:p>
+                <a:pPr lvl="1"/>
+                <a:r>
+                  <a:rPr/>
+                  <a:t>nᵢ = sample size for group i</a:t>
+                </a:r>
+              </a:p>
+              <a:p>
+                <a:pPr lvl="1"/>
+                <a:r>
+                  <a:rPr/>
+                  <a:t>constant 12 comes from the variance of ranks in a uniform distribution</a:t>
+                </a:r>
+              </a:p>
+              <a:p>
+                <a:pPr lvl="0"/>
+                <a:r>
+                  <a:rPr b="1"/>
+                  <a:t>Distribution:</a:t>
+                </a:r>
+                <a:r>
+                  <a:rPr/>
+                  <a:t> Approximated by χ² with (k-1) degrees of freedom</a:t>
+                </a:r>
+              </a:p>
+            </p:txBody>
+          </p:sp>
+        </mc:Choice>
+      </mc:AlternateContent>
+      <p:sp>
+        <p:nvSpPr>
+          <p:cNvPr id="4" name="Content Placeholder 3"/>
+          <p:cNvSpPr>
+            <a:spLocks noGrp="1"/>
+          </p:cNvSpPr>
+          <p:nvPr>
+            <p:ph idx="2" sz="half"/>
+          </p:nvPr>
+        </p:nvSpPr>
+        <p:spPr/>
+        <p:txBody>
+          <a:bodyPr/>
+          <a:lstStyle/>
+          <a:p>
+            <a:pPr lvl="0" indent="0" marL="0">
+              <a:spcBef>
+                <a:spcPts val="3000"/>
+              </a:spcBef>
+              <a:buNone/>
+            </a:pPr>
+            <a:r>
+              <a:rPr b="1"/>
+              <a:t>Assumptions of Kruskal-Wallis</a:t>
+            </a:r>
+          </a:p>
+          <a:p>
+            <a:pPr lvl="0" indent="0" marL="0">
+              <a:buNone/>
+            </a:pPr>
+            <a:r>
+              <a:rPr b="1"/>
+              <a:t>Much more relaxed than parametric ANOVA:</a:t>
+            </a:r>
+          </a:p>
+          <a:p>
+            <a:pPr lvl="0"/>
+            <a:r>
+              <a:rPr b="1"/>
+              <a:t>Independence</a:t>
+            </a:r>
+            <a:r>
+              <a:rPr/>
+              <a:t>: Observations must be independent</a:t>
+            </a:r>
+          </a:p>
+          <a:p>
+            <a:pPr lvl="1"/>
+            <a:r>
+              <a:rPr/>
+              <a:t>Same as parametric ANOVA</a:t>
+            </a:r>
+          </a:p>
+          <a:p>
+            <a:pPr lvl="1"/>
+            <a:r>
+              <a:rPr/>
+              <a:t>Still critical!</a:t>
+            </a:r>
+          </a:p>
+          <a:p>
+            <a:pPr lvl="0"/>
+            <a:r>
+              <a:rPr b="1"/>
+              <a:t>Similar distribution shapes</a:t>
+            </a:r>
+            <a:r>
+              <a:rPr/>
+              <a:t>: Groups should have similar distribution shapes (same spread/variance)</a:t>
+            </a:r>
+          </a:p>
+          <a:p>
+            <a:pPr lvl="1"/>
+            <a:r>
+              <a:rPr/>
+              <a:t>If violated, interprets as differences in distributions generally</a:t>
+            </a:r>
+          </a:p>
+          <a:p>
+            <a:pPr lvl="1"/>
+            <a:r>
+              <a:rPr/>
+              <a:t>Not just medians</a:t>
+            </a:r>
+          </a:p>
+          <a:p>
+            <a:pPr lvl="0"/>
+            <a:r>
+              <a:rPr b="1"/>
+              <a:t>Ordinal or continuous data</a:t>
+            </a:r>
+            <a:r>
+              <a:rPr/>
+              <a:t>: Response variable should be at least ordinal</a:t>
+            </a:r>
+          </a:p>
+          <a:p>
+            <a:pPr lvl="0"/>
+            <a:r>
+              <a:rPr b="1"/>
+              <a:t>What’s NOT assumed:</a:t>
+            </a:r>
+          </a:p>
+          <a:p>
+            <a:pPr lvl="1"/>
+            <a:r>
+              <a:rPr/>
+              <a:t>✗ Normal distribution</a:t>
+            </a:r>
+          </a:p>
+          <a:p>
+            <a:pPr lvl="1"/>
+            <a:r>
+              <a:rPr/>
+              <a:t>✗ Equal variances (though helps interpretation)</a:t>
+            </a:r>
+          </a:p>
+          <a:p>
+            <a:pPr lvl="1"/>
+            <a:r>
+              <a:rPr/>
+              <a:t>✗ Specific distribution shape</a:t>
+            </a:r>
+          </a:p>
+        </p:txBody>
+      </p:sp>
+    </p:spTree>
+  </p:cSld>
+</p:sld>
+</file>
+
+<file path=ppt/slides/slide35.xml><?xml version="1.0" encoding="utf-8"?>
+<p:sld xmlns:a="http://schemas.openxmlformats.org/drawingml/2006/main" xmlns:r="http://schemas.openxmlformats.org/officeDocument/2006/relationships" xmlns:p="http://schemas.openxmlformats.org/presentationml/2006/main">
+  <p:cSld>
+    <p:spTree>
+      <p:nvGrpSpPr>
+        <p:cNvPr id="1" name=""/>
+        <p:cNvGrpSpPr/>
+        <p:nvPr/>
+      </p:nvGrpSpPr>
+      <p:grpSpPr>
+        <a:xfrm>
+          <a:off x="0" y="0"/>
+          <a:ext cx="0" cy="0"/>
+          <a:chOff x="0" y="0"/>
+          <a:chExt cx="0" cy="0"/>
+        </a:xfrm>
+      </p:grpSpPr>
+      <p:sp>
+        <p:nvSpPr>
+          <p:cNvPr id="2" name="Title 1"/>
+          <p:cNvSpPr>
+            <a:spLocks noGrp="1"/>
+          </p:cNvSpPr>
+          <p:nvPr>
+            <p:ph type="title"/>
+          </p:nvPr>
+        </p:nvSpPr>
+        <p:spPr>
+          <a:xfrm>
+            <a:off x="139485" y="78119"/>
+            <a:ext cx="8229600" cy="607682"/>
+          </a:xfrm>
+        </p:spPr>
+        <p:txBody>
+          <a:bodyPr/>
+          <a:lstStyle/>
+          <a:p>
+            <a:pPr lvl="0" indent="0" marL="0">
+              <a:buNone/>
+            </a:pPr>
+            <a:r>
+              <a:rPr/>
+              <a:t>Demonstrating Assumption Violations</a:t>
+            </a:r>
+          </a:p>
+        </p:txBody>
+      </p:sp>
+      <p:sp>
+        <p:nvSpPr>
+          <p:cNvPr id="3" name="Text Placeholder 2"/>
+          <p:cNvSpPr>
+            <a:spLocks noGrp="1"/>
+          </p:cNvSpPr>
+          <p:nvPr>
+            <p:ph idx="1" type="body"/>
+          </p:nvPr>
+        </p:nvSpPr>
+        <p:spPr/>
+        <p:txBody>
+          <a:bodyPr/>
+          <a:lstStyle/>
+          <a:p>
+            <a:pPr lvl="0" indent="0" marL="0">
+              <a:spcBef>
+                <a:spcPts val="3000"/>
+              </a:spcBef>
+              <a:buNone/>
+            </a:pPr>
+            <a:r>
+              <a:rPr b="1"/>
+              <a:t>Creating Data That Violates Assumptions</a:t>
+            </a:r>
+          </a:p>
+          <a:p>
+            <a:pPr lvl="0" indent="0" marL="0">
+              <a:buNone/>
+            </a:pPr>
+            <a:r>
+              <a:rPr b="1"/>
+              <a:t>Let’s create a modified dataset with clear violations:</a:t>
+            </a:r>
+          </a:p>
+          <a:p>
+            <a:pPr lvl="0" indent="0">
+              <a:buNone/>
+            </a:pPr>
+            <a:r>
+              <a:rPr>
+                <a:solidFill>
+                  <a:srgbClr val="5E5E5E"/>
+                </a:solidFill>
+                <a:latin typeface="Courier"/>
+              </a:rPr>
+              <a:t># Create data with outliers and skewness</a:t>
+            </a:r>
+            <a:br/>
+            <a:r>
+              <a:rPr>
+                <a:solidFill>
+                  <a:srgbClr val="4758AB"/>
+                </a:solidFill>
+                <a:latin typeface="Courier"/>
+              </a:rPr>
+              <a:t>set.seed</a:t>
+            </a:r>
+            <a:r>
+              <a:rPr>
+                <a:solidFill>
+                  <a:srgbClr val="003B4F"/>
+                </a:solidFill>
+                <a:latin typeface="Courier"/>
+              </a:rPr>
+              <a:t>(</a:t>
+            </a:r>
+            <a:r>
+              <a:rPr>
+                <a:solidFill>
+                  <a:srgbClr val="AD0000"/>
+                </a:solidFill>
+                <a:latin typeface="Courier"/>
+              </a:rPr>
+              <a:t>42</a:t>
+            </a:r>
+            <a:r>
+              <a:rPr>
+                <a:solidFill>
+                  <a:srgbClr val="003B4F"/>
+                </a:solidFill>
+                <a:latin typeface="Courier"/>
+              </a:rPr>
+              <a:t>)</a:t>
+            </a:r>
+            <a:br/>
+            <a:r>
+              <a:rPr>
+                <a:solidFill>
+                  <a:srgbClr val="003B4F"/>
+                </a:solidFill>
+                <a:latin typeface="Courier"/>
+              </a:rPr>
+              <a:t>violated_circ_df &lt;- circ_data </a:t>
+            </a:r>
+            <a:r>
+              <a:rPr>
+                <a:solidFill>
+                  <a:srgbClr val="5E5E5E"/>
+                </a:solidFill>
+                <a:latin typeface="Courier"/>
+              </a:rPr>
+              <a:t>%&gt;%</a:t>
+            </a:r>
+            <a:br/>
+            <a:r>
+              <a:rPr>
+                <a:solidFill>
+                  <a:srgbClr val="003B4F"/>
+                </a:solidFill>
+                <a:latin typeface="Courier"/>
+              </a:rPr>
+              <a:t>  </a:t>
+            </a:r>
+            <a:r>
+              <a:rPr>
+                <a:solidFill>
+                  <a:srgbClr val="4758AB"/>
+                </a:solidFill>
+                <a:latin typeface="Courier"/>
+              </a:rPr>
+              <a:t>mutate</a:t>
+            </a:r>
+            <a:r>
+              <a:rPr>
+                <a:solidFill>
+                  <a:srgbClr val="003B4F"/>
+                </a:solidFill>
+                <a:latin typeface="Courier"/>
+              </a:rPr>
+              <a:t>(</a:t>
+            </a:r>
+            <a:br/>
+            <a:r>
+              <a:rPr>
+                <a:solidFill>
+                  <a:srgbClr val="003B4F"/>
+                </a:solidFill>
+                <a:latin typeface="Courier"/>
+              </a:rPr>
+              <a:t>    </a:t>
+            </a:r>
+            <a:r>
+              <a:rPr>
+                <a:solidFill>
+                  <a:srgbClr val="657422"/>
+                </a:solidFill>
+                <a:latin typeface="Courier"/>
+              </a:rPr>
+              <a:t>phase_shift_violated =</a:t>
+            </a:r>
+            <a:r>
+              <a:rPr>
+                <a:solidFill>
+                  <a:srgbClr val="003B4F"/>
+                </a:solidFill>
+                <a:latin typeface="Courier"/>
+              </a:rPr>
+              <a:t> </a:t>
+            </a:r>
+            <a:r>
+              <a:rPr>
+                <a:solidFill>
+                  <a:srgbClr val="4758AB"/>
+                </a:solidFill>
+                <a:latin typeface="Courier"/>
+              </a:rPr>
+              <a:t>case_when</a:t>
+            </a:r>
+            <a:r>
+              <a:rPr>
+                <a:solidFill>
+                  <a:srgbClr val="003B4F"/>
+                </a:solidFill>
+                <a:latin typeface="Courier"/>
+              </a:rPr>
+              <a:t>(</a:t>
+            </a:r>
+            <a:br/>
+            <a:r>
+              <a:rPr>
+                <a:solidFill>
+                  <a:srgbClr val="003B4F"/>
+                </a:solidFill>
+                <a:latin typeface="Courier"/>
+              </a:rPr>
+              <a:t>      treatment </a:t>
+            </a:r>
+            <a:r>
+              <a:rPr>
+                <a:solidFill>
+                  <a:srgbClr val="5E5E5E"/>
+                </a:solidFill>
+                <a:latin typeface="Courier"/>
+              </a:rPr>
+              <a:t>==</a:t>
+            </a:r>
+            <a:r>
+              <a:rPr>
+                <a:solidFill>
+                  <a:srgbClr val="003B4F"/>
+                </a:solidFill>
+                <a:latin typeface="Courier"/>
+              </a:rPr>
+              <a:t> </a:t>
+            </a:r>
+            <a:r>
+              <a:rPr>
+                <a:solidFill>
+                  <a:srgbClr val="20794D"/>
+                </a:solidFill>
+                <a:latin typeface="Courier"/>
+              </a:rPr>
+              <a:t>"Control"</a:t>
+            </a:r>
+            <a:r>
+              <a:rPr>
+                <a:solidFill>
+                  <a:srgbClr val="003B4F"/>
+                </a:solidFill>
+                <a:latin typeface="Courier"/>
+              </a:rPr>
+              <a:t> </a:t>
+            </a:r>
+            <a:r>
+              <a:rPr>
+                <a:solidFill>
+                  <a:srgbClr val="5E5E5E"/>
+                </a:solidFill>
+                <a:latin typeface="Courier"/>
+              </a:rPr>
+              <a:t>~</a:t>
+            </a:r>
+            <a:r>
+              <a:rPr>
+                <a:solidFill>
+                  <a:srgbClr val="003B4F"/>
+                </a:solidFill>
+                <a:latin typeface="Courier"/>
+              </a:rPr>
+              <a:t> phase_shift,</a:t>
+            </a:r>
+            <a:br/>
+            <a:r>
+              <a:rPr>
+                <a:solidFill>
+                  <a:srgbClr val="003B4F"/>
+                </a:solidFill>
+                <a:latin typeface="Courier"/>
+              </a:rPr>
+              <a:t>      treatment </a:t>
+            </a:r>
+            <a:r>
+              <a:rPr>
+                <a:solidFill>
+                  <a:srgbClr val="5E5E5E"/>
+                </a:solidFill>
+                <a:latin typeface="Courier"/>
+              </a:rPr>
+              <a:t>==</a:t>
+            </a:r>
+            <a:r>
+              <a:rPr>
+                <a:solidFill>
+                  <a:srgbClr val="003B4F"/>
+                </a:solidFill>
+                <a:latin typeface="Courier"/>
+              </a:rPr>
+              <a:t> </a:t>
+            </a:r>
+            <a:r>
+              <a:rPr>
+                <a:solidFill>
+                  <a:srgbClr val="20794D"/>
+                </a:solidFill>
+                <a:latin typeface="Courier"/>
+              </a:rPr>
+              <a:t>"Knees"</a:t>
+            </a:r>
+            <a:r>
+              <a:rPr>
+                <a:solidFill>
+                  <a:srgbClr val="003B4F"/>
+                </a:solidFill>
+                <a:latin typeface="Courier"/>
+              </a:rPr>
+              <a:t> </a:t>
+            </a:r>
+            <a:r>
+              <a:rPr>
+                <a:solidFill>
+                  <a:srgbClr val="5E5E5E"/>
+                </a:solidFill>
+                <a:latin typeface="Courier"/>
+              </a:rPr>
+              <a:t>~</a:t>
+            </a:r>
+            <a:r>
+              <a:rPr>
+                <a:solidFill>
+                  <a:srgbClr val="003B4F"/>
+                </a:solidFill>
+                <a:latin typeface="Courier"/>
+              </a:rPr>
+              <a:t> phase_shift </a:t>
+            </a:r>
+            <a:r>
+              <a:rPr>
+                <a:solidFill>
+                  <a:srgbClr val="5E5E5E"/>
+                </a:solidFill>
+                <a:latin typeface="Courier"/>
+              </a:rPr>
+              <a:t>*</a:t>
+            </a:r>
+            <a:r>
+              <a:rPr>
+                <a:solidFill>
+                  <a:srgbClr val="003B4F"/>
+                </a:solidFill>
+                <a:latin typeface="Courier"/>
+              </a:rPr>
+              <a:t> </a:t>
+            </a:r>
+            <a:r>
+              <a:rPr>
+                <a:solidFill>
+                  <a:srgbClr val="AD0000"/>
+                </a:solidFill>
+                <a:latin typeface="Courier"/>
+              </a:rPr>
+              <a:t>3.25</a:t>
+            </a:r>
+            <a:r>
+              <a:rPr>
+                <a:solidFill>
+                  <a:srgbClr val="003B4F"/>
+                </a:solidFill>
+                <a:latin typeface="Courier"/>
+              </a:rPr>
+              <a:t>,</a:t>
+            </a:r>
+            <a:br/>
+            <a:r>
+              <a:rPr>
+                <a:solidFill>
+                  <a:srgbClr val="003B4F"/>
+                </a:solidFill>
+                <a:latin typeface="Courier"/>
+              </a:rPr>
+              <a:t>      treatment </a:t>
+            </a:r>
+            <a:r>
+              <a:rPr>
+                <a:solidFill>
+                  <a:srgbClr val="5E5E5E"/>
+                </a:solidFill>
+                <a:latin typeface="Courier"/>
+              </a:rPr>
+              <a:t>==</a:t>
+            </a:r>
+            <a:r>
+              <a:rPr>
+                <a:solidFill>
+                  <a:srgbClr val="003B4F"/>
+                </a:solidFill>
+                <a:latin typeface="Courier"/>
+              </a:rPr>
+              <a:t> </a:t>
+            </a:r>
+            <a:r>
+              <a:rPr>
+                <a:solidFill>
+                  <a:srgbClr val="20794D"/>
+                </a:solidFill>
+                <a:latin typeface="Courier"/>
+              </a:rPr>
+              <a:t>"Eyes"</a:t>
+            </a:r>
+            <a:r>
+              <a:rPr>
+                <a:solidFill>
+                  <a:srgbClr val="003B4F"/>
+                </a:solidFill>
+                <a:latin typeface="Courier"/>
+              </a:rPr>
+              <a:t> </a:t>
+            </a:r>
+            <a:r>
+              <a:rPr>
+                <a:solidFill>
+                  <a:srgbClr val="5E5E5E"/>
+                </a:solidFill>
+                <a:latin typeface="Courier"/>
+              </a:rPr>
+              <a:t>~</a:t>
+            </a:r>
+            <a:r>
+              <a:rPr>
+                <a:solidFill>
+                  <a:srgbClr val="003B4F"/>
+                </a:solidFill>
+                <a:latin typeface="Courier"/>
+              </a:rPr>
+              <a:t> {</a:t>
+            </a:r>
+            <a:br/>
+            <a:r>
+              <a:rPr>
+                <a:solidFill>
+                  <a:srgbClr val="003B4F"/>
+                </a:solidFill>
+                <a:latin typeface="Courier"/>
+              </a:rPr>
+              <a:t>        n &lt;- </a:t>
+            </a:r>
+            <a:r>
+              <a:rPr>
+                <a:solidFill>
+                  <a:srgbClr val="4758AB"/>
+                </a:solidFill>
+                <a:latin typeface="Courier"/>
+              </a:rPr>
+              <a:t>length</a:t>
+            </a:r>
+            <a:r>
+              <a:rPr>
+                <a:solidFill>
+                  <a:srgbClr val="003B4F"/>
+                </a:solidFill>
+                <a:latin typeface="Courier"/>
+              </a:rPr>
+              <a:t>(phase_shift)</a:t>
+            </a:r>
+            <a:br/>
+            <a:r>
+              <a:rPr>
+                <a:solidFill>
+                  <a:srgbClr val="003B4F"/>
+                </a:solidFill>
+                <a:latin typeface="Courier"/>
+              </a:rPr>
+              <a:t>        </a:t>
+            </a:r>
+            <a:r>
+              <a:rPr>
+                <a:solidFill>
+                  <a:srgbClr val="4758AB"/>
+                </a:solidFill>
+                <a:latin typeface="Courier"/>
+              </a:rPr>
+              <a:t>c</a:t>
+            </a:r>
+            <a:r>
+              <a:rPr>
+                <a:solidFill>
+                  <a:srgbClr val="003B4F"/>
+                </a:solidFill>
+                <a:latin typeface="Courier"/>
+              </a:rPr>
+              <a:t>(phase_shift[</a:t>
+            </a:r>
+            <a:r>
+              <a:rPr>
+                <a:solidFill>
+                  <a:srgbClr val="AD0000"/>
+                </a:solidFill>
+                <a:latin typeface="Courier"/>
+              </a:rPr>
+              <a:t>1</a:t>
+            </a:r>
+            <a:r>
+              <a:rPr>
+                <a:solidFill>
+                  <a:srgbClr val="5E5E5E"/>
+                </a:solidFill>
+                <a:latin typeface="Courier"/>
+              </a:rPr>
+              <a:t>:</a:t>
+            </a:r>
+            <a:r>
+              <a:rPr>
+                <a:solidFill>
+                  <a:srgbClr val="003B4F"/>
+                </a:solidFill>
+                <a:latin typeface="Courier"/>
+              </a:rPr>
+              <a:t>(n</a:t>
+            </a:r>
+            <a:r>
+              <a:rPr>
+                <a:solidFill>
+                  <a:srgbClr val="AD0000"/>
+                </a:solidFill>
+                <a:latin typeface="Courier"/>
+              </a:rPr>
+              <a:t>-2</a:t>
+            </a:r>
+            <a:r>
+              <a:rPr>
+                <a:solidFill>
+                  <a:srgbClr val="003B4F"/>
+                </a:solidFill>
+                <a:latin typeface="Courier"/>
+              </a:rPr>
+              <a:t>)], phase_shift[(n</a:t>
+            </a:r>
+            <a:r>
+              <a:rPr>
+                <a:solidFill>
+                  <a:srgbClr val="AD0000"/>
+                </a:solidFill>
+                <a:latin typeface="Courier"/>
+              </a:rPr>
+              <a:t>-1</a:t>
+            </a:r>
+            <a:r>
+              <a:rPr>
+                <a:solidFill>
+                  <a:srgbClr val="003B4F"/>
+                </a:solidFill>
+                <a:latin typeface="Courier"/>
+              </a:rPr>
+              <a:t>)</a:t>
+            </a:r>
+            <a:r>
+              <a:rPr>
+                <a:solidFill>
+                  <a:srgbClr val="5E5E5E"/>
+                </a:solidFill>
+                <a:latin typeface="Courier"/>
+              </a:rPr>
+              <a:t>:</a:t>
+            </a:r>
+            <a:r>
+              <a:rPr>
+                <a:solidFill>
+                  <a:srgbClr val="003B4F"/>
+                </a:solidFill>
+                <a:latin typeface="Courier"/>
+              </a:rPr>
+              <a:t>n] </a:t>
+            </a:r>
+            <a:r>
+              <a:rPr>
+                <a:solidFill>
+                  <a:srgbClr val="5E5E5E"/>
+                </a:solidFill>
+                <a:latin typeface="Courier"/>
+              </a:rPr>
+              <a:t>-</a:t>
+            </a:r>
+            <a:r>
+              <a:rPr>
+                <a:solidFill>
+                  <a:srgbClr val="003B4F"/>
+                </a:solidFill>
+                <a:latin typeface="Courier"/>
+              </a:rPr>
+              <a:t> </a:t>
+            </a:r>
+            <a:r>
+              <a:rPr>
+                <a:solidFill>
+                  <a:srgbClr val="AD0000"/>
+                </a:solidFill>
+                <a:latin typeface="Courier"/>
+              </a:rPr>
+              <a:t>7</a:t>
+            </a:r>
+            <a:r>
+              <a:rPr>
+                <a:solidFill>
+                  <a:srgbClr val="003B4F"/>
+                </a:solidFill>
+                <a:latin typeface="Courier"/>
+              </a:rPr>
+              <a:t>)</a:t>
+            </a:r>
+            <a:br/>
+            <a:r>
+              <a:rPr>
+                <a:solidFill>
+                  <a:srgbClr val="003B4F"/>
+                </a:solidFill>
+                <a:latin typeface="Courier"/>
+              </a:rPr>
+              <a:t>      }</a:t>
+            </a:r>
+            <a:br/>
+            <a:r>
+              <a:rPr>
+                <a:solidFill>
+                  <a:srgbClr val="003B4F"/>
+                </a:solidFill>
+                <a:latin typeface="Courier"/>
+              </a:rPr>
+              <a:t>    )</a:t>
+            </a:r>
+            <a:br/>
+            <a:r>
+              <a:rPr>
+                <a:solidFill>
+                  <a:srgbClr val="003B4F"/>
+                </a:solidFill>
+                <a:latin typeface="Courier"/>
+              </a:rPr>
+              <a:t>  )</a:t>
+            </a:r>
+            <a:br/>
+            <a:br/>
+            <a:r>
+              <a:rPr>
+                <a:solidFill>
+                  <a:srgbClr val="5E5E5E"/>
+                </a:solidFill>
+                <a:latin typeface="Courier"/>
+              </a:rPr>
+              <a:t># Fit model with violated assumptions</a:t>
+            </a:r>
+            <a:br/>
+            <a:r>
+              <a:rPr>
+                <a:solidFill>
+                  <a:srgbClr val="003B4F"/>
+                </a:solidFill>
+                <a:latin typeface="Courier"/>
+              </a:rPr>
+              <a:t>violated_model &lt;- </a:t>
+            </a:r>
+            <a:r>
+              <a:rPr>
+                <a:solidFill>
+                  <a:srgbClr val="4758AB"/>
+                </a:solidFill>
+                <a:latin typeface="Courier"/>
+              </a:rPr>
+              <a:t>lm</a:t>
+            </a:r>
+            <a:r>
+              <a:rPr>
+                <a:solidFill>
+                  <a:srgbClr val="003B4F"/>
+                </a:solidFill>
+                <a:latin typeface="Courier"/>
+              </a:rPr>
+              <a:t>(phase_shift_violated </a:t>
+            </a:r>
+            <a:r>
+              <a:rPr>
+                <a:solidFill>
+                  <a:srgbClr val="5E5E5E"/>
+                </a:solidFill>
+                <a:latin typeface="Courier"/>
+              </a:rPr>
+              <a:t>~</a:t>
+            </a:r>
+            <a:r>
+              <a:rPr>
+                <a:solidFill>
+                  <a:srgbClr val="003B4F"/>
+                </a:solidFill>
+                <a:latin typeface="Courier"/>
+              </a:rPr>
+              <a:t> treatment, </a:t>
+            </a:r>
+            <a:br/>
+            <a:r>
+              <a:rPr>
+                <a:solidFill>
+                  <a:srgbClr val="003B4F"/>
+                </a:solidFill>
+                <a:latin typeface="Courier"/>
+              </a:rPr>
+              <a:t>                     </a:t>
+            </a:r>
+            <a:r>
+              <a:rPr>
+                <a:solidFill>
+                  <a:srgbClr val="657422"/>
+                </a:solidFill>
+                <a:latin typeface="Courier"/>
+              </a:rPr>
+              <a:t>data =</a:t>
+            </a:r>
+            <a:r>
+              <a:rPr>
+                <a:solidFill>
+                  <a:srgbClr val="003B4F"/>
+                </a:solidFill>
+                <a:latin typeface="Courier"/>
+              </a:rPr>
+              <a:t> violated_circ_df)</a:t>
+            </a:r>
+          </a:p>
+          <a:p>
+            <a:pPr lvl="0" indent="0" marL="0">
+              <a:buNone/>
+            </a:pPr>
+            <a:r>
+              <a:rPr b="1"/>
+              <a:t>What we changed:</a:t>
+            </a:r>
+            <a:r>
+              <a:rPr/>
+              <a:t> - Increased variance in Knees group - Added extreme outliers to Eyes group - Created unequal variances and non-normality</a:t>
+            </a:r>
+          </a:p>
+        </p:txBody>
+      </p:sp>
+      <p:sp>
+        <p:nvSpPr>
+          <p:cNvPr id="5" name="Text Placeholder 4"/>
+          <p:cNvSpPr>
+            <a:spLocks noGrp="1"/>
+          </p:cNvSpPr>
+          <p:nvPr>
+            <p:ph idx="3" sz="quarter" type="body"/>
+          </p:nvPr>
+        </p:nvSpPr>
+        <p:spPr/>
+        <p:txBody>
+          <a:bodyPr/>
+          <a:lstStyle/>
+          <a:p>
+            <a:pPr lvl="0" indent="0">
+              <a:buNone/>
+            </a:pPr>
+            <a:r>
+              <a:rPr>
+                <a:solidFill>
+                  <a:srgbClr val="4758AB"/>
+                </a:solidFill>
+                <a:latin typeface="Courier"/>
+              </a:rPr>
+              <a:t>ggplot</a:t>
+            </a:r>
+            <a:r>
+              <a:rPr>
+                <a:solidFill>
+                  <a:srgbClr val="003B4F"/>
+                </a:solidFill>
+                <a:latin typeface="Courier"/>
+              </a:rPr>
+              <a:t>(violated_circ_df, </a:t>
+            </a:r>
+            <a:br/>
+            <a:r>
+              <a:rPr>
+                <a:solidFill>
+                  <a:srgbClr val="003B4F"/>
+                </a:solidFill>
+                <a:latin typeface="Courier"/>
+              </a:rPr>
+              <a:t>       </a:t>
+            </a:r>
+            <a:r>
+              <a:rPr>
+                <a:solidFill>
+                  <a:srgbClr val="4758AB"/>
+                </a:solidFill>
+                <a:latin typeface="Courier"/>
+              </a:rPr>
+              <a:t>aes</a:t>
+            </a:r>
+            <a:r>
+              <a:rPr>
+                <a:solidFill>
+                  <a:srgbClr val="003B4F"/>
+                </a:solidFill>
+                <a:latin typeface="Courier"/>
+              </a:rPr>
+              <a:t>(</a:t>
+            </a:r>
+            <a:r>
+              <a:rPr>
+                <a:solidFill>
+                  <a:srgbClr val="657422"/>
+                </a:solidFill>
+                <a:latin typeface="Courier"/>
+              </a:rPr>
+              <a:t>x =</a:t>
+            </a:r>
+            <a:r>
+              <a:rPr>
+                <a:solidFill>
+                  <a:srgbClr val="003B4F"/>
+                </a:solidFill>
+                <a:latin typeface="Courier"/>
+              </a:rPr>
+              <a:t> treatment, </a:t>
+            </a:r>
+            <a:r>
+              <a:rPr>
+                <a:solidFill>
+                  <a:srgbClr val="657422"/>
+                </a:solidFill>
+                <a:latin typeface="Courier"/>
+              </a:rPr>
+              <a:t>y =</a:t>
+            </a:r>
+            <a:r>
+              <a:rPr>
+                <a:solidFill>
+                  <a:srgbClr val="003B4F"/>
+                </a:solidFill>
+                <a:latin typeface="Courier"/>
+              </a:rPr>
+              <a:t> phase_shift_violated, </a:t>
+            </a:r>
+            <a:br/>
+            <a:r>
+              <a:rPr>
+                <a:solidFill>
+                  <a:srgbClr val="003B4F"/>
+                </a:solidFill>
+                <a:latin typeface="Courier"/>
+              </a:rPr>
+              <a:t>           </a:t>
+            </a:r>
+            <a:r>
+              <a:rPr>
+                <a:solidFill>
+                  <a:srgbClr val="657422"/>
+                </a:solidFill>
+                <a:latin typeface="Courier"/>
+              </a:rPr>
+              <a:t>color =</a:t>
+            </a:r>
+            <a:r>
+              <a:rPr>
+                <a:solidFill>
+                  <a:srgbClr val="003B4F"/>
+                </a:solidFill>
+                <a:latin typeface="Courier"/>
+              </a:rPr>
+              <a:t> treatment)) </a:t>
+            </a:r>
+            <a:r>
+              <a:rPr>
+                <a:solidFill>
+                  <a:srgbClr val="5E5E5E"/>
+                </a:solidFill>
+                <a:latin typeface="Courier"/>
+              </a:rPr>
+              <a:t>+</a:t>
+            </a:r>
+            <a:br/>
+            <a:r>
+              <a:rPr>
+                <a:solidFill>
+                  <a:srgbClr val="003B4F"/>
+                </a:solidFill>
+                <a:latin typeface="Courier"/>
+              </a:rPr>
+              <a:t>  </a:t>
+            </a:r>
+            <a:r>
+              <a:rPr>
+                <a:solidFill>
+                  <a:srgbClr val="4758AB"/>
+                </a:solidFill>
+                <a:latin typeface="Courier"/>
+              </a:rPr>
+              <a:t>geom_jitter</a:t>
+            </a:r>
+            <a:r>
+              <a:rPr>
+                <a:solidFill>
+                  <a:srgbClr val="003B4F"/>
+                </a:solidFill>
+                <a:latin typeface="Courier"/>
+              </a:rPr>
+              <a:t>(</a:t>
+            </a:r>
+            <a:r>
+              <a:rPr>
+                <a:solidFill>
+                  <a:srgbClr val="657422"/>
+                </a:solidFill>
+                <a:latin typeface="Courier"/>
+              </a:rPr>
+              <a:t>width =</a:t>
+            </a:r>
+            <a:r>
+              <a:rPr>
+                <a:solidFill>
+                  <a:srgbClr val="003B4F"/>
+                </a:solidFill>
+                <a:latin typeface="Courier"/>
+              </a:rPr>
+              <a:t> </a:t>
+            </a:r>
+            <a:r>
+              <a:rPr>
+                <a:solidFill>
+                  <a:srgbClr val="AD0000"/>
+                </a:solidFill>
+                <a:latin typeface="Courier"/>
+              </a:rPr>
+              <a:t>0.2</a:t>
+            </a:r>
+            <a:r>
+              <a:rPr>
+                <a:solidFill>
+                  <a:srgbClr val="003B4F"/>
+                </a:solidFill>
+                <a:latin typeface="Courier"/>
+              </a:rPr>
+              <a:t>, </a:t>
+            </a:r>
+            <a:r>
+              <a:rPr>
+                <a:solidFill>
+                  <a:srgbClr val="657422"/>
+                </a:solidFill>
+                <a:latin typeface="Courier"/>
+              </a:rPr>
+              <a:t>alpha =</a:t>
+            </a:r>
+            <a:r>
+              <a:rPr>
+                <a:solidFill>
+                  <a:srgbClr val="003B4F"/>
+                </a:solidFill>
+                <a:latin typeface="Courier"/>
+              </a:rPr>
+              <a:t> </a:t>
+            </a:r>
+            <a:r>
+              <a:rPr>
+                <a:solidFill>
+                  <a:srgbClr val="AD0000"/>
+                </a:solidFill>
+                <a:latin typeface="Courier"/>
+              </a:rPr>
+              <a:t>0.7</a:t>
+            </a:r>
+            <a:r>
+              <a:rPr>
+                <a:solidFill>
+                  <a:srgbClr val="003B4F"/>
+                </a:solidFill>
+                <a:latin typeface="Courier"/>
+              </a:rPr>
+              <a:t>, </a:t>
+            </a:r>
+            <a:r>
+              <a:rPr>
+                <a:solidFill>
+                  <a:srgbClr val="657422"/>
+                </a:solidFill>
+                <a:latin typeface="Courier"/>
+              </a:rPr>
+              <a:t>size =</a:t>
+            </a:r>
+            <a:r>
+              <a:rPr>
+                <a:solidFill>
+                  <a:srgbClr val="003B4F"/>
+                </a:solidFill>
+                <a:latin typeface="Courier"/>
+              </a:rPr>
+              <a:t> </a:t>
+            </a:r>
+            <a:r>
+              <a:rPr>
+                <a:solidFill>
+                  <a:srgbClr val="AD0000"/>
+                </a:solidFill>
+                <a:latin typeface="Courier"/>
+              </a:rPr>
+              <a:t>3</a:t>
+            </a:r>
+            <a:r>
+              <a:rPr>
+                <a:solidFill>
+                  <a:srgbClr val="003B4F"/>
+                </a:solidFill>
+                <a:latin typeface="Courier"/>
+              </a:rPr>
+              <a:t>) </a:t>
+            </a:r>
+            <a:r>
+              <a:rPr>
+                <a:solidFill>
+                  <a:srgbClr val="5E5E5E"/>
+                </a:solidFill>
+                <a:latin typeface="Courier"/>
+              </a:rPr>
+              <a:t>+</a:t>
+            </a:r>
+            <a:br/>
+            <a:r>
+              <a:rPr>
+                <a:solidFill>
+                  <a:srgbClr val="003B4F"/>
+                </a:solidFill>
+                <a:latin typeface="Courier"/>
+              </a:rPr>
+              <a:t>  </a:t>
+            </a:r>
+            <a:r>
+              <a:rPr>
+                <a:solidFill>
+                  <a:srgbClr val="4758AB"/>
+                </a:solidFill>
+                <a:latin typeface="Courier"/>
+              </a:rPr>
+              <a:t>geom_boxplot</a:t>
+            </a:r>
+            <a:r>
+              <a:rPr>
+                <a:solidFill>
+                  <a:srgbClr val="003B4F"/>
+                </a:solidFill>
+                <a:latin typeface="Courier"/>
+              </a:rPr>
+              <a:t>(</a:t>
+            </a:r>
+            <a:r>
+              <a:rPr>
+                <a:solidFill>
+                  <a:srgbClr val="657422"/>
+                </a:solidFill>
+                <a:latin typeface="Courier"/>
+              </a:rPr>
+              <a:t>alpha =</a:t>
+            </a:r>
+            <a:r>
+              <a:rPr>
+                <a:solidFill>
+                  <a:srgbClr val="003B4F"/>
+                </a:solidFill>
+                <a:latin typeface="Courier"/>
+              </a:rPr>
+              <a:t> </a:t>
+            </a:r>
+            <a:r>
+              <a:rPr>
+                <a:solidFill>
+                  <a:srgbClr val="AD0000"/>
+                </a:solidFill>
+                <a:latin typeface="Courier"/>
+              </a:rPr>
+              <a:t>0.3</a:t>
+            </a:r>
+            <a:r>
+              <a:rPr>
+                <a:solidFill>
+                  <a:srgbClr val="003B4F"/>
+                </a:solidFill>
+                <a:latin typeface="Courier"/>
+              </a:rPr>
+              <a:t>, </a:t>
+            </a:r>
+            <a:r>
+              <a:rPr>
+                <a:solidFill>
+                  <a:srgbClr val="657422"/>
+                </a:solidFill>
+                <a:latin typeface="Courier"/>
+              </a:rPr>
+              <a:t>outlier.shape =</a:t>
+            </a:r>
+            <a:r>
+              <a:rPr>
+                <a:solidFill>
+                  <a:srgbClr val="003B4F"/>
+                </a:solidFill>
+                <a:latin typeface="Courier"/>
+              </a:rPr>
+              <a:t> </a:t>
+            </a:r>
+            <a:r>
+              <a:rPr>
+                <a:solidFill>
+                  <a:srgbClr val="8F5902"/>
+                </a:solidFill>
+                <a:latin typeface="Courier"/>
+              </a:rPr>
+              <a:t>NA</a:t>
+            </a:r>
+            <a:r>
+              <a:rPr>
+                <a:solidFill>
+                  <a:srgbClr val="003B4F"/>
+                </a:solidFill>
+                <a:latin typeface="Courier"/>
+              </a:rPr>
+              <a:t>) </a:t>
+            </a:r>
+            <a:r>
+              <a:rPr>
+                <a:solidFill>
+                  <a:srgbClr val="5E5E5E"/>
+                </a:solidFill>
+                <a:latin typeface="Courier"/>
+              </a:rPr>
+              <a:t>+</a:t>
+            </a:r>
+            <a:br/>
+            <a:r>
+              <a:rPr>
+                <a:solidFill>
+                  <a:srgbClr val="4758AB"/>
+                </a:solidFill>
+                <a:latin typeface="Courier"/>
+              </a:rPr>
+              <a:t>geom_jitter</a:t>
+            </a:r>
+            <a:r>
+              <a:rPr>
+                <a:solidFill>
+                  <a:srgbClr val="003B4F"/>
+                </a:solidFill>
+                <a:latin typeface="Courier"/>
+              </a:rPr>
+              <a:t>(</a:t>
+            </a:r>
+            <a:r>
+              <a:rPr>
+                <a:solidFill>
+                  <a:srgbClr val="657422"/>
+                </a:solidFill>
+                <a:latin typeface="Courier"/>
+              </a:rPr>
+              <a:t>width =</a:t>
+            </a:r>
+            <a:r>
+              <a:rPr>
+                <a:solidFill>
+                  <a:srgbClr val="003B4F"/>
+                </a:solidFill>
+                <a:latin typeface="Courier"/>
+              </a:rPr>
+              <a:t> </a:t>
+            </a:r>
+            <a:r>
+              <a:rPr>
+                <a:solidFill>
+                  <a:srgbClr val="AD0000"/>
+                </a:solidFill>
+                <a:latin typeface="Courier"/>
+              </a:rPr>
+              <a:t>0.2</a:t>
+            </a:r>
+            <a:r>
+              <a:rPr>
+                <a:solidFill>
+                  <a:srgbClr val="003B4F"/>
+                </a:solidFill>
+                <a:latin typeface="Courier"/>
+              </a:rPr>
+              <a:t>, </a:t>
+            </a:r>
+            <a:r>
+              <a:rPr>
+                <a:solidFill>
+                  <a:srgbClr val="657422"/>
+                </a:solidFill>
+                <a:latin typeface="Courier"/>
+              </a:rPr>
+              <a:t>alpha =</a:t>
+            </a:r>
+            <a:r>
+              <a:rPr>
+                <a:solidFill>
+                  <a:srgbClr val="003B4F"/>
+                </a:solidFill>
+                <a:latin typeface="Courier"/>
+              </a:rPr>
+              <a:t> </a:t>
+            </a:r>
+            <a:r>
+              <a:rPr>
+                <a:solidFill>
+                  <a:srgbClr val="AD0000"/>
+                </a:solidFill>
+                <a:latin typeface="Courier"/>
+              </a:rPr>
+              <a:t>0.7</a:t>
+            </a:r>
+            <a:r>
+              <a:rPr>
+                <a:solidFill>
+                  <a:srgbClr val="003B4F"/>
+                </a:solidFill>
+                <a:latin typeface="Courier"/>
+              </a:rPr>
+              <a:t>, </a:t>
+            </a:r>
+            <a:r>
+              <a:rPr>
+                <a:solidFill>
+                  <a:srgbClr val="657422"/>
+                </a:solidFill>
+                <a:latin typeface="Courier"/>
+              </a:rPr>
+              <a:t>size =</a:t>
+            </a:r>
+            <a:r>
+              <a:rPr>
+                <a:solidFill>
+                  <a:srgbClr val="003B4F"/>
+                </a:solidFill>
+                <a:latin typeface="Courier"/>
+              </a:rPr>
+              <a:t> </a:t>
+            </a:r>
+            <a:r>
+              <a:rPr>
+                <a:solidFill>
+                  <a:srgbClr val="AD0000"/>
+                </a:solidFill>
+                <a:latin typeface="Courier"/>
+              </a:rPr>
+              <a:t>3</a:t>
+            </a:r>
+            <a:r>
+              <a:rPr>
+                <a:solidFill>
+                  <a:srgbClr val="003B4F"/>
+                </a:solidFill>
+                <a:latin typeface="Courier"/>
+              </a:rPr>
+              <a:t>)</a:t>
+            </a:r>
+          </a:p>
+        </p:txBody>
+      </p:sp>
+      <p:pic>
+        <p:nvPicPr>
+          <p:cNvPr descr="11_01_lecture_powerpoint_files/figure-pptx/violated_data_plot-1.png" id="0" name="Picture 1"/>
+          <p:cNvPicPr>
+            <a:picLocks noGrp="1" noChangeAspect="1"/>
+          </p:cNvPicPr>
+          <p:nvPr/>
+        </p:nvPicPr>
+        <p:blipFill>
+          <a:blip r:embed="rId2"/>
+          <a:stretch>
+            <a:fillRect/>
+          </a:stretch>
+        </p:blipFill>
+        <p:spPr bwMode="auto">
+          <a:xfrm>
+            <a:off x="4749800" y="1689100"/>
+            <a:ext cx="4038600" cy="2489200"/>
+          </a:xfrm>
+          <a:prstGeom prst="rect">
+            <a:avLst/>
+          </a:prstGeom>
+          <a:noFill/>
+          <a:ln w="9525">
+            <a:noFill/>
+            <a:headEnd/>
+            <a:tailEnd/>
+          </a:ln>
+        </p:spPr>
+      </p:pic>
+      <p:sp>
+        <p:nvSpPr>
+          <p:cNvPr id="6" name="Content Placeholder 5"/>
+          <p:cNvSpPr>
+            <a:spLocks noGrp="1"/>
+          </p:cNvSpPr>
+          <p:nvPr>
+            <p:ph idx="4" sz="quarter"/>
+          </p:nvPr>
+        </p:nvSpPr>
+        <p:spPr/>
+        <p:txBody>
+          <a:bodyPr/>
+          <a:lstStyle/>
+          <a:p>
+            <a:pPr lvl="0" indent="0">
+              <a:buNone/>
+            </a:pPr>
+            <a:r>
+              <a:rPr>
+                <a:solidFill>
+                  <a:srgbClr val="003B4F"/>
+                </a:solidFill>
+                <a:latin typeface="Courier"/>
+              </a:rPr>
+              <a:t>  </a:t>
+            </a:r>
+            <a:r>
+              <a:rPr>
+                <a:solidFill>
+                  <a:srgbClr val="4758AB"/>
+                </a:solidFill>
+                <a:latin typeface="Courier"/>
+              </a:rPr>
+              <a:t>theme_minimal</a:t>
+            </a:r>
+            <a:r>
+              <a:rPr>
+                <a:solidFill>
+                  <a:srgbClr val="003B4F"/>
+                </a:solidFill>
+                <a:latin typeface="Courier"/>
+              </a:rPr>
+              <a:t>() </a:t>
+            </a:r>
+            <a:r>
+              <a:rPr>
+                <a:solidFill>
+                  <a:srgbClr val="5E5E5E"/>
+                </a:solidFill>
+                <a:latin typeface="Courier"/>
+              </a:rPr>
+              <a:t>+</a:t>
+            </a:r>
+            <a:br/>
+            <a:r>
+              <a:rPr>
+                <a:solidFill>
+                  <a:srgbClr val="003B4F"/>
+                </a:solidFill>
+                <a:latin typeface="Courier"/>
+              </a:rPr>
+              <a:t>  </a:t>
+            </a:r>
+            <a:r>
+              <a:rPr>
+                <a:solidFill>
+                  <a:srgbClr val="4758AB"/>
+                </a:solidFill>
+                <a:latin typeface="Courier"/>
+              </a:rPr>
+              <a:t>labs</a:t>
+            </a:r>
+            <a:r>
+              <a:rPr>
+                <a:solidFill>
+                  <a:srgbClr val="003B4F"/>
+                </a:solidFill>
+                <a:latin typeface="Courier"/>
+              </a:rPr>
+              <a:t>(</a:t>
+            </a:r>
+            <a:r>
+              <a:rPr>
+                <a:solidFill>
+                  <a:srgbClr val="657422"/>
+                </a:solidFill>
+                <a:latin typeface="Courier"/>
+              </a:rPr>
+              <a:t>title =</a:t>
+            </a:r>
+            <a:r>
+              <a:rPr>
+                <a:solidFill>
+                  <a:srgbClr val="003B4F"/>
+                </a:solidFill>
+                <a:latin typeface="Courier"/>
+              </a:rPr>
+              <a:t> </a:t>
+            </a:r>
+            <a:r>
+              <a:rPr>
+                <a:solidFill>
+                  <a:srgbClr val="20794D"/>
+                </a:solidFill>
+                <a:latin typeface="Courier"/>
+              </a:rPr>
+              <a:t>"Modified Data with Violations"</a:t>
+            </a:r>
+            <a:r>
+              <a:rPr>
+                <a:solidFill>
+                  <a:srgbClr val="003B4F"/>
+                </a:solidFill>
+                <a:latin typeface="Courier"/>
+              </a:rPr>
+              <a:t>,</a:t>
+            </a:r>
+            <a:br/>
+            <a:r>
+              <a:rPr>
+                <a:solidFill>
+                  <a:srgbClr val="003B4F"/>
+                </a:solidFill>
+                <a:latin typeface="Courier"/>
+              </a:rPr>
+              <a:t>       </a:t>
+            </a:r>
+            <a:r>
+              <a:rPr>
+                <a:solidFill>
+                  <a:srgbClr val="657422"/>
+                </a:solidFill>
+                <a:latin typeface="Courier"/>
+              </a:rPr>
+              <a:t>subtitle =</a:t>
+            </a:r>
+            <a:r>
+              <a:rPr>
+                <a:solidFill>
+                  <a:srgbClr val="003B4F"/>
+                </a:solidFill>
+                <a:latin typeface="Courier"/>
+              </a:rPr>
+              <a:t> </a:t>
+            </a:r>
+            <a:r>
+              <a:rPr>
+                <a:solidFill>
+                  <a:srgbClr val="20794D"/>
+                </a:solidFill>
+                <a:latin typeface="Courier"/>
+              </a:rPr>
+              <a:t>"Median with IQR"</a:t>
+            </a:r>
+            <a:r>
+              <a:rPr>
+                <a:solidFill>
+                  <a:srgbClr val="003B4F"/>
+                </a:solidFill>
+                <a:latin typeface="Courier"/>
+              </a:rPr>
+              <a:t>,</a:t>
+            </a:r>
+            <a:br/>
+            <a:r>
+              <a:rPr>
+                <a:solidFill>
+                  <a:srgbClr val="003B4F"/>
+                </a:solidFill>
+                <a:latin typeface="Courier"/>
+              </a:rPr>
+              <a:t>       </a:t>
+            </a:r>
+            <a:r>
+              <a:rPr>
+                <a:solidFill>
+                  <a:srgbClr val="657422"/>
+                </a:solidFill>
+                <a:latin typeface="Courier"/>
+              </a:rPr>
+              <a:t>x =</a:t>
+            </a:r>
+            <a:r>
+              <a:rPr>
+                <a:solidFill>
+                  <a:srgbClr val="003B4F"/>
+                </a:solidFill>
+                <a:latin typeface="Courier"/>
+              </a:rPr>
+              <a:t> </a:t>
+            </a:r>
+            <a:r>
+              <a:rPr>
+                <a:solidFill>
+                  <a:srgbClr val="20794D"/>
+                </a:solidFill>
+                <a:latin typeface="Courier"/>
+              </a:rPr>
+              <a:t>"Light Treatment"</a:t>
+            </a:r>
+            <a:r>
+              <a:rPr>
+                <a:solidFill>
+                  <a:srgbClr val="003B4F"/>
+                </a:solidFill>
+                <a:latin typeface="Courier"/>
+              </a:rPr>
+              <a:t>,</a:t>
+            </a:r>
+            <a:br/>
+            <a:r>
+              <a:rPr>
+                <a:solidFill>
+                  <a:srgbClr val="003B4F"/>
+                </a:solidFill>
+                <a:latin typeface="Courier"/>
+              </a:rPr>
+              <a:t>       </a:t>
+            </a:r>
+            <a:r>
+              <a:rPr>
+                <a:solidFill>
+                  <a:srgbClr val="657422"/>
+                </a:solidFill>
+                <a:latin typeface="Courier"/>
+              </a:rPr>
+              <a:t>y =</a:t>
+            </a:r>
+            <a:r>
+              <a:rPr>
+                <a:solidFill>
+                  <a:srgbClr val="003B4F"/>
+                </a:solidFill>
+                <a:latin typeface="Courier"/>
+              </a:rPr>
+              <a:t> </a:t>
+            </a:r>
+            <a:r>
+              <a:rPr>
+                <a:solidFill>
+                  <a:srgbClr val="20794D"/>
+                </a:solidFill>
+                <a:latin typeface="Courier"/>
+              </a:rPr>
+              <a:t>"Phase Shift (hours)"</a:t>
+            </a:r>
+            <a:r>
+              <a:rPr>
+                <a:solidFill>
+                  <a:srgbClr val="003B4F"/>
+                </a:solidFill>
+                <a:latin typeface="Courier"/>
+              </a:rPr>
+              <a:t>) </a:t>
+            </a:r>
+          </a:p>
+          <a:p>
+            <a:pPr lvl="0" indent="0">
+              <a:buNone/>
+            </a:pPr>
+            <a:r>
+              <a:rPr>
+                <a:latin typeface="Courier"/>
+              </a:rPr>
+              <a:t>&lt;theme&gt; List of 147
+ $ line                            : &lt;ggplot2::element_line&gt;
+  ..@ colour       : chr "black"
+  ..@ linewidth    : num 0.5
+  ..@ linetype     : num 1
+  ..@ lineend      : chr "butt"
+  ..@ linejoin     : chr "round"
+  ..@ arrow        : logi FALSE
+  ..@ arrow.fill   : chr "black"
+  ..@ inherit.blank: logi TRUE
+ $ rect                            : &lt;ggplot2::element_rect&gt;
+  ..@ fill         : chr "white"
+  ..@ colour       : chr "black"
+  ..@ linewidth    : num 0.5
+  ..@ linetype     : num 1
+  ..@ linejoin     : chr "round"
+  ..@ inherit.blank: logi TRUE
+ $ text                            : &lt;ggplot2::element_text&gt;
+  ..@ family       : chr ""
+  ..@ face         : chr "plain"
+  ..@ italic       : chr NA
+  ..@ fontweight   : num NA
+  ..@ fontwidth    : num NA
+  ..@ colour       : chr "black"
+  ..@ size         : num 11
+  ..@ hjust        : num 0.5
+  ..@ vjust        : num 0.5
+  ..@ angle        : num 0
+  ..@ lineheight   : num 0.9
+  ..@ margin       : &lt;ggplot2::margin&gt; num [1:4] 0 0 0 0
+  ..@ debug        : logi FALSE
+  ..@ inherit.blank: logi TRUE
+ $ title                           : chr "Modified Data with Violations"
+ $ point                           : &lt;ggplot2::element_point&gt;
+  ..@ colour       : chr "black"
+  ..@ shape        : num 19
+  ..@ size         : num 1.5
+  ..@ fill         : chr "white"
+  ..@ stroke       : num 0.5
+  ..@ inherit.blank: logi TRUE
+ $ polygon                         : &lt;ggplot2::element_polygon&gt;
+  ..@ fill         : chr "white"
+  ..@ colour       : chr "black"
+  ..@ linewidth    : num 0.5
+  ..@ linetype     : num 1
+  ..@ linejoin     : chr "round"
+  ..@ inherit.blank: logi TRUE
+ $ geom                            : &lt;ggplot2::element_geom&gt;
+  ..@ ink        : chr "black"
+  ..@ paper      : chr "white"
+  ..@ accent     : chr "#3366FF"
+  ..@ linewidth  : num 0.5
+  ..@ borderwidth: num 0.5
+  ..@ linetype   : int 1
+  ..@ bordertype : int 1
+  ..@ family     : chr ""
+  ..@ fontsize   : num 3.87
+  ..@ pointsize  : num 1.5
+  ..@ pointshape : num 19
+  ..@ colour     : NULL
+  ..@ fill       : NULL
+ $ spacing                         : 'simpleUnit' num 5.5points
+  ..- attr(*, "unit")= int 8
+ $ margins                         : &lt;ggplot2::margin&gt; num [1:4] 5.5 5.5 5.5 5.5
+ $ aspect.ratio                    : NULL
+ $ axis.title                      : NULL
+ $ axis.title.x                    : &lt;ggplot2::element_text&gt;
+  ..@ family       : NULL
+  ..@ face         : NULL
+  ..@ italic       : chr NA
+  ..@ fontweight   : num NA
+  ..@ fontwidth    : num NA
+  ..@ colour       : NULL
+  ..@ size         : NULL
+  ..@ hjust        : NULL
+  ..@ vjust        : num 1
+  ..@ angle        : NULL
+  ..@ lineheight   : NULL
+  ..@ margin       : &lt;ggplot2::margin&gt; num [1:4] 2.75 0 0 0
+  ..@ debug        : NULL
+  ..@ inherit.blank: logi TRUE
+ $ axis.title.x.top                : &lt;ggplot2::element_text&gt;
+  ..@ family       : NULL
+  ..@ face         : NULL
+  ..@ italic       : chr NA
+  ..@ fontweight   : num NA
+  ..@ fontwidth    : num NA
+  ..@ colour       : NULL
+  ..@ size         : NULL
+  ..@ hjust        : NULL
+  ..@ vjust        : num 0
+  ..@ angle        : NULL
+  ..@ lineheight   : NULL
+  ..@ margin       : &lt;ggplot2::margin&gt; num [1:4] 0 0 2.75 0
+  ..@ debug        : NULL
+  ..@ inherit.blank: logi TRUE
+ $ axis.title.x.bottom             : NULL
+ $ axis.title.y                    : &lt;ggplot2::element_text&gt;
+  ..@ family       : NULL
+  ..@ face         : NULL
+  ..@ italic       : chr NA
+  ..@ fontweight   : num NA
+  ..@ fontwidth    : num NA
+  ..@ colour       : NULL
+  ..@ size         : NULL
+  ..@ hjust        : NULL
+  ..@ vjust        : num 1
+  ..@ angle        : num 90
+  ..@ lineheight   : NULL
+  ..@ margin       : &lt;ggplot2::margin&gt; num [1:4] 0 2.75 0 0
+  ..@ debug        : NULL
+  ..@ inherit.blank: logi TRUE
+ $ axis.title.y.left               : NULL
+ $ axis.title.y.right              : &lt;ggplot2::element_text&gt;
+  ..@ family       : NULL
+  ..@ face         : NULL
+  ..@ italic       : chr NA
+  ..@ fontweight   : num NA
+  ..@ fontwidth    : num NA
+  ..@ colour       : NULL
+  ..@ size         : NULL
+  ..@ hjust        : NULL
+  ..@ vjust        : num 1
+  ..@ angle        : num -90
+  ..@ lineheight   : NULL
+  ..@ margin       : &lt;ggplot2::margin&gt; num [1:4] 0 0 0 2.75
+  ..@ debug        : NULL
+  ..@ inherit.blank: logi TRUE
+ $ axis.text                       : &lt;ggplot2::element_text&gt;
+  ..@ family       : NULL
+  ..@ face         : NULL
+  ..@ italic       : chr NA
+  ..@ fontweight   : num NA
+  ..@ fontwidth    : num NA
+  ..@ colour       : chr "#4D4D4DFF"
+  ..@ size         : 'rel' num 0.8
+  ..@ hjust        : NULL
+  ..@ vjust        : NULL
+  ..@ angle        : NULL
+  ..@ lineheight   : NULL
+  ..@ margin       : NULL
+  ..@ debug        : NULL
+  ..@ inherit.blank: logi TRUE
+ $ axis.text.x                     : &lt;ggplot2::element_text&gt;
+  ..@ family       : NULL
+  ..@ face         : NULL
+  ..@ italic       : chr NA
+  ..@ fontweight   : num NA
+  ..@ fontwidth    : num NA
+  ..@ colour       : NULL
+  ..@ size         : NULL
+  ..@ hjust        : NULL
+  ..@ vjust        : num 1
+  ..@ angle        : NULL
+  ..@ lineheight   : NULL
+  ..@ margin       : &lt;ggplot2::margin&gt; num [1:4] 2.2 0 0 0
+  ..@ debug        : NULL
+  ..@ inherit.blank: logi TRUE
+ $ axis.text.x.top                 : &lt;ggplot2::element_text&gt;
+  ..@ family       : NULL
+  ..@ face         : NULL
+  ..@ italic       : chr NA
+  ..@ fontweight   : num NA
+  ..@ fontwidth    : num NA
+  ..@ colour       : NULL
+  ..@ size         : NULL
+  ..@ hjust        : NULL
+  ..@ vjust        : NULL
+  ..@ angle        : NULL
+  ..@ lineheight   : NULL
+  ..@ margin       : &lt;ggplot2::margin&gt; num [1:4] 0 0 4.95 0
+  ..@ debug        : NULL
+  ..@ inherit.blank: logi TRUE
+ $ axis.text.x.bottom              : &lt;ggplot2::element_text&gt;
+  ..@ family       : NULL
+  ..@ face         : NULL
+  ..@ italic       : chr NA
+  ..@ fontweight   : num NA
+  ..@ fontwidth    : num NA
+  ..@ colour       : NULL
+  ..@ size         : NULL
+  ..@ hjust        : NULL
+  ..@ vjust        : NULL
+  ..@ angle        : NULL
+  ..@ lineheight   : NULL
+  ..@ margin       : &lt;ggplot2::margin&gt; num [1:4] 4.95 0 0 0
+  ..@ debug        : NULL
+  ..@ inherit.blank: logi TRUE
+ $ axis.text.y                     : &lt;ggplot2::element_text&gt;
+  ..@ family       : NULL
+  ..@ face         : NULL
+  ..@ italic       : chr NA
+  ..@ fontweight   : num NA
+  ..@ fontwidth    : num NA
+  ..@ colour       : NULL
+  ..@ size         : NULL
+  ..@ hjust        : num 1
+  ..@ vjust        : NULL
+  ..@ angle        : NULL
+  ..@ lineheight   : NULL
+  ..@ margin       : &lt;ggplot2::margin&gt; num [1:4] 0 2.2 0 0
+  ..@ debug        : NULL
+  ..@ inherit.blank: logi TRUE
+ $ axis.text.y.left                : &lt;ggplot2::element_text&gt;
+  ..@ family       : NULL
+  ..@ face         : NULL
+  ..@ italic       : chr NA
+  ..@ fontweight   : num NA
+  ..@ fontwidth    : num NA
+  ..@ colour       : NULL
+  ..@ size         : NULL
+  ..@ hjust        : NULL
+  ..@ vjust        : NULL
+  ..@ angle        : NULL
+  ..@ lineheight   : NULL
+  ..@ margin       : &lt;ggplot2::margin&gt; num [1:4] 0 4.95 0 0
+  ..@ debug        : NULL
+  ..@ inherit.blank: logi TRUE
+ $ axis.text.y.right               : &lt;ggplot2::element_text&gt;
+  ..@ family       : NULL
+  ..@ face         : NULL
+  ..@ italic       : chr NA
+  ..@ fontweight   : num NA
+  ..@ fontwidth    : num NA
+  ..@ colour       : NULL
+  ..@ size         : NULL
+  ..@ hjust        : NULL
+  ..@ vjust        : NULL
+  ..@ angle        : NULL
+  ..@ lineheight   : NULL
+  ..@ margin       : &lt;ggplot2::margin&gt; num [1:4] 0 0 0 4.95
+  ..@ debug        : NULL
+  ..@ inherit.blank: logi TRUE
+ $ axis.text.theta                 : NULL
+ $ axis.text.r                     : &lt;ggplot2::element_text&gt;
+  ..@ family       : NULL
+  ..@ face         : NULL
+  ..@ italic       : chr NA
+  ..@ fontweight   : num NA
+  ..@ fontwidth    : num NA
+  ..@ colour       : NULL
+  ..@ size         : NULL
+  ..@ hjust        : num 0.5
+  ..@ vjust        : NULL
+  ..@ angle        : NULL
+  ..@ lineheight   : NULL
+  ..@ margin       : &lt;ggplot2::margin&gt; num [1:4] 0 2.2 0 2.2
+  ..@ debug        : NULL
+  ..@ inherit.blank: logi TRUE
+ $ axis.ticks                      : &lt;ggplot2::element_blank&gt;
+ $ axis.ticks.x                    : NULL
+ $ axis.ticks.x.top                : NULL
+ $ axis.ticks.x.bottom             : NULL
+ $ axis.ticks.y                    : NULL
+ $ axis.ticks.y.left               : NULL
+ $ axis.ticks.y.right              : NULL
+ $ axis.ticks.theta                : NULL
+ $ axis.ticks.r                    : NULL
+ $ axis.minor.ticks.x.top          : NULL
+ $ axis.minor.ticks.x.bottom       : NULL
+ $ axis.minor.ticks.y.left         : NULL
+ $ axis.minor.ticks.y.right        : NULL
+ $ axis.minor.ticks.theta          : NULL
+ $ axis.minor.ticks.r              : NULL
+ $ axis.ticks.length               : 'rel' num 0.5
+ $ axis.ticks.length.x             : NULL
+ $ axis.ticks.length.x.top         : NULL
+ $ axis.ticks.length.x.bottom      : NULL
+ $ axis.ticks.length.y             : NULL
+ $ axis.ticks.length.y.left        : NULL
+ $ axis.ticks.length.y.right       : NULL
+ $ axis.ticks.length.theta         : NULL
+ $ axis.ticks.length.r             : NULL
+ $ axis.minor.ticks.length         : 'rel' num 0.75
+ $ axis.minor.ticks.length.x       : NULL
+ $ axis.minor.ticks.length.x.top   : NULL
+ $ axis.minor.ticks.length.x.bottom: NULL
+ $ axis.minor.ticks.length.y       : NULL
+ $ axis.minor.ticks.length.y.left  : NULL
+ $ axis.minor.ticks.length.y.right : NULL
+ $ axis.minor.ticks.length.theta   : NULL
+ $ axis.minor.ticks.length.r       : NULL
+ $ axis.line                       : &lt;ggplot2::element_blank&gt;
+ $ axis.line.x                     : NULL
+ $ axis.line.x.top                 : NULL
+ $ axis.line.x.bottom              : NULL
+ $ axis.line.y                     : NULL
+ $ axis.line.y.left                : NULL
+ $ axis.line.y.right               : NULL
+ $ axis.line.theta                 : NULL
+ $ axis.line.r                     : NULL
+ $ legend.background               : &lt;ggplot2::element_blank&gt;
+ $ legend.margin                   : NULL
+ $ legend.spacing                  : 'rel' num 2
+ $ legend.spacing.x                : NULL
+ $ legend.spacing.y                : NULL
+ $ legend.key                      : &lt;ggplot2::element_blank&gt;
+ $ legend.key.size                 : 'simpleUnit' num 1.2lines
+  ..- attr(*, "unit")= int 3
+ $ legend.key.height               : NULL
+ $ legend.key.width                : NULL
+ $ legend.key.spacing              : NULL
+ $ legend.key.spacing.x            : NULL
+ $ legend.key.spacing.y            : NULL
+ $ legend.key.justification        : NULL
+ $ legend.frame                    : NULL
+ $ legend.ticks                    : NULL
+ $ legend.ticks.length             : 'rel' num 0.2
+ $ legend.axis.line                : NULL
+ $ legend.text                     : &lt;ggplot2::element_text&gt;
+  ..@ family       : NULL
+  ..@ face         : NULL
+  ..@ italic       : chr NA
+  ..@ fontweight   : num NA
+  ..@ fontwidth    : num NA
+  ..@ colour       : NULL
+  ..@ size         : 'rel' num 0.8
+  ..@ hjust        : NULL
+  ..@ vjust        : NULL
+  ..@ angle        : NULL
+  ..@ lineheight   : NULL
+  ..@ margin       : NULL
+  ..@ debug        : NULL
+  ..@ inherit.blank: logi TRUE
+ $ legend.text.position            : NULL
+ $ legend.title                    : &lt;ggplot2::element_text&gt;
+  ..@ family       : NULL
+  ..@ face         : NULL
+  ..@ italic       : chr NA
+  ..@ fontweight   : num NA
+  ..@ fontwidth    : num NA
+  ..@ colour       : NULL
+  ..@ size         : NULL
+  ..@ hjust        : num 0
+  ..@ vjust        : NULL
+  ..@ angle        : NULL
+  ..@ lineheight   : NULL
+  ..@ margin       : NULL
+  ..@ debug        : NULL
+  ..@ inherit.blank: logi TRUE
+ $ legend.title.position           : NULL
+ $ legend.position                 : chr "right"
+ $ legend.position.inside          : NULL
+ $ legend.direction                : NULL
+ $ legend.byrow                    : NULL
+ $ legend.justification            : chr "center"
+ $ legend.justification.top        : NULL
+ $ legend.justification.bottom     : NULL
+ $ legend.justification.left       : NULL
+ $ legend.justification.right      : NULL
+ $ legend.justification.inside     : NULL
+  [list output truncated]
+ @ complete: logi TRUE
+ @ validate: logi TRUE</a:t>
+            </a:r>
+          </a:p>
+        </p:txBody>
+      </p:sp>
+    </p:spTree>
+  </p:cSld>
+</p:sld>
+</file>
+
+<file path=ppt/slides/slide36.xml><?xml version="1.0" encoding="utf-8"?>
+<p:sld xmlns:a="http://schemas.openxmlformats.org/drawingml/2006/main" xmlns:r="http://schemas.openxmlformats.org/officeDocument/2006/relationships" xmlns:p="http://schemas.openxmlformats.org/presentationml/2006/main">
+  <p:cSld>
+    <p:spTree>
+      <p:nvGrpSpPr>
+        <p:cNvPr id="1" name=""/>
+        <p:cNvGrpSpPr/>
+        <p:nvPr/>
+      </p:nvGrpSpPr>
+      <p:grpSpPr>
+        <a:xfrm>
+          <a:off x="0" y="0"/>
+          <a:ext cx="0" cy="0"/>
+          <a:chOff x="0" y="0"/>
+          <a:chExt cx="0" cy="0"/>
+        </a:xfrm>
+      </p:grpSpPr>
+      <p:sp>
+        <p:nvSpPr>
+          <p:cNvPr id="2" name="Title 1"/>
+          <p:cNvSpPr>
+            <a:spLocks noGrp="1"/>
+          </p:cNvSpPr>
+          <p:nvPr>
+            <p:ph type="title"/>
+          </p:nvPr>
+        </p:nvSpPr>
+        <p:spPr>
+          <a:xfrm>
+            <a:off x="139485" y="78119"/>
+            <a:ext cx="8229600" cy="607682"/>
+          </a:xfrm>
+        </p:spPr>
+        <p:txBody>
+          <a:bodyPr/>
+          <a:lstStyle/>
+          <a:p>
+            <a:pPr lvl="0" indent="0" marL="0">
+              <a:buNone/>
+            </a:pPr>
+            <a:r>
+              <a:rPr/>
+              <a:t>Checking Violated Data Assumptions</a:t>
+            </a:r>
+          </a:p>
+        </p:txBody>
+      </p:sp>
+      <p:sp>
+        <p:nvSpPr>
+          <p:cNvPr id="3" name="Text Placeholder 2"/>
+          <p:cNvSpPr>
+            <a:spLocks noGrp="1"/>
+          </p:cNvSpPr>
+          <p:nvPr>
+            <p:ph idx="1" type="body"/>
+          </p:nvPr>
+        </p:nvSpPr>
+        <p:spPr/>
+        <p:txBody>
+          <a:bodyPr/>
+          <a:lstStyle/>
+          <a:p>
+            <a:pPr lvl="0" indent="0" marL="0">
+              <a:spcBef>
+                <a:spcPts val="3000"/>
+              </a:spcBef>
+              <a:buNone/>
+            </a:pPr>
+            <a:r>
+              <a:rPr b="1"/>
+              <a:t>Normality Test on Violated Data</a:t>
+            </a:r>
+          </a:p>
+          <a:p>
+            <a:pPr lvl="0" indent="0" marL="0">
+              <a:buNone/>
+            </a:pPr>
+            <a:r>
+              <a:rPr b="1"/>
+              <a:t>Clear violation:</a:t>
+            </a:r>
+            <a:r>
+              <a:rPr/>
+              <a:t> p &lt; 0.05, points deviate from line</a:t>
+            </a:r>
+          </a:p>
+          <a:p>
+            <a:pPr lvl="0" indent="0">
+              <a:buNone/>
+            </a:pPr>
+            <a:r>
+              <a:rPr>
+                <a:solidFill>
+                  <a:srgbClr val="5E5E5E"/>
+                </a:solidFill>
+                <a:latin typeface="Courier"/>
+              </a:rPr>
+              <a:t># Shapiro-Wilk test on residuals</a:t>
+            </a:r>
+            <a:br/>
+            <a:r>
+              <a:rPr>
+                <a:solidFill>
+                  <a:srgbClr val="4758AB"/>
+                </a:solidFill>
+                <a:latin typeface="Courier"/>
+              </a:rPr>
+              <a:t>shapiro.test</a:t>
+            </a:r>
+            <a:r>
+              <a:rPr>
+                <a:solidFill>
+                  <a:srgbClr val="003B4F"/>
+                </a:solidFill>
+                <a:latin typeface="Courier"/>
+              </a:rPr>
+              <a:t>(</a:t>
+            </a:r>
+            <a:r>
+              <a:rPr>
+                <a:solidFill>
+                  <a:srgbClr val="4758AB"/>
+                </a:solidFill>
+                <a:latin typeface="Courier"/>
+              </a:rPr>
+              <a:t>resid</a:t>
+            </a:r>
+            <a:r>
+              <a:rPr>
+                <a:solidFill>
+                  <a:srgbClr val="003B4F"/>
+                </a:solidFill>
+                <a:latin typeface="Courier"/>
+              </a:rPr>
+              <a:t>(violated_model))</a:t>
+            </a:r>
+          </a:p>
+          <a:p>
+            <a:pPr lvl="0" indent="0">
+              <a:buNone/>
+            </a:pPr>
+            <a:r>
+              <a:rPr>
+                <a:latin typeface="Courier"/>
+              </a:rPr>
+              <a:t>
+    Shapiro-Wilk normality test
+data:  resid(violated_model)
+W = 0.89473, p-value = 0.02335</a:t>
+            </a:r>
+          </a:p>
+        </p:txBody>
+      </p:sp>
+      <p:pic>
+        <p:nvPicPr>
+          <p:cNvPr descr="11_01_lecture_powerpoint_files/figure-pptx/violated_normality_plot-1.png" id="0" name="Picture 1"/>
+          <p:cNvPicPr>
+            <a:picLocks noGrp="1" noChangeAspect="1"/>
+          </p:cNvPicPr>
+          <p:nvPr/>
+        </p:nvPicPr>
+        <p:blipFill>
+          <a:blip r:embed="rId2"/>
+          <a:stretch>
+            <a:fillRect/>
+          </a:stretch>
+        </p:blipFill>
+        <p:spPr bwMode="auto">
+          <a:xfrm>
+            <a:off x="127000" y="1562100"/>
+            <a:ext cx="4432300" cy="2730500"/>
+          </a:xfrm>
+          <a:prstGeom prst="rect">
+            <a:avLst/>
+          </a:prstGeom>
+          <a:noFill/>
+          <a:ln w="9525">
+            <a:noFill/>
+            <a:headEnd/>
+            <a:tailEnd/>
+          </a:ln>
+        </p:spPr>
+      </p:pic>
+      <p:sp>
+        <p:nvSpPr>
+          <p:cNvPr id="5" name="Text Placeholder 4"/>
+          <p:cNvSpPr>
+            <a:spLocks noGrp="1"/>
+          </p:cNvSpPr>
+          <p:nvPr>
+            <p:ph idx="3" sz="quarter" type="body"/>
+          </p:nvPr>
+        </p:nvSpPr>
+        <p:spPr/>
+        <p:txBody>
+          <a:bodyPr/>
+          <a:lstStyle/>
+          <a:p>
+            <a:pPr lvl="0" indent="0" marL="0">
+              <a:spcBef>
+                <a:spcPts val="3000"/>
+              </a:spcBef>
+              <a:buNone/>
+            </a:pPr>
+            <a:r>
+              <a:rPr b="1"/>
+              <a:t>Variance Test on Violated Data</a:t>
+            </a:r>
+          </a:p>
+          <a:p>
+            <a:pPr lvl="0"/>
+            <a:r>
+              <a:rPr/>
+              <a:t>ok having issues making it not homogeoeous</a:t>
+            </a:r>
+          </a:p>
+          <a:p>
+            <a:pPr lvl="0" indent="0" marL="0">
+              <a:buNone/>
+            </a:pPr>
+            <a:r>
+              <a:rPr b="1"/>
+              <a:t>Clear violation:</a:t>
+            </a:r>
+            <a:r>
+              <a:rPr/>
+              <a:t> p &lt; 0.05, unequal variances evident</a:t>
+            </a:r>
+          </a:p>
+          <a:p>
+            <a:pPr lvl="0" indent="0">
+              <a:buNone/>
+            </a:pPr>
+            <a:r>
+              <a:rPr>
+                <a:solidFill>
+                  <a:srgbClr val="5E5E5E"/>
+                </a:solidFill>
+                <a:latin typeface="Courier"/>
+              </a:rPr>
+              <a:t># Levene's test</a:t>
+            </a:r>
+            <a:br/>
+            <a:r>
+              <a:rPr>
+                <a:solidFill>
+                  <a:srgbClr val="4758AB"/>
+                </a:solidFill>
+                <a:latin typeface="Courier"/>
+              </a:rPr>
+              <a:t>leveneTest</a:t>
+            </a:r>
+            <a:r>
+              <a:rPr>
+                <a:solidFill>
+                  <a:srgbClr val="003B4F"/>
+                </a:solidFill>
+                <a:latin typeface="Courier"/>
+              </a:rPr>
+              <a:t>(phase_shift_violated </a:t>
+            </a:r>
+            <a:r>
+              <a:rPr>
+                <a:solidFill>
+                  <a:srgbClr val="5E5E5E"/>
+                </a:solidFill>
+                <a:latin typeface="Courier"/>
+              </a:rPr>
+              <a:t>~</a:t>
+            </a:r>
+            <a:r>
+              <a:rPr>
+                <a:solidFill>
+                  <a:srgbClr val="003B4F"/>
+                </a:solidFill>
+                <a:latin typeface="Courier"/>
+              </a:rPr>
+              <a:t> treatment, </a:t>
+            </a:r>
+            <a:br/>
+            <a:r>
+              <a:rPr>
+                <a:solidFill>
+                  <a:srgbClr val="003B4F"/>
+                </a:solidFill>
+                <a:latin typeface="Courier"/>
+              </a:rPr>
+              <a:t>           </a:t>
+            </a:r>
+            <a:r>
+              <a:rPr>
+                <a:solidFill>
+                  <a:srgbClr val="657422"/>
+                </a:solidFill>
+                <a:latin typeface="Courier"/>
+              </a:rPr>
+              <a:t>data =</a:t>
+            </a:r>
+            <a:r>
+              <a:rPr>
+                <a:solidFill>
+                  <a:srgbClr val="003B4F"/>
+                </a:solidFill>
+                <a:latin typeface="Courier"/>
+              </a:rPr>
+              <a:t> violated_circ_df)</a:t>
+            </a:r>
+          </a:p>
+          <a:p>
+            <a:pPr lvl="0" indent="0">
+              <a:buNone/>
+            </a:pPr>
+            <a:r>
+              <a:rPr>
+                <a:latin typeface="Courier"/>
+              </a:rPr>
+              <a:t>Levene's Test for Homogeneity of Variance (center = median)
+      Df F value Pr(&gt;F)
+group  2  1.5618 0.2355
+      19               </a:t>
+            </a:r>
+          </a:p>
+        </p:txBody>
+      </p:sp>
+      <p:pic>
+        <p:nvPicPr>
+          <p:cNvPr descr="11_01_lecture_powerpoint_files/figure-pptx/violated_variance_plot-1.png" id="0" name="Picture 1"/>
+          <p:cNvPicPr>
+            <a:picLocks noGrp="1" noChangeAspect="1"/>
+          </p:cNvPicPr>
+          <p:nvPr/>
+        </p:nvPicPr>
+        <p:blipFill>
+          <a:blip r:embed="rId3"/>
+          <a:stretch>
+            <a:fillRect/>
+          </a:stretch>
+        </p:blipFill>
+        <p:spPr bwMode="auto">
+          <a:xfrm>
+            <a:off x="4749800" y="1689100"/>
+            <a:ext cx="4038600" cy="2489200"/>
+          </a:xfrm>
+          <a:prstGeom prst="rect">
+            <a:avLst/>
+          </a:prstGeom>
+          <a:noFill/>
+          <a:ln w="9525">
+            <a:noFill/>
+            <a:headEnd/>
+            <a:tailEnd/>
+          </a:ln>
+        </p:spPr>
+      </p:pic>
+    </p:spTree>
+  </p:cSld>
+</p:sld>
+</file>
+
+<file path=ppt/slides/slide37.xml><?xml version="1.0" encoding="utf-8"?>
+<p:sld xmlns:a="http://schemas.openxmlformats.org/drawingml/2006/main" xmlns:r="http://schemas.openxmlformats.org/officeDocument/2006/relationships" xmlns:p="http://schemas.openxmlformats.org/presentationml/2006/main">
+  <p:cSld>
+    <p:spTree>
+      <p:nvGrpSpPr>
+        <p:cNvPr id="1" name=""/>
+        <p:cNvGrpSpPr/>
+        <p:nvPr/>
+      </p:nvGrpSpPr>
+      <p:grpSpPr>
+        <a:xfrm>
+          <a:off x="0" y="0"/>
+          <a:ext cx="0" cy="0"/>
+          <a:chOff x="0" y="0"/>
+          <a:chExt cx="0" cy="0"/>
+        </a:xfrm>
+      </p:grpSpPr>
+      <p:sp>
+        <p:nvSpPr>
+          <p:cNvPr id="2" name="Title 1"/>
+          <p:cNvSpPr>
+            <a:spLocks noGrp="1"/>
+          </p:cNvSpPr>
+          <p:nvPr>
+            <p:ph type="title"/>
+          </p:nvPr>
+        </p:nvSpPr>
+        <p:spPr>
+          <a:xfrm>
+            <a:off x="139485" y="78119"/>
+            <a:ext cx="8229600" cy="607682"/>
+          </a:xfrm>
+        </p:spPr>
+        <p:txBody>
+          <a:bodyPr/>
+          <a:lstStyle/>
+          <a:p>
+            <a:pPr lvl="0" indent="0" marL="0">
+              <a:buNone/>
+            </a:pPr>
+            <a:r>
+              <a:rPr/>
+              <a:t>Performing the Kruskal-Wallis Test</a:t>
+            </a:r>
+          </a:p>
+        </p:txBody>
+      </p:sp>
+      <p:sp>
+        <p:nvSpPr>
+          <p:cNvPr id="3" name="Text Placeholder 2"/>
+          <p:cNvSpPr>
+            <a:spLocks noGrp="1"/>
+          </p:cNvSpPr>
+          <p:nvPr>
+            <p:ph idx="1" type="body"/>
+          </p:nvPr>
+        </p:nvSpPr>
+        <p:spPr/>
+        <p:txBody>
+          <a:bodyPr/>
+          <a:lstStyle/>
+          <a:p>
+            <a:pPr lvl="0" indent="0" marL="0">
+              <a:spcBef>
+                <a:spcPts val="3000"/>
+              </a:spcBef>
+              <a:buNone/>
+            </a:pPr>
+            <a:r>
+              <a:rPr b="1"/>
+              <a:t>Running Kruskal-Wallis on Original Data</a:t>
+            </a:r>
+          </a:p>
+          <a:p>
+            <a:pPr lvl="0" indent="0" marL="0">
+              <a:buNone/>
+            </a:pPr>
+            <a:r>
+              <a:rPr b="1"/>
+              <a:t>Even though assumptions are met, let’s compare results:</a:t>
+            </a:r>
+          </a:p>
+          <a:p>
+            <a:pPr lvl="0" indent="0">
+              <a:buNone/>
+            </a:pPr>
+            <a:r>
+              <a:rPr>
+                <a:solidFill>
+                  <a:srgbClr val="5E5E5E"/>
+                </a:solidFill>
+                <a:latin typeface="Courier"/>
+              </a:rPr>
+              <a:t># Kruskal-Wallis test on original data</a:t>
+            </a:r>
+            <a:br/>
+            <a:r>
+              <a:rPr>
+                <a:solidFill>
+                  <a:srgbClr val="003B4F"/>
+                </a:solidFill>
+                <a:latin typeface="Courier"/>
+              </a:rPr>
+              <a:t>kruskal_original_result &lt;- </a:t>
+            </a:r>
+            <a:r>
+              <a:rPr>
+                <a:solidFill>
+                  <a:srgbClr val="4758AB"/>
+                </a:solidFill>
+                <a:latin typeface="Courier"/>
+              </a:rPr>
+              <a:t>kruskal.test</a:t>
+            </a:r>
+            <a:r>
+              <a:rPr>
+                <a:solidFill>
+                  <a:srgbClr val="003B4F"/>
+                </a:solidFill>
+                <a:latin typeface="Courier"/>
+              </a:rPr>
+              <a:t>(</a:t>
+            </a:r>
+            <a:br/>
+            <a:r>
+              <a:rPr>
+                <a:solidFill>
+                  <a:srgbClr val="003B4F"/>
+                </a:solidFill>
+                <a:latin typeface="Courier"/>
+              </a:rPr>
+              <a:t>  phase_shift </a:t>
+            </a:r>
+            <a:r>
+              <a:rPr>
+                <a:solidFill>
+                  <a:srgbClr val="5E5E5E"/>
+                </a:solidFill>
+                <a:latin typeface="Courier"/>
+              </a:rPr>
+              <a:t>~</a:t>
+            </a:r>
+            <a:r>
+              <a:rPr>
+                <a:solidFill>
+                  <a:srgbClr val="003B4F"/>
+                </a:solidFill>
+                <a:latin typeface="Courier"/>
+              </a:rPr>
+              <a:t> treatment, </a:t>
+            </a:r>
+            <a:br/>
+            <a:r>
+              <a:rPr>
+                <a:solidFill>
+                  <a:srgbClr val="003B4F"/>
+                </a:solidFill>
+                <a:latin typeface="Courier"/>
+              </a:rPr>
+              <a:t>  </a:t>
+            </a:r>
+            <a:r>
+              <a:rPr>
+                <a:solidFill>
+                  <a:srgbClr val="657422"/>
+                </a:solidFill>
+                <a:latin typeface="Courier"/>
+              </a:rPr>
+              <a:t>data =</a:t>
+            </a:r>
+            <a:r>
+              <a:rPr>
+                <a:solidFill>
+                  <a:srgbClr val="003B4F"/>
+                </a:solidFill>
+                <a:latin typeface="Courier"/>
+              </a:rPr>
+              <a:t> circ_data</a:t>
+            </a:r>
+            <a:br/>
+            <a:r>
+              <a:rPr>
+                <a:solidFill>
+                  <a:srgbClr val="003B4F"/>
+                </a:solidFill>
+                <a:latin typeface="Courier"/>
+              </a:rPr>
+              <a:t>)</a:t>
+            </a:r>
+            <a:br/>
+            <a:br/>
+            <a:r>
+              <a:rPr>
+                <a:solidFill>
+                  <a:srgbClr val="5E5E5E"/>
+                </a:solidFill>
+                <a:latin typeface="Courier"/>
+              </a:rPr>
+              <a:t># Display results</a:t>
+            </a:r>
+            <a:br/>
+            <a:r>
+              <a:rPr>
+                <a:solidFill>
+                  <a:srgbClr val="003B4F"/>
+                </a:solidFill>
+                <a:latin typeface="Courier"/>
+              </a:rPr>
+              <a:t>kruskal_original_result</a:t>
+            </a:r>
+          </a:p>
+          <a:p>
+            <a:pPr lvl="0" indent="0">
+              <a:buNone/>
+            </a:pPr>
+            <a:r>
+              <a:rPr>
+                <a:latin typeface="Courier"/>
+              </a:rPr>
+              <a:t>
+    Kruskal-Wallis rank sum test
+data:  phase_shift by treatment
+Kruskal-Wallis chi-squared = 9.4231, df = 2, p-value = 0.008991</a:t>
+            </a:r>
+          </a:p>
+          <a:p>
+            <a:pPr lvl="0" indent="0" marL="0">
+              <a:buNone/>
+            </a:pPr>
+            <a:r>
+              <a:rPr b="1"/>
+              <a:t>Interpretation:</a:t>
+            </a:r>
+            <a:r>
+              <a:rPr/>
+              <a:t> - H = test statistic (chi-squared approximation) - df = degrees of freedom (k - 1 = 3 - 1 = 2) - p-value = 0.0135 (significant at α = 0.05) - Conclusion: At least one group differs from others</a:t>
+            </a:r>
+          </a:p>
+          <a:p>
+            <a:pPr lvl="0" indent="0" marL="0">
+              <a:buNone/>
+            </a:pPr>
+            <a:r>
+              <a:rPr b="1"/>
+              <a:t>Compare to parametric ANOVA:</a:t>
+            </a:r>
+          </a:p>
+          <a:p>
+            <a:pPr lvl="0" indent="0">
+              <a:buNone/>
+            </a:pPr>
+            <a:r>
+              <a:rPr>
+                <a:solidFill>
+                  <a:srgbClr val="4758AB"/>
+                </a:solidFill>
+                <a:latin typeface="Courier"/>
+              </a:rPr>
+              <a:t>anova</a:t>
+            </a:r>
+            <a:r>
+              <a:rPr>
+                <a:solidFill>
+                  <a:srgbClr val="003B4F"/>
+                </a:solidFill>
+                <a:latin typeface="Courier"/>
+              </a:rPr>
+              <a:t>(circ_model)</a:t>
+            </a:r>
+          </a:p>
+          <a:p>
+            <a:pPr lvl="0" indent="0">
+              <a:buNone/>
+            </a:pPr>
+            <a:r>
+              <a:rPr>
+                <a:latin typeface="Courier"/>
+              </a:rPr>
+              <a:t>Analysis of Variance Table
+Response: phase_shift
+          Df Sum Sq Mean Sq F value   Pr(&gt;F)   
+treatment  2 7.2245  3.6122  7.2894 0.004472 **
+Residuals 19 9.4153  0.4955                    
+---
+Signif. codes:  0 '***' 0.001 '**' 0.01 '*' 0.05 '.' 0.1 ' ' 1</a:t>
+            </a:r>
+          </a:p>
+        </p:txBody>
+      </p:sp>
+      <p:sp>
+        <p:nvSpPr>
+          <p:cNvPr id="5" name="Text Placeholder 4"/>
+          <p:cNvSpPr>
+            <a:spLocks noGrp="1"/>
+          </p:cNvSpPr>
+          <p:nvPr>
+            <p:ph idx="3" sz="quarter" type="body"/>
+          </p:nvPr>
+        </p:nvSpPr>
+        <p:spPr/>
+        <p:txBody>
+          <a:bodyPr/>
+          <a:lstStyle/>
+          <a:p>
+            <a:pPr lvl="0" indent="0" marL="0">
+              <a:spcBef>
+                <a:spcPts val="3000"/>
+              </a:spcBef>
+              <a:buNone/>
+            </a:pPr>
+            <a:r>
+              <a:rPr b="1"/>
+              <a:t>Rank Visualization</a:t>
+            </a:r>
+          </a:p>
+          <a:p>
+            <a:pPr lvl="0" indent="0" marL="0">
+              <a:buNone/>
+            </a:pPr>
+            <a:r>
+              <a:rPr b="1"/>
+              <a:t>How Kruskal-Wallis works:</a:t>
+            </a:r>
+          </a:p>
+        </p:txBody>
+      </p:sp>
+      <p:pic>
+        <p:nvPicPr>
+          <p:cNvPr descr="11_01_lecture_powerpoint_files/figure-pptx/kruskal_ranks_plot-1.png" id="0" name="Picture 1"/>
+          <p:cNvPicPr>
+            <a:picLocks noGrp="1" noChangeAspect="1"/>
+          </p:cNvPicPr>
+          <p:nvPr/>
+        </p:nvPicPr>
+        <p:blipFill>
+          <a:blip r:embed="rId2"/>
+          <a:stretch>
+            <a:fillRect/>
+          </a:stretch>
+        </p:blipFill>
+        <p:spPr bwMode="auto">
+          <a:xfrm>
+            <a:off x="4749800" y="1689100"/>
+            <a:ext cx="4038600" cy="2489200"/>
+          </a:xfrm>
+          <a:prstGeom prst="rect">
+            <a:avLst/>
+          </a:prstGeom>
+          <a:noFill/>
+          <a:ln w="9525">
+            <a:noFill/>
+            <a:headEnd/>
+            <a:tailEnd/>
+          </a:ln>
+        </p:spPr>
+      </p:pic>
+      <p:sp>
+        <p:nvSpPr>
+          <p:cNvPr id="6" name="Content Placeholder 5"/>
+          <p:cNvSpPr>
+            <a:spLocks noGrp="1"/>
+          </p:cNvSpPr>
+          <p:nvPr>
+            <p:ph idx="4" sz="quarter"/>
+          </p:nvPr>
+        </p:nvSpPr>
+        <p:spPr/>
+        <p:txBody>
+          <a:bodyPr/>
+          <a:lstStyle/>
+          <a:p>
+            <a:pPr lvl="0" indent="0" marL="0">
+              <a:buNone/>
+            </a:pPr>
+            <a:r>
+              <a:rPr b="1"/>
+              <a:t>Rank Sums:</a:t>
+            </a:r>
+          </a:p>
+          <a:p>
+            <a:pPr lvl="0" indent="0">
+              <a:buNone/>
+            </a:pPr>
+            <a:r>
+              <a:rPr>
+                <a:latin typeface="Courier"/>
+              </a:rPr>
+              <a:t># A tibble: 3 × 4
+  treatment mean_rank sum_rank     n
+  &lt;fct&gt;         &lt;dbl&gt;    &lt;dbl&gt; &lt;int&gt;
+1 Control       14.6       117     8
+2 Eyes           5.29       37     7
+3 Knees         14.1        99     7</a:t>
+            </a:r>
+          </a:p>
+        </p:txBody>
+      </p:sp>
+    </p:spTree>
+  </p:cSld>
+</p:sld>
+</file>
+
+<file path=ppt/slides/slide38.xml><?xml version="1.0" encoding="utf-8"?>
+<p:sld xmlns:a="http://schemas.openxmlformats.org/drawingml/2006/main" xmlns:r="http://schemas.openxmlformats.org/officeDocument/2006/relationships" xmlns:p="http://schemas.openxmlformats.org/presentationml/2006/main">
+  <p:cSld>
+    <p:spTree>
+      <p:nvGrpSpPr>
+        <p:cNvPr id="1" name=""/>
+        <p:cNvGrpSpPr/>
+        <p:nvPr/>
+      </p:nvGrpSpPr>
+      <p:grpSpPr>
+        <a:xfrm>
+          <a:off x="0" y="0"/>
+          <a:ext cx="0" cy="0"/>
+          <a:chOff x="0" y="0"/>
+          <a:chExt cx="0" cy="0"/>
+        </a:xfrm>
+      </p:grpSpPr>
+      <p:sp>
+        <p:nvSpPr>
+          <p:cNvPr id="2" name="Title 1"/>
+          <p:cNvSpPr>
+            <a:spLocks noGrp="1"/>
+          </p:cNvSpPr>
+          <p:nvPr>
+            <p:ph type="title"/>
+          </p:nvPr>
+        </p:nvSpPr>
+        <p:spPr>
+          <a:xfrm>
+            <a:off x="0" y="0"/>
+            <a:ext cx="9144000" cy="602780"/>
+          </a:xfrm>
+          <a:solidFill>
+            <a:srgbClr val="70121D"/>
+          </a:solidFill>
+        </p:spPr>
+        <p:txBody>
+          <a:bodyPr/>
+          <a:lstStyle/>
+          <a:p>
+            <a:pPr lvl="0" indent="0" marL="0">
+              <a:buNone/>
+            </a:pPr>
+            <a:r>
+              <a:rPr/>
+              <a:t>Kruskal-Wallis on Violated Data</a:t>
+            </a:r>
+          </a:p>
+        </p:txBody>
+      </p:sp>
+      <p:sp>
+        <p:nvSpPr>
+          <p:cNvPr id="3" name="Content Placeholder 2"/>
+          <p:cNvSpPr>
+            <a:spLocks noGrp="1"/>
+          </p:cNvSpPr>
+          <p:nvPr>
+            <p:ph idx="1" sz="half"/>
+          </p:nvPr>
+        </p:nvSpPr>
+        <p:spPr/>
+        <p:txBody>
+          <a:bodyPr/>
+          <a:lstStyle/>
+          <a:p>
+            <a:pPr lvl="0" indent="0" marL="0">
+              <a:spcBef>
+                <a:spcPts val="3000"/>
+              </a:spcBef>
+              <a:buNone/>
+            </a:pPr>
+            <a:r>
+              <a:rPr b="1"/>
+              <a:t>Non-Parametric Test Handles Violations</a:t>
+            </a:r>
+          </a:p>
+          <a:p>
+            <a:pPr lvl="0" indent="0" marL="0">
+              <a:buNone/>
+            </a:pPr>
+            <a:r>
+              <a:rPr b="1"/>
+              <a:t>Running Kruskal-Wallis on data with assumption violations:</a:t>
+            </a:r>
+          </a:p>
+          <a:p>
+            <a:pPr lvl="0" indent="0">
+              <a:buNone/>
+            </a:pPr>
+            <a:r>
+              <a:rPr>
+                <a:solidFill>
+                  <a:srgbClr val="5E5E5E"/>
+                </a:solidFill>
+                <a:latin typeface="Courier"/>
+              </a:rPr>
+              <a:t># Kruskal-Wallis test on violated data</a:t>
+            </a:r>
+            <a:br/>
+            <a:r>
+              <a:rPr>
+                <a:solidFill>
+                  <a:srgbClr val="003B4F"/>
+                </a:solidFill>
+                <a:latin typeface="Courier"/>
+              </a:rPr>
+              <a:t>kruskal_violated_result &lt;- </a:t>
+            </a:r>
+            <a:r>
+              <a:rPr>
+                <a:solidFill>
+                  <a:srgbClr val="4758AB"/>
+                </a:solidFill>
+                <a:latin typeface="Courier"/>
+              </a:rPr>
+              <a:t>kruskal.test</a:t>
+            </a:r>
+            <a:r>
+              <a:rPr>
+                <a:solidFill>
+                  <a:srgbClr val="003B4F"/>
+                </a:solidFill>
+                <a:latin typeface="Courier"/>
+              </a:rPr>
+              <a:t>(</a:t>
+            </a:r>
+            <a:br/>
+            <a:r>
+              <a:rPr>
+                <a:solidFill>
+                  <a:srgbClr val="003B4F"/>
+                </a:solidFill>
+                <a:latin typeface="Courier"/>
+              </a:rPr>
+              <a:t>  phase_shift_violated </a:t>
+            </a:r>
+            <a:r>
+              <a:rPr>
+                <a:solidFill>
+                  <a:srgbClr val="5E5E5E"/>
+                </a:solidFill>
+                <a:latin typeface="Courier"/>
+              </a:rPr>
+              <a:t>~</a:t>
+            </a:r>
+            <a:r>
+              <a:rPr>
+                <a:solidFill>
+                  <a:srgbClr val="003B4F"/>
+                </a:solidFill>
+                <a:latin typeface="Courier"/>
+              </a:rPr>
+              <a:t> treatment, </a:t>
+            </a:r>
+            <a:br/>
+            <a:r>
+              <a:rPr>
+                <a:solidFill>
+                  <a:srgbClr val="003B4F"/>
+                </a:solidFill>
+                <a:latin typeface="Courier"/>
+              </a:rPr>
+              <a:t>  </a:t>
+            </a:r>
+            <a:r>
+              <a:rPr>
+                <a:solidFill>
+                  <a:srgbClr val="657422"/>
+                </a:solidFill>
+                <a:latin typeface="Courier"/>
+              </a:rPr>
+              <a:t>data =</a:t>
+            </a:r>
+            <a:r>
+              <a:rPr>
+                <a:solidFill>
+                  <a:srgbClr val="003B4F"/>
+                </a:solidFill>
+                <a:latin typeface="Courier"/>
+              </a:rPr>
+              <a:t> violated_circ_df</a:t>
+            </a:r>
+            <a:br/>
+            <a:r>
+              <a:rPr>
+                <a:solidFill>
+                  <a:srgbClr val="003B4F"/>
+                </a:solidFill>
+                <a:latin typeface="Courier"/>
+              </a:rPr>
+              <a:t>)</a:t>
+            </a:r>
+            <a:br/>
+            <a:br/>
+            <a:r>
+              <a:rPr>
+                <a:solidFill>
+                  <a:srgbClr val="003B4F"/>
+                </a:solidFill>
+                <a:latin typeface="Courier"/>
+              </a:rPr>
+              <a:t>kruskal_violated_result</a:t>
+            </a:r>
+          </a:p>
+          <a:p>
+            <a:pPr lvl="0" indent="0">
+              <a:buNone/>
+            </a:pPr>
+            <a:r>
+              <a:rPr>
+                <a:latin typeface="Courier"/>
+              </a:rPr>
+              <a:t>
+    Kruskal-Wallis rank sum test
+data:  phase_shift_violated by treatment
+Kruskal-Wallis chi-squared = 6.8453, df = 2, p-value = 0.03263</a:t>
+            </a:r>
+          </a:p>
+          <a:p>
+            <a:pPr lvl="0" indent="0" marL="0">
+              <a:buNone/>
+            </a:pPr>
+            <a:r>
+              <a:rPr b="1"/>
+              <a:t>Compare parametric ANOVA on same violated data:</a:t>
+            </a:r>
+          </a:p>
+          <a:p>
+            <a:pPr lvl="0" indent="0">
+              <a:buNone/>
+            </a:pPr>
+            <a:r>
+              <a:rPr>
+                <a:solidFill>
+                  <a:srgbClr val="4758AB"/>
+                </a:solidFill>
+                <a:latin typeface="Courier"/>
+              </a:rPr>
+              <a:t>anova</a:t>
+            </a:r>
+            <a:r>
+              <a:rPr>
+                <a:solidFill>
+                  <a:srgbClr val="003B4F"/>
+                </a:solidFill>
+                <a:latin typeface="Courier"/>
+              </a:rPr>
+              <a:t>(violated_model)</a:t>
+            </a:r>
+          </a:p>
+          <a:p>
+            <a:pPr lvl="0" indent="0">
+              <a:buNone/>
+            </a:pPr>
+            <a:r>
+              <a:rPr>
+                <a:latin typeface="Courier"/>
+              </a:rPr>
+              <a:t>Analysis of Variance Table
+Response: phase_shift_violated
+          Df  Sum Sq Mean Sq F value Pr(&gt;F)  
+treatment  2  41.806 20.9029  2.8361 0.0836 .
+Residuals 19 140.037  7.3704                 
+---
+Signif. codes:  0 '***' 0.001 '**' 0.01 '*' 0.05 '.' 0.1 ' ' 1</a:t>
+            </a:r>
+          </a:p>
+          <a:p>
+            <a:pPr lvl="0" indent="0" marL="0">
+              <a:buNone/>
+            </a:pPr>
+            <a:r>
+              <a:rPr b="1"/>
+              <a:t>Key observations:</a:t>
+            </a:r>
+            <a:r>
+              <a:rPr/>
+              <a:t> - Both tests still detect differences - Kruskal-Wallis more robust to violations - Parametric test may give misleading results when assumptions violated - Non-parametric test maintains validity</a:t>
+            </a:r>
+          </a:p>
+        </p:txBody>
+      </p:sp>
+      <p:pic>
+        <p:nvPicPr>
+          <p:cNvPr descr="11_01_lecture_powerpoint_files/figure-pptx/violated_comparison_plot-1.png" id="0" name="Picture 1"/>
+          <p:cNvPicPr>
+            <a:picLocks noGrp="1" noChangeAspect="1"/>
+          </p:cNvPicPr>
+          <p:nvPr/>
+        </p:nvPicPr>
+        <p:blipFill>
+          <a:blip r:embed="rId2"/>
+          <a:stretch>
+            <a:fillRect/>
+          </a:stretch>
+        </p:blipFill>
+        <p:spPr bwMode="auto">
+          <a:xfrm>
+            <a:off x="6121400" y="2044700"/>
+            <a:ext cx="2781300" cy="1714500"/>
+          </a:xfrm>
+          <a:prstGeom prst="rect">
+            <a:avLst/>
+          </a:prstGeom>
+          <a:noFill/>
+          <a:ln w="9525">
+            <a:noFill/>
+            <a:headEnd/>
+            <a:tailEnd/>
+          </a:ln>
+        </p:spPr>
+      </p:pic>
+    </p:spTree>
+  </p:cSld>
+</p:sld>
+</file>
+
+<file path=ppt/slides/slide39.xml><?xml version="1.0" encoding="utf-8"?>
+<p:sld xmlns:a="http://schemas.openxmlformats.org/drawingml/2006/main" xmlns:r="http://schemas.openxmlformats.org/officeDocument/2006/relationships" xmlns:p="http://schemas.openxmlformats.org/presentationml/2006/main">
+  <p:cSld>
+    <p:spTree>
+      <p:nvGrpSpPr>
+        <p:cNvPr id="1" name=""/>
+        <p:cNvGrpSpPr/>
+        <p:nvPr/>
+      </p:nvGrpSpPr>
+      <p:grpSpPr>
+        <a:xfrm>
+          <a:off x="0" y="0"/>
+          <a:ext cx="0" cy="0"/>
+          <a:chOff x="0" y="0"/>
+          <a:chExt cx="0" cy="0"/>
+        </a:xfrm>
+      </p:grpSpPr>
+      <p:sp>
+        <p:nvSpPr>
+          <p:cNvPr id="2" name="Title 1"/>
+          <p:cNvSpPr>
+            <a:spLocks noGrp="1"/>
+          </p:cNvSpPr>
+          <p:nvPr>
+            <p:ph type="title"/>
+          </p:nvPr>
+        </p:nvSpPr>
+        <p:spPr>
+          <a:xfrm>
+            <a:off x="0" y="0"/>
+            <a:ext cx="9144000" cy="602780"/>
+          </a:xfrm>
+          <a:solidFill>
+            <a:srgbClr val="70121D"/>
+          </a:solidFill>
+        </p:spPr>
+        <p:txBody>
+          <a:bodyPr/>
+          <a:lstStyle/>
+          <a:p>
+            <a:pPr lvl="0" indent="0" marL="0">
+              <a:buNone/>
+            </a:pPr>
+            <a:r>
+              <a:rPr/>
+              <a:t>Post-Hoc Tests for Kruskal-Wallis</a:t>
+            </a:r>
+          </a:p>
+        </p:txBody>
+      </p:sp>
+      <p:sp>
+        <p:nvSpPr>
+          <p:cNvPr id="3" name="Content Placeholder 2"/>
+          <p:cNvSpPr>
+            <a:spLocks noGrp="1"/>
+          </p:cNvSpPr>
+          <p:nvPr>
+            <p:ph idx="1" sz="half"/>
+          </p:nvPr>
+        </p:nvSpPr>
+        <p:spPr/>
+        <p:txBody>
+          <a:bodyPr/>
+          <a:lstStyle/>
+          <a:p>
+            <a:pPr lvl="0" indent="0" marL="0">
+              <a:spcBef>
+                <a:spcPts val="3000"/>
+              </a:spcBef>
+              <a:buNone/>
+            </a:pPr>
+            <a:r>
+              <a:rPr b="1"/>
+              <a:t>Pairwise Comparisons After Significant Kruskal-Wallis</a:t>
+            </a:r>
+          </a:p>
+          <a:p>
+            <a:pPr lvl="0" indent="0" marL="0">
+              <a:buNone/>
+            </a:pPr>
+            <a:r>
+              <a:rPr b="1"/>
+              <a:t>Just like ANOVA, we need post-hoc tests to identify which groups differ:</a:t>
+            </a:r>
+          </a:p>
+          <a:p>
+            <a:pPr lvl="0" indent="0">
+              <a:buNone/>
+            </a:pPr>
+            <a:r>
+              <a:rPr>
+                <a:solidFill>
+                  <a:srgbClr val="5E5E5E"/>
+                </a:solidFill>
+                <a:latin typeface="Courier"/>
+              </a:rPr>
+              <a:t># Pairwise Wilcoxon rank sum tests with </a:t>
+            </a:r>
+            <a:br/>
+            <a:r>
+              <a:rPr>
+                <a:solidFill>
+                  <a:srgbClr val="5E5E5E"/>
+                </a:solidFill>
+                <a:latin typeface="Courier"/>
+              </a:rPr>
+              <a:t># Bonferroni correction</a:t>
+            </a:r>
+            <a:br/>
+            <a:r>
+              <a:rPr>
+                <a:solidFill>
+                  <a:srgbClr val="003B4F"/>
+                </a:solidFill>
+                <a:latin typeface="Courier"/>
+              </a:rPr>
+              <a:t>pairwise_original_result &lt;- </a:t>
+            </a:r>
+            <a:r>
+              <a:rPr>
+                <a:solidFill>
+                  <a:srgbClr val="4758AB"/>
+                </a:solidFill>
+                <a:latin typeface="Courier"/>
+              </a:rPr>
+              <a:t>pairwise.wilcox.test</a:t>
+            </a:r>
+            <a:r>
+              <a:rPr>
+                <a:solidFill>
+                  <a:srgbClr val="003B4F"/>
+                </a:solidFill>
+                <a:latin typeface="Courier"/>
+              </a:rPr>
+              <a:t>(</a:t>
+            </a:r>
+            <a:br/>
+            <a:r>
+              <a:rPr>
+                <a:solidFill>
+                  <a:srgbClr val="003B4F"/>
+                </a:solidFill>
+                <a:latin typeface="Courier"/>
+              </a:rPr>
+              <a:t>  </a:t>
+            </a:r>
+            <a:r>
+              <a:rPr>
+                <a:solidFill>
+                  <a:srgbClr val="657422"/>
+                </a:solidFill>
+                <a:latin typeface="Courier"/>
+              </a:rPr>
+              <a:t>x =</a:t>
+            </a:r>
+            <a:r>
+              <a:rPr>
+                <a:solidFill>
+                  <a:srgbClr val="003B4F"/>
+                </a:solidFill>
+                <a:latin typeface="Courier"/>
+              </a:rPr>
+              <a:t> nonparam_circ_df</a:t>
+            </a:r>
+            <a:r>
+              <a:rPr>
+                <a:solidFill>
+                  <a:srgbClr val="5E5E5E"/>
+                </a:solidFill>
+                <a:latin typeface="Courier"/>
+              </a:rPr>
+              <a:t>$</a:t>
+            </a:r>
+            <a:r>
+              <a:rPr>
+                <a:solidFill>
+                  <a:srgbClr val="003B4F"/>
+                </a:solidFill>
+                <a:latin typeface="Courier"/>
+              </a:rPr>
+              <a:t>phase_shift,</a:t>
+            </a:r>
+            <a:br/>
+            <a:r>
+              <a:rPr>
+                <a:solidFill>
+                  <a:srgbClr val="003B4F"/>
+                </a:solidFill>
+                <a:latin typeface="Courier"/>
+              </a:rPr>
+              <a:t>  </a:t>
+            </a:r>
+            <a:r>
+              <a:rPr>
+                <a:solidFill>
+                  <a:srgbClr val="657422"/>
+                </a:solidFill>
+                <a:latin typeface="Courier"/>
+              </a:rPr>
+              <a:t>g =</a:t>
+            </a:r>
+            <a:r>
+              <a:rPr>
+                <a:solidFill>
+                  <a:srgbClr val="003B4F"/>
+                </a:solidFill>
+                <a:latin typeface="Courier"/>
+              </a:rPr>
+              <a:t> nonparam_circ_df</a:t>
+            </a:r>
+            <a:r>
+              <a:rPr>
+                <a:solidFill>
+                  <a:srgbClr val="5E5E5E"/>
+                </a:solidFill>
+                <a:latin typeface="Courier"/>
+              </a:rPr>
+              <a:t>$</a:t>
+            </a:r>
+            <a:r>
+              <a:rPr>
+                <a:solidFill>
+                  <a:srgbClr val="003B4F"/>
+                </a:solidFill>
+                <a:latin typeface="Courier"/>
+              </a:rPr>
+              <a:t>treatment,</a:t>
+            </a:r>
+            <a:br/>
+            <a:r>
+              <a:rPr>
+                <a:solidFill>
+                  <a:srgbClr val="003B4F"/>
+                </a:solidFill>
+                <a:latin typeface="Courier"/>
+              </a:rPr>
+              <a:t>  </a:t>
+            </a:r>
+            <a:r>
+              <a:rPr>
+                <a:solidFill>
+                  <a:srgbClr val="657422"/>
+                </a:solidFill>
+                <a:latin typeface="Courier"/>
+              </a:rPr>
+              <a:t>p.adjust.method =</a:t>
+            </a:r>
+            <a:r>
+              <a:rPr>
+                <a:solidFill>
+                  <a:srgbClr val="003B4F"/>
+                </a:solidFill>
+                <a:latin typeface="Courier"/>
+              </a:rPr>
+              <a:t> </a:t>
+            </a:r>
+            <a:r>
+              <a:rPr>
+                <a:solidFill>
+                  <a:srgbClr val="20794D"/>
+                </a:solidFill>
+                <a:latin typeface="Courier"/>
+              </a:rPr>
+              <a:t>"bonferroni"</a:t>
+            </a:r>
+            <a:br/>
+            <a:r>
+              <a:rPr>
+                <a:solidFill>
+                  <a:srgbClr val="003B4F"/>
+                </a:solidFill>
+                <a:latin typeface="Courier"/>
+              </a:rPr>
+              <a:t>)</a:t>
+            </a:r>
+            <a:br/>
+            <a:br/>
+            <a:r>
+              <a:rPr>
+                <a:solidFill>
+                  <a:srgbClr val="003B4F"/>
+                </a:solidFill>
+                <a:latin typeface="Courier"/>
+              </a:rPr>
+              <a:t>pairwise_original_result</a:t>
+            </a:r>
+          </a:p>
+          <a:p>
+            <a:pPr lvl="0" indent="0">
+              <a:buNone/>
+            </a:pPr>
+            <a:r>
+              <a:rPr>
+                <a:latin typeface="Courier"/>
+              </a:rPr>
+              <a:t>
+    Pairwise comparisons using Wilcoxon rank sum exact test 
+data:  nonparam_circ_df$phase_shift and nonparam_circ_df$treatment 
+      Control Eyes  
+Eyes  0.0037  -     
+Knees 1.0000  0.0787
+P value adjustment method: bonferroni </a:t>
+            </a:r>
+          </a:p>
+          <a:p>
+            <a:pPr lvl="0" indent="0" marL="0">
+              <a:buNone/>
+            </a:pPr>
+            <a:r>
+              <a:rPr b="1"/>
+              <a:t>Interpretation of p-values:</a:t>
+            </a:r>
+            <a:r>
+              <a:rPr/>
+              <a:t> - Control vs Eyes: p = 0.024 (significant) - Control vs Knees: p = 1.000 (not significant) - Eyes vs Knees: p = 0.078 (not significant)</a:t>
+            </a:r>
+          </a:p>
+          <a:p>
+            <a:pPr lvl="0" indent="0" marL="0">
+              <a:buNone/>
+            </a:pPr>
+            <a:r>
+              <a:rPr b="1"/>
+              <a:t>Common adjustment methods:</a:t>
+            </a:r>
+            <a:r>
+              <a:rPr/>
+              <a:t> - </a:t>
+            </a:r>
+            <a:r>
+              <a:rPr>
+                <a:latin typeface="Courier"/>
+              </a:rPr>
+              <a:t>"bonferroni"</a:t>
+            </a:r>
+            <a:r>
+              <a:rPr/>
+              <a:t>: Most conservative - </a:t>
+            </a:r>
+            <a:r>
+              <a:rPr>
+                <a:latin typeface="Courier"/>
+              </a:rPr>
+              <a:t>"holm"</a:t>
+            </a:r>
+            <a:r>
+              <a:rPr/>
+              <a:t>: Less conservative than Bonferroni - </a:t>
+            </a:r>
+            <a:r>
+              <a:rPr>
+                <a:latin typeface="Courier"/>
+              </a:rPr>
+              <a:t>"BH"</a:t>
+            </a:r>
+            <a:r>
+              <a:rPr/>
+              <a:t>: Benjamini-Hochberg (controls false discovery rate) - </a:t>
+            </a:r>
+            <a:r>
+              <a:rPr>
+                <a:latin typeface="Courier"/>
+              </a:rPr>
+              <a:t>"none"</a:t>
+            </a:r>
+            <a:r>
+              <a:rPr/>
+              <a:t>: No adjustment (not recommended)</a:t>
+            </a:r>
+          </a:p>
+        </p:txBody>
+      </p:sp>
+      <p:sp>
+        <p:nvSpPr>
+          <p:cNvPr id="4" name="Content Placeholder 3"/>
+          <p:cNvSpPr>
+            <a:spLocks noGrp="1"/>
+          </p:cNvSpPr>
+          <p:nvPr>
+            <p:ph idx="2" sz="half"/>
+          </p:nvPr>
+        </p:nvSpPr>
+        <p:spPr/>
+        <p:txBody>
+          <a:bodyPr/>
+          <a:lstStyle/>
+          <a:p>
+            <a:pPr lvl="0" indent="0" marL="0">
+              <a:spcBef>
+                <a:spcPts val="3000"/>
+              </a:spcBef>
+              <a:buNone/>
+            </a:pPr>
+            <a:r>
+              <a:rPr b="1"/>
+              <a:t>Post-Hoc for Violated Data</a:t>
+            </a:r>
+          </a:p>
+          <a:p>
+            <a:pPr lvl="0" indent="0">
+              <a:buNone/>
+            </a:pPr>
+            <a:r>
+              <a:rPr>
+                <a:solidFill>
+                  <a:srgbClr val="5E5E5E"/>
+                </a:solidFill>
+                <a:latin typeface="Courier"/>
+              </a:rPr>
+              <a:t># Post-hoc tests on violated data</a:t>
+            </a:r>
+            <a:br/>
+            <a:r>
+              <a:rPr>
+                <a:solidFill>
+                  <a:srgbClr val="003B4F"/>
+                </a:solidFill>
+                <a:latin typeface="Courier"/>
+              </a:rPr>
+              <a:t>pairwise_violated_result &lt;- </a:t>
+            </a:r>
+            <a:r>
+              <a:rPr>
+                <a:solidFill>
+                  <a:srgbClr val="4758AB"/>
+                </a:solidFill>
+                <a:latin typeface="Courier"/>
+              </a:rPr>
+              <a:t>pairwise.wilcox.test</a:t>
+            </a:r>
+            <a:r>
+              <a:rPr>
+                <a:solidFill>
+                  <a:srgbClr val="003B4F"/>
+                </a:solidFill>
+                <a:latin typeface="Courier"/>
+              </a:rPr>
+              <a:t>(</a:t>
+            </a:r>
+            <a:br/>
+            <a:r>
+              <a:rPr>
+                <a:solidFill>
+                  <a:srgbClr val="003B4F"/>
+                </a:solidFill>
+                <a:latin typeface="Courier"/>
+              </a:rPr>
+              <a:t>  </a:t>
+            </a:r>
+            <a:r>
+              <a:rPr>
+                <a:solidFill>
+                  <a:srgbClr val="657422"/>
+                </a:solidFill>
+                <a:latin typeface="Courier"/>
+              </a:rPr>
+              <a:t>x =</a:t>
+            </a:r>
+            <a:r>
+              <a:rPr>
+                <a:solidFill>
+                  <a:srgbClr val="003B4F"/>
+                </a:solidFill>
+                <a:latin typeface="Courier"/>
+              </a:rPr>
+              <a:t> violated_circ_df</a:t>
+            </a:r>
+            <a:r>
+              <a:rPr>
+                <a:solidFill>
+                  <a:srgbClr val="5E5E5E"/>
+                </a:solidFill>
+                <a:latin typeface="Courier"/>
+              </a:rPr>
+              <a:t>$</a:t>
+            </a:r>
+            <a:r>
+              <a:rPr>
+                <a:solidFill>
+                  <a:srgbClr val="003B4F"/>
+                </a:solidFill>
+                <a:latin typeface="Courier"/>
+              </a:rPr>
+              <a:t>phase_shift_violated,</a:t>
+            </a:r>
+            <a:br/>
+            <a:r>
+              <a:rPr>
+                <a:solidFill>
+                  <a:srgbClr val="003B4F"/>
+                </a:solidFill>
+                <a:latin typeface="Courier"/>
+              </a:rPr>
+              <a:t>  </a:t>
+            </a:r>
+            <a:r>
+              <a:rPr>
+                <a:solidFill>
+                  <a:srgbClr val="657422"/>
+                </a:solidFill>
+                <a:latin typeface="Courier"/>
+              </a:rPr>
+              <a:t>g =</a:t>
+            </a:r>
+            <a:r>
+              <a:rPr>
+                <a:solidFill>
+                  <a:srgbClr val="003B4F"/>
+                </a:solidFill>
+                <a:latin typeface="Courier"/>
+              </a:rPr>
+              <a:t> violated_circ_df</a:t>
+            </a:r>
+            <a:r>
+              <a:rPr>
+                <a:solidFill>
+                  <a:srgbClr val="5E5E5E"/>
+                </a:solidFill>
+                <a:latin typeface="Courier"/>
+              </a:rPr>
+              <a:t>$</a:t>
+            </a:r>
+            <a:r>
+              <a:rPr>
+                <a:solidFill>
+                  <a:srgbClr val="003B4F"/>
+                </a:solidFill>
+                <a:latin typeface="Courier"/>
+              </a:rPr>
+              <a:t>treatment,</a:t>
+            </a:r>
+            <a:br/>
+            <a:r>
+              <a:rPr>
+                <a:solidFill>
+                  <a:srgbClr val="003B4F"/>
+                </a:solidFill>
+                <a:latin typeface="Courier"/>
+              </a:rPr>
+              <a:t>  </a:t>
+            </a:r>
+            <a:r>
+              <a:rPr>
+                <a:solidFill>
+                  <a:srgbClr val="657422"/>
+                </a:solidFill>
+                <a:latin typeface="Courier"/>
+              </a:rPr>
+              <a:t>p.adjust.method =</a:t>
+            </a:r>
+            <a:r>
+              <a:rPr>
+                <a:solidFill>
+                  <a:srgbClr val="003B4F"/>
+                </a:solidFill>
+                <a:latin typeface="Courier"/>
+              </a:rPr>
+              <a:t> </a:t>
+            </a:r>
+            <a:r>
+              <a:rPr>
+                <a:solidFill>
+                  <a:srgbClr val="20794D"/>
+                </a:solidFill>
+                <a:latin typeface="Courier"/>
+              </a:rPr>
+              <a:t>"bonferroni"</a:t>
+            </a:r>
+            <a:br/>
+            <a:r>
+              <a:rPr>
+                <a:solidFill>
+                  <a:srgbClr val="003B4F"/>
+                </a:solidFill>
+                <a:latin typeface="Courier"/>
+              </a:rPr>
+              <a:t>)</a:t>
+            </a:r>
+            <a:br/>
+            <a:br/>
+            <a:r>
+              <a:rPr>
+                <a:solidFill>
+                  <a:srgbClr val="003B4F"/>
+                </a:solidFill>
+                <a:latin typeface="Courier"/>
+              </a:rPr>
+              <a:t>pairwise_violated_result</a:t>
+            </a:r>
+          </a:p>
+          <a:p>
+            <a:pPr lvl="0" indent="0">
+              <a:buNone/>
+            </a:pPr>
+            <a:r>
+              <a:rPr>
+                <a:latin typeface="Courier"/>
+              </a:rPr>
+              <a:t>
+    Pairwise comparisons using Wilcoxon rank sum exact test 
+data:  violated_circ_df$phase_shift_violated and violated_circ_df$treatment 
+      Control Eyes  
+Eyes  0.0037  -     
+Knees 1.0000  1.0000
+P value adjustment method: bonferroni </a:t>
+            </a:r>
+          </a:p>
+          <a:p>
+            <a:pPr lvl="0" indent="0" marL="0">
+              <a:buNone/>
+            </a:pPr>
+            <a:r>
+              <a:rPr b="1"/>
+              <a:t>Comparison table:</a:t>
+            </a:r>
+          </a:p>
+          <a:p>
+            <a:pPr lvl="0" indent="0">
+              <a:buNone/>
+            </a:pPr>
+            <a:r>
+              <a:rPr>
+                <a:latin typeface="Courier"/>
+              </a:rPr>
+              <a:t>Original Data Pairwise p-values:
+   Control vs Eyes:  0.024 *
+   Control vs Knees: 1.000
+   Eyes vs Knees:    0.078</a:t>
+            </a:r>
+          </a:p>
+          <a:p>
+            <a:pPr lvl="0" indent="0">
+              <a:buNone/>
+            </a:pPr>
+            <a:r>
+              <a:rPr>
+                <a:latin typeface="Courier"/>
+              </a:rPr>
+              <a:t>Violated Data Pairwise p-values:
+   Control vs Eyes:  0.015 *
+   Control vs Knees: 1.000
+   Eyes vs Knees:    0.015 *</a:t>
+            </a:r>
+          </a:p>
+        </p:txBody>
+      </p:sp>
     </p:spTree>
   </p:cSld>
 </p:sld>
@@ -12460,6 +16957,852 @@
           </p:sp>
         </mc:Choice>
       </mc:AlternateContent>
+    </p:spTree>
+  </p:cSld>
+</p:sld>
+</file>
+
+<file path=ppt/slides/slide40.xml><?xml version="1.0" encoding="utf-8"?>
+<p:sld xmlns:a="http://schemas.openxmlformats.org/drawingml/2006/main" xmlns:r="http://schemas.openxmlformats.org/officeDocument/2006/relationships" xmlns:p="http://schemas.openxmlformats.org/presentationml/2006/main">
+  <p:cSld>
+    <p:spTree>
+      <p:nvGrpSpPr>
+        <p:cNvPr id="1" name=""/>
+        <p:cNvGrpSpPr/>
+        <p:nvPr/>
+      </p:nvGrpSpPr>
+      <p:grpSpPr>
+        <a:xfrm>
+          <a:off x="0" y="0"/>
+          <a:ext cx="0" cy="0"/>
+          <a:chOff x="0" y="0"/>
+          <a:chExt cx="0" cy="0"/>
+        </a:xfrm>
+      </p:grpSpPr>
+      <p:sp>
+        <p:nvSpPr>
+          <p:cNvPr id="2" name="Title 1"/>
+          <p:cNvSpPr>
+            <a:spLocks noGrp="1"/>
+          </p:cNvSpPr>
+          <p:nvPr>
+            <p:ph type="title"/>
+          </p:nvPr>
+        </p:nvSpPr>
+        <p:spPr>
+          <a:xfrm>
+            <a:off x="0" y="0"/>
+            <a:ext cx="9144000" cy="602780"/>
+          </a:xfrm>
+          <a:solidFill>
+            <a:srgbClr val="70121D"/>
+          </a:solidFill>
+        </p:spPr>
+        <p:txBody>
+          <a:bodyPr/>
+          <a:lstStyle/>
+          <a:p>
+            <a:pPr lvl="0" indent="0" marL="0">
+              <a:buNone/>
+            </a:pPr>
+            <a:r>
+              <a:rPr/>
+              <a:t>Dunn’s Test: Alternative Post-Hoc</a:t>
+            </a:r>
+          </a:p>
+        </p:txBody>
+      </p:sp>
+      <p:sp>
+        <p:nvSpPr>
+          <p:cNvPr id="3" name="Content Placeholder 2"/>
+          <p:cNvSpPr>
+            <a:spLocks noGrp="1"/>
+          </p:cNvSpPr>
+          <p:nvPr>
+            <p:ph idx="1" sz="half"/>
+          </p:nvPr>
+        </p:nvSpPr>
+        <p:spPr/>
+        <p:txBody>
+          <a:bodyPr/>
+          <a:lstStyle/>
+          <a:p>
+            <a:pPr lvl="0" indent="0" marL="0">
+              <a:spcBef>
+                <a:spcPts val="3000"/>
+              </a:spcBef>
+              <a:buNone/>
+            </a:pPr>
+            <a:r>
+              <a:rPr b="1"/>
+              <a:t>Dunn’s Test for Multiple Comparisons</a:t>
+            </a:r>
+          </a:p>
+          <a:p>
+            <a:pPr lvl="0" indent="0" marL="0">
+              <a:buNone/>
+            </a:pPr>
+            <a:r>
+              <a:rPr b="1"/>
+              <a:t>Dunn’s test is specifically designed for Kruskal-Wallis post-hoc comparisons:</a:t>
+            </a:r>
+          </a:p>
+          <a:p>
+            <a:pPr lvl="0" indent="0">
+              <a:buNone/>
+            </a:pPr>
+            <a:r>
+              <a:rPr>
+                <a:solidFill>
+                  <a:srgbClr val="4758AB"/>
+                </a:solidFill>
+                <a:latin typeface="Courier"/>
+              </a:rPr>
+              <a:t>library</a:t>
+            </a:r>
+            <a:r>
+              <a:rPr>
+                <a:solidFill>
+                  <a:srgbClr val="003B4F"/>
+                </a:solidFill>
+                <a:latin typeface="Courier"/>
+              </a:rPr>
+              <a:t>(FSA)</a:t>
+            </a:r>
+            <a:br/>
+            <a:br/>
+            <a:r>
+              <a:rPr>
+                <a:solidFill>
+                  <a:srgbClr val="5E5E5E"/>
+                </a:solidFill>
+                <a:latin typeface="Courier"/>
+              </a:rPr>
+              <a:t># Dunn's test on original data</a:t>
+            </a:r>
+            <a:br/>
+            <a:r>
+              <a:rPr>
+                <a:solidFill>
+                  <a:srgbClr val="003B4F"/>
+                </a:solidFill>
+                <a:latin typeface="Courier"/>
+              </a:rPr>
+              <a:t>dunn_original_result &lt;- </a:t>
+            </a:r>
+            <a:r>
+              <a:rPr>
+                <a:solidFill>
+                  <a:srgbClr val="4758AB"/>
+                </a:solidFill>
+                <a:latin typeface="Courier"/>
+              </a:rPr>
+              <a:t>dunnTest</a:t>
+            </a:r>
+            <a:r>
+              <a:rPr>
+                <a:solidFill>
+                  <a:srgbClr val="003B4F"/>
+                </a:solidFill>
+                <a:latin typeface="Courier"/>
+              </a:rPr>
+              <a:t>(</a:t>
+            </a:r>
+            <a:br/>
+            <a:r>
+              <a:rPr>
+                <a:solidFill>
+                  <a:srgbClr val="003B4F"/>
+                </a:solidFill>
+                <a:latin typeface="Courier"/>
+              </a:rPr>
+              <a:t>  phase_shift </a:t>
+            </a:r>
+            <a:r>
+              <a:rPr>
+                <a:solidFill>
+                  <a:srgbClr val="5E5E5E"/>
+                </a:solidFill>
+                <a:latin typeface="Courier"/>
+              </a:rPr>
+              <a:t>~</a:t>
+            </a:r>
+            <a:r>
+              <a:rPr>
+                <a:solidFill>
+                  <a:srgbClr val="003B4F"/>
+                </a:solidFill>
+                <a:latin typeface="Courier"/>
+              </a:rPr>
+              <a:t> treatment,</a:t>
+            </a:r>
+            <a:br/>
+            <a:r>
+              <a:rPr>
+                <a:solidFill>
+                  <a:srgbClr val="003B4F"/>
+                </a:solidFill>
+                <a:latin typeface="Courier"/>
+              </a:rPr>
+              <a:t>  </a:t>
+            </a:r>
+            <a:r>
+              <a:rPr>
+                <a:solidFill>
+                  <a:srgbClr val="657422"/>
+                </a:solidFill>
+                <a:latin typeface="Courier"/>
+              </a:rPr>
+              <a:t>data =</a:t>
+            </a:r>
+            <a:r>
+              <a:rPr>
+                <a:solidFill>
+                  <a:srgbClr val="003B4F"/>
+                </a:solidFill>
+                <a:latin typeface="Courier"/>
+              </a:rPr>
+              <a:t> circ_data,</a:t>
+            </a:r>
+            <a:br/>
+            <a:r>
+              <a:rPr>
+                <a:solidFill>
+                  <a:srgbClr val="003B4F"/>
+                </a:solidFill>
+                <a:latin typeface="Courier"/>
+              </a:rPr>
+              <a:t>  </a:t>
+            </a:r>
+            <a:r>
+              <a:rPr>
+                <a:solidFill>
+                  <a:srgbClr val="657422"/>
+                </a:solidFill>
+                <a:latin typeface="Courier"/>
+              </a:rPr>
+              <a:t>method =</a:t>
+            </a:r>
+            <a:r>
+              <a:rPr>
+                <a:solidFill>
+                  <a:srgbClr val="003B4F"/>
+                </a:solidFill>
+                <a:latin typeface="Courier"/>
+              </a:rPr>
+              <a:t> </a:t>
+            </a:r>
+            <a:r>
+              <a:rPr>
+                <a:solidFill>
+                  <a:srgbClr val="20794D"/>
+                </a:solidFill>
+                <a:latin typeface="Courier"/>
+              </a:rPr>
+              <a:t>"bonferroni"</a:t>
+            </a:r>
+            <a:br/>
+            <a:r>
+              <a:rPr>
+                <a:solidFill>
+                  <a:srgbClr val="003B4F"/>
+                </a:solidFill>
+                <a:latin typeface="Courier"/>
+              </a:rPr>
+              <a:t>)</a:t>
+            </a:r>
+            <a:br/>
+            <a:br/>
+            <a:r>
+              <a:rPr>
+                <a:solidFill>
+                  <a:srgbClr val="003B4F"/>
+                </a:solidFill>
+                <a:latin typeface="Courier"/>
+              </a:rPr>
+              <a:t>dunn_original_result</a:t>
+            </a:r>
+          </a:p>
+          <a:p>
+            <a:pPr lvl="0" indent="0">
+              <a:buNone/>
+            </a:pPr>
+            <a:r>
+              <a:rPr>
+                <a:latin typeface="Courier"/>
+              </a:rPr>
+              <a:t>       Comparison          Z     P.unadj      P.adj
+1  Control - Eyes  2.7789287 0.005453849 0.01636155
+2 Control - Knees  0.1434629 0.885924641 1.00000000
+3    Eyes - Knees -2.5517789 0.010717452 0.03215236</a:t>
+            </a:r>
+          </a:p>
+          <a:p>
+            <a:pPr lvl="0" indent="0" marL="0">
+              <a:buNone/>
+            </a:pPr>
+            <a:r>
+              <a:rPr b="1"/>
+              <a:t>Advantages of Dunn’s test:</a:t>
+            </a:r>
+            <a:r>
+              <a:rPr/>
+              <a:t> - Designed specifically for Kruskal-Wallis - Provides Z-statistics in addition to p-values - Multiple adjustment methods available - More appropriate than multiple Wilcoxon tests</a:t>
+            </a:r>
+          </a:p>
+          <a:p>
+            <a:pPr lvl="0" indent="0" marL="0">
+              <a:buNone/>
+            </a:pPr>
+            <a:r>
+              <a:rPr/>
+              <a:t>Z-statistic is a standardized test statistic that tells you how many standard deviations an observation or difference is from the expected value (usually zero, meaning “no difference”).</a:t>
+            </a:r>
+          </a:p>
+        </p:txBody>
+      </p:sp>
+      <p:sp>
+        <p:nvSpPr>
+          <p:cNvPr id="4" name="Content Placeholder 3"/>
+          <p:cNvSpPr>
+            <a:spLocks noGrp="1"/>
+          </p:cNvSpPr>
+          <p:nvPr>
+            <p:ph idx="2" sz="half"/>
+          </p:nvPr>
+        </p:nvSpPr>
+        <p:spPr/>
+        <p:txBody>
+          <a:bodyPr/>
+          <a:lstStyle/>
+          <a:p>
+            <a:pPr lvl="0" indent="0" marL="0">
+              <a:spcBef>
+                <a:spcPts val="3000"/>
+              </a:spcBef>
+              <a:buNone/>
+            </a:pPr>
+            <a:r>
+              <a:rPr b="1"/>
+              <a:t>Dunn’s Test on Violated Data</a:t>
+            </a:r>
+          </a:p>
+          <a:p>
+            <a:pPr lvl="0" indent="0">
+              <a:buNone/>
+            </a:pPr>
+            <a:r>
+              <a:rPr>
+                <a:solidFill>
+                  <a:srgbClr val="5E5E5E"/>
+                </a:solidFill>
+                <a:latin typeface="Courier"/>
+              </a:rPr>
+              <a:t># Dunn's test on violated data</a:t>
+            </a:r>
+            <a:br/>
+            <a:r>
+              <a:rPr>
+                <a:solidFill>
+                  <a:srgbClr val="003B4F"/>
+                </a:solidFill>
+                <a:latin typeface="Courier"/>
+              </a:rPr>
+              <a:t>dunn_violated_result &lt;- </a:t>
+            </a:r>
+            <a:r>
+              <a:rPr>
+                <a:solidFill>
+                  <a:srgbClr val="4758AB"/>
+                </a:solidFill>
+                <a:latin typeface="Courier"/>
+              </a:rPr>
+              <a:t>dunnTest</a:t>
+            </a:r>
+            <a:r>
+              <a:rPr>
+                <a:solidFill>
+                  <a:srgbClr val="003B4F"/>
+                </a:solidFill>
+                <a:latin typeface="Courier"/>
+              </a:rPr>
+              <a:t>(</a:t>
+            </a:r>
+            <a:br/>
+            <a:r>
+              <a:rPr>
+                <a:solidFill>
+                  <a:srgbClr val="003B4F"/>
+                </a:solidFill>
+                <a:latin typeface="Courier"/>
+              </a:rPr>
+              <a:t>  phase_shift_violated </a:t>
+            </a:r>
+            <a:r>
+              <a:rPr>
+                <a:solidFill>
+                  <a:srgbClr val="5E5E5E"/>
+                </a:solidFill>
+                <a:latin typeface="Courier"/>
+              </a:rPr>
+              <a:t>~</a:t>
+            </a:r>
+            <a:r>
+              <a:rPr>
+                <a:solidFill>
+                  <a:srgbClr val="003B4F"/>
+                </a:solidFill>
+                <a:latin typeface="Courier"/>
+              </a:rPr>
+              <a:t> treatment,</a:t>
+            </a:r>
+            <a:br/>
+            <a:r>
+              <a:rPr>
+                <a:solidFill>
+                  <a:srgbClr val="003B4F"/>
+                </a:solidFill>
+                <a:latin typeface="Courier"/>
+              </a:rPr>
+              <a:t>  </a:t>
+            </a:r>
+            <a:r>
+              <a:rPr>
+                <a:solidFill>
+                  <a:srgbClr val="657422"/>
+                </a:solidFill>
+                <a:latin typeface="Courier"/>
+              </a:rPr>
+              <a:t>data =</a:t>
+            </a:r>
+            <a:r>
+              <a:rPr>
+                <a:solidFill>
+                  <a:srgbClr val="003B4F"/>
+                </a:solidFill>
+                <a:latin typeface="Courier"/>
+              </a:rPr>
+              <a:t> violated_circ_df,</a:t>
+            </a:r>
+            <a:br/>
+            <a:r>
+              <a:rPr>
+                <a:solidFill>
+                  <a:srgbClr val="003B4F"/>
+                </a:solidFill>
+                <a:latin typeface="Courier"/>
+              </a:rPr>
+              <a:t>  </a:t>
+            </a:r>
+            <a:r>
+              <a:rPr>
+                <a:solidFill>
+                  <a:srgbClr val="657422"/>
+                </a:solidFill>
+                <a:latin typeface="Courier"/>
+              </a:rPr>
+              <a:t>method =</a:t>
+            </a:r>
+            <a:r>
+              <a:rPr>
+                <a:solidFill>
+                  <a:srgbClr val="003B4F"/>
+                </a:solidFill>
+                <a:latin typeface="Courier"/>
+              </a:rPr>
+              <a:t> </a:t>
+            </a:r>
+            <a:r>
+              <a:rPr>
+                <a:solidFill>
+                  <a:srgbClr val="20794D"/>
+                </a:solidFill>
+                <a:latin typeface="Courier"/>
+              </a:rPr>
+              <a:t>"bonferroni"</a:t>
+            </a:r>
+            <a:br/>
+            <a:r>
+              <a:rPr>
+                <a:solidFill>
+                  <a:srgbClr val="003B4F"/>
+                </a:solidFill>
+                <a:latin typeface="Courier"/>
+              </a:rPr>
+              <a:t>)</a:t>
+            </a:r>
+            <a:br/>
+            <a:br/>
+            <a:r>
+              <a:rPr>
+                <a:solidFill>
+                  <a:srgbClr val="003B4F"/>
+                </a:solidFill>
+                <a:latin typeface="Courier"/>
+              </a:rPr>
+              <a:t>dunn_violated_result</a:t>
+            </a:r>
+          </a:p>
+          <a:p>
+            <a:pPr lvl="0" indent="0">
+              <a:buNone/>
+            </a:pPr>
+            <a:r>
+              <a:rPr>
+                <a:latin typeface="Courier"/>
+              </a:rPr>
+              <a:t>       Comparison         Z     P.unadj      P.adj
+1  Control - Eyes  2.614212 0.008943349 0.02683005
+2 Control - Knees  1.126449 0.259975463 0.77992639
+3    Eyes - Knees -1.440520 0.149720243 0.44916073</a:t>
+            </a:r>
+          </a:p>
+          <a:p>
+            <a:pPr lvl="0" indent="0" marL="0">
+              <a:buNone/>
+            </a:pPr>
+            <a:r>
+              <a:rPr b="1"/>
+              <a:t>Interpreting Z-statistics:</a:t>
+            </a:r>
+            <a:r>
+              <a:rPr/>
+              <a:t> - Large |Z| values indicate bigger differences - Z &gt; 1.96 approximately equivalent to p &lt; 0.05 - Sign indicates direction of difference</a:t>
+            </a:r>
+          </a:p>
+        </p:txBody>
+      </p:sp>
+    </p:spTree>
+  </p:cSld>
+</p:sld>
+</file>
+
+<file path=ppt/slides/slide41.xml><?xml version="1.0" encoding="utf-8"?>
+<p:sld xmlns:a="http://schemas.openxmlformats.org/drawingml/2006/main" xmlns:r="http://schemas.openxmlformats.org/officeDocument/2006/relationships" xmlns:p="http://schemas.openxmlformats.org/presentationml/2006/main">
+  <p:cSld>
+    <p:spTree>
+      <p:nvGrpSpPr>
+        <p:cNvPr id="1" name=""/>
+        <p:cNvGrpSpPr/>
+        <p:nvPr/>
+      </p:nvGrpSpPr>
+      <p:grpSpPr>
+        <a:xfrm>
+          <a:off x="0" y="0"/>
+          <a:ext cx="0" cy="0"/>
+          <a:chOff x="0" y="0"/>
+          <a:chExt cx="0" cy="0"/>
+        </a:xfrm>
+      </p:grpSpPr>
+      <p:sp>
+        <p:nvSpPr>
+          <p:cNvPr id="2" name="Title 1"/>
+          <p:cNvSpPr>
+            <a:spLocks noGrp="1"/>
+          </p:cNvSpPr>
+          <p:nvPr>
+            <p:ph type="title"/>
+          </p:nvPr>
+        </p:nvSpPr>
+        <p:spPr>
+          <a:xfrm>
+            <a:off x="0" y="0"/>
+            <a:ext cx="9144000" cy="602780"/>
+          </a:xfrm>
+          <a:solidFill>
+            <a:srgbClr val="70121D"/>
+          </a:solidFill>
+        </p:spPr>
+        <p:txBody>
+          <a:bodyPr/>
+          <a:lstStyle/>
+          <a:p>
+            <a:pPr lvl="0" indent="0" marL="0">
+              <a:buNone/>
+            </a:pPr>
+            <a:r>
+              <a:rPr/>
+              <a:t>Reporting Non-Parametric Results</a:t>
+            </a:r>
+          </a:p>
+        </p:txBody>
+      </p:sp>
+      <p:sp>
+        <p:nvSpPr>
+          <p:cNvPr id="3" name="Content Placeholder 2"/>
+          <p:cNvSpPr>
+            <a:spLocks noGrp="1"/>
+          </p:cNvSpPr>
+          <p:nvPr>
+            <p:ph idx="1" sz="half"/>
+          </p:nvPr>
+        </p:nvSpPr>
+        <p:spPr/>
+        <p:txBody>
+          <a:bodyPr/>
+          <a:lstStyle/>
+          <a:p>
+            <a:pPr lvl="0" indent="0" marL="0">
+              <a:spcBef>
+                <a:spcPts val="3000"/>
+              </a:spcBef>
+              <a:buNone/>
+            </a:pPr>
+            <a:r>
+              <a:rPr b="1"/>
+              <a:t>How to Report Kruskal-Wallis Results</a:t>
+            </a:r>
+          </a:p>
+          <a:p>
+            <a:pPr lvl="0" indent="0" marL="0">
+              <a:buNone/>
+            </a:pPr>
+            <a:r>
+              <a:rPr b="1"/>
+              <a:t>Essential elements to include:</a:t>
+            </a:r>
+          </a:p>
+          <a:p>
+            <a:pPr lvl="0" indent="-342900" marL="342900">
+              <a:buAutoNum type="arabicPeriod"/>
+            </a:pPr>
+            <a:r>
+              <a:rPr/>
+              <a:t>Test name and purpose</a:t>
+            </a:r>
+          </a:p>
+          <a:p>
+            <a:pPr lvl="0" indent="-342900" marL="342900">
+              <a:buAutoNum type="arabicPeriod"/>
+            </a:pPr>
+            <a:r>
+              <a:rPr/>
+              <a:t>Sample sizes per group</a:t>
+            </a:r>
+          </a:p>
+          <a:p>
+            <a:pPr lvl="0" indent="-342900" marL="342900">
+              <a:buAutoNum type="arabicPeriod"/>
+            </a:pPr>
+            <a:r>
+              <a:rPr/>
+              <a:t>Medians and IQRs (not means and SDs!)</a:t>
+            </a:r>
+          </a:p>
+          <a:p>
+            <a:pPr lvl="0" indent="-342900" marL="342900">
+              <a:buAutoNum type="arabicPeriod"/>
+            </a:pPr>
+            <a:r>
+              <a:rPr/>
+              <a:t>Test statistic (H) and degrees of freedom</a:t>
+            </a:r>
+          </a:p>
+          <a:p>
+            <a:pPr lvl="0" indent="-342900" marL="342900">
+              <a:buAutoNum type="arabicPeriod"/>
+            </a:pPr>
+            <a:r>
+              <a:rPr/>
+              <a:t>P-value</a:t>
+            </a:r>
+          </a:p>
+          <a:p>
+            <a:pPr lvl="0" indent="-342900" marL="342900">
+              <a:buAutoNum type="arabicPeriod"/>
+            </a:pPr>
+            <a:r>
+              <a:rPr/>
+              <a:t>Effect size</a:t>
+            </a:r>
+          </a:p>
+          <a:p>
+            <a:pPr lvl="0" indent="-342900" marL="342900">
+              <a:buAutoNum type="arabicPeriod"/>
+            </a:pPr>
+            <a:r>
+              <a:rPr/>
+              <a:t>Post-hoc test results</a:t>
+            </a:r>
+          </a:p>
+          <a:p>
+            <a:pPr lvl="0" indent="-342900" marL="342900">
+              <a:buAutoNum type="arabicPeriod"/>
+            </a:pPr>
+            <a:r>
+              <a:rPr/>
+              <a:t>Conclusion</a:t>
+            </a:r>
+          </a:p>
+          <a:p>
+            <a:pPr lvl="0" indent="0" marL="0">
+              <a:buNone/>
+            </a:pPr>
+            <a:r>
+              <a:rPr b="1"/>
+              <a:t>Example write-up:</a:t>
+            </a:r>
+          </a:p>
+          <a:p>
+            <a:pPr lvl="0" indent="0" marL="0">
+              <a:buNone/>
+            </a:pPr>
+            <a:r>
+              <a:rPr/>
+              <a:t>“A Kruskal-Wallis test was conducted to compare the effect of light treatment on circadian rhythm phase shift across three groups: Control (n = 8), Knees (n = 7), and Eyes (n = 7). Median phase shifts were -0.48 hours (IQR = 0.84) for Control, -0.29 hours (IQR = 1.04) for Knees, and -1.48 hours (IQR = 0.66) for Eyes. The test revealed a statistically significant difference in phase shift between the groups, H(2) = 8.66, p = 0.013, ε² = 0.37. Post-hoc pairwise comparisons using Dunn’s test with Bonferroni correction indicated that the Eyes treatment differed significantly from Control (p = 0.024), but no other pairwise differences were significant. These results suggest that light exposure to the eyes has a different effect on circadian rhythm than light to other body parts.”</a:t>
+            </a:r>
+          </a:p>
+        </p:txBody>
+      </p:sp>
+      <p:sp>
+        <p:nvSpPr>
+          <p:cNvPr id="4" name="Content Placeholder 3"/>
+          <p:cNvSpPr>
+            <a:spLocks noGrp="1"/>
+          </p:cNvSpPr>
+          <p:nvPr>
+            <p:ph idx="2" sz="half"/>
+          </p:nvPr>
+        </p:nvSpPr>
+        <p:spPr/>
+        <p:txBody>
+          <a:bodyPr/>
+          <a:lstStyle/>
+          <a:p>
+            <a:pPr lvl="0" indent="0" marL="0">
+              <a:spcBef>
+                <a:spcPts val="3000"/>
+              </a:spcBef>
+              <a:buNone/>
+            </a:pPr>
+            <a:r>
+              <a:rPr b="1"/>
+              <a:t>APA Style Reporting</a:t>
+            </a:r>
+          </a:p>
+          <a:p>
+            <a:pPr lvl="0" indent="0" marL="0">
+              <a:buNone/>
+            </a:pPr>
+            <a:r>
+              <a:rPr b="1"/>
+              <a:t>In-text citation format:</a:t>
+            </a:r>
+          </a:p>
+          <a:p>
+            <a:pPr lvl="0" indent="0" marL="1270000">
+              <a:buNone/>
+            </a:pPr>
+            <a:r>
+              <a:rPr sz="2000"/>
+              <a:t>The Kruskal-Wallis test revealed significant differences between treatment groups, H(2) = 8.66, p = .013.</a:t>
+            </a:r>
+          </a:p>
+          <a:p>
+            <a:pPr lvl="0" indent="0" marL="0">
+              <a:buNone/>
+            </a:pPr>
+            <a:r>
+              <a:rPr b="1"/>
+              <a:t>Table format:</a:t>
+            </a:r>
+          </a:p>
+          <a:p>
+            <a:pPr lvl="0" indent="0">
+              <a:buNone/>
+            </a:pPr>
+            <a:r>
+              <a:rPr>
+                <a:latin typeface="Courier"/>
+              </a:rPr>
+              <a:t>Table 1. Descriptive Statistics for Phase Shift by Treatment</a:t>
+            </a:r>
+          </a:p>
+          <a:p>
+            <a:pPr lvl="0" indent="0">
+              <a:buNone/>
+            </a:pPr>
+            <a:r>
+              <a:rPr>
+                <a:latin typeface="Courier"/>
+              </a:rPr>
+              <a:t># A tibble: 3 × 6
+  treatment     n Median   IQR   Min   Max
+  &lt;fct&gt;     &lt;int&gt;  &lt;dbl&gt; &lt;dbl&gt; &lt;dbl&gt; &lt;dbl&gt;
+1 Control       8 -0.485 0.89  -1.27  0.53
+2 Eyes          7 -1.48  0.675 -2.83 -0.78
+3 Knees         7 -0.29  0.93  -1.61  0.73</a:t>
+            </a:r>
+          </a:p>
+          <a:p>
+            <a:pPr lvl="0" indent="0">
+              <a:buNone/>
+            </a:pPr>
+            <a:r>
+              <a:rPr>
+                <a:latin typeface="Courier"/>
+              </a:rPr>
+              <a:t>
+Note. IQR = interquartile range.</a:t>
+            </a:r>
+          </a:p>
+          <a:p>
+            <a:pPr lvl="0" indent="0">
+              <a:buNone/>
+            </a:pPr>
+            <a:r>
+              <a:rPr>
+                <a:latin typeface="Courier"/>
+              </a:rPr>
+              <a:t>Kruskal-Wallis H(2) = 8.66, p = .013, ε² = .37</a:t>
+            </a:r>
+          </a:p>
+          <a:p>
+            <a:pPr lvl="0" indent="0" marL="0">
+              <a:buNone/>
+            </a:pPr>
+            <a:r>
+              <a:rPr b="1"/>
+              <a:t>Common mistakes to avoid:</a:t>
+            </a:r>
+          </a:p>
+          <a:p>
+            <a:pPr lvl="0"/>
+            <a:r>
+              <a:rPr/>
+              <a:t>✗ Reporting means instead of medians</a:t>
+            </a:r>
+          </a:p>
+          <a:p>
+            <a:pPr lvl="0"/>
+            <a:r>
+              <a:rPr/>
+              <a:t>✗ Using SD instead of IQR</a:t>
+            </a:r>
+          </a:p>
+          <a:p>
+            <a:pPr lvl="0"/>
+            <a:r>
+              <a:rPr/>
+              <a:t>✗ Not mentioning it’s a non-parametric test</a:t>
+            </a:r>
+          </a:p>
+          <a:p>
+            <a:pPr lvl="0"/>
+            <a:r>
+              <a:rPr/>
+              <a:t>✗ Forgetting effect size</a:t>
+            </a:r>
+          </a:p>
+          <a:p>
+            <a:pPr lvl="0"/>
+            <a:r>
+              <a:rPr/>
+              <a:t>✗ Not justifying why non-parametric test used</a:t>
+            </a:r>
+          </a:p>
+        </p:txBody>
+      </p:sp>
     </p:spTree>
   </p:cSld>
 </p:sld>

--- a/docs/ecostats_lectures/lecture_11/11_01_lecture_powerpoint.pptx
+++ b/docs/ecostats_lectures/lecture_11/11_01_lecture_powerpoint.pptx
@@ -8495,14 +8495,14 @@
             </a:r>
           </a:p>
           <a:p>
-            <a:pPr lvl="0"/>
+            <a:pPr lvl="1"/>
             <a:r>
               <a:rPr/>
               <a:t>Specifically for comparing treatment groups to control</a:t>
             </a:r>
           </a:p>
           <a:p>
-            <a:pPr lvl="0"/>
+            <a:pPr lvl="1"/>
             <a:r>
               <a:rPr/>
               <a:t>More powerful than other tests</a:t>
@@ -11930,21 +11930,21 @@
             </a:r>
           </a:p>
           <a:p>
-            <a:pPr lvl="0"/>
+            <a:pPr lvl="1"/>
             <a:r>
               <a:rPr/>
               <a:t>Tests whether medians differ across groups</a:t>
             </a:r>
           </a:p>
           <a:p>
-            <a:pPr lvl="0"/>
+            <a:pPr lvl="1"/>
             <a:r>
               <a:rPr/>
               <a:t>More robust but less powerful than Kruskal-Wallis</a:t>
             </a:r>
           </a:p>
           <a:p>
-            <a:pPr lvl="0"/>
+            <a:pPr lvl="1"/>
             <a:r>
               <a:rPr/>
               <a:t>Good for highly skewed data</a:t>
@@ -12042,14 +12042,14 @@
             <a:pPr lvl="0"/>
             <a:r>
               <a:rPr/>
-              <a:t>✓ Fewer assumptions</a:t>
+              <a:t>☒ Fewer assumptions</a:t>
             </a:r>
           </a:p>
           <a:p>
             <a:pPr lvl="0"/>
             <a:r>
               <a:rPr/>
-              <a:t>✓ More robust to outliers</a:t>
+              <a:t>☒ More robust to outliers</a:t>
             </a:r>
           </a:p>
           <a:p>
@@ -13390,9 +13390,26 @@
               <a:rPr b="1"/>
               <a:t>What we changed:</a:t>
             </a:r>
-            <a:r>
-              <a:rPr/>
-              <a:t> - Increased variance in Knees group - Added extreme outliers to Eyes group - Created unequal variances and non-normality</a:t>
+          </a:p>
+          <a:p>
+            <a:pPr lvl="0"/>
+            <a:r>
+              <a:rPr/>
+              <a:t>- Increased variance in Knees group</a:t>
+            </a:r>
+          </a:p>
+          <a:p>
+            <a:pPr lvl="0"/>
+            <a:r>
+              <a:rPr/>
+              <a:t>- Added extreme outliers to Eyes group</a:t>
+            </a:r>
+          </a:p>
+          <a:p>
+            <a:pPr lvl="0"/>
+            <a:r>
+              <a:rPr/>
+              <a:t>- Created unequal variances and non-normality</a:t>
             </a:r>
           </a:p>
         </p:txBody>
@@ -13914,6 +13931,254 @@
                 <a:latin typeface="Courier"/>
               </a:rPr>
               <a:t>)</a:t>
+            </a:r>
+            <a:r>
+              <a:rPr>
+                <a:solidFill>
+                  <a:srgbClr val="5E5E5E"/>
+                </a:solidFill>
+                <a:latin typeface="Courier"/>
+              </a:rPr>
+              <a:t>+</a:t>
+            </a:r>
+            <a:br/>
+            <a:r>
+              <a:rPr>
+                <a:solidFill>
+                  <a:srgbClr val="003B4F"/>
+                </a:solidFill>
+                <a:latin typeface="Courier"/>
+              </a:rPr>
+              <a:t>  </a:t>
+            </a:r>
+            <a:r>
+              <a:rPr>
+                <a:solidFill>
+                  <a:srgbClr val="4758AB"/>
+                </a:solidFill>
+                <a:latin typeface="Courier"/>
+              </a:rPr>
+              <a:t>theme_minimal</a:t>
+            </a:r>
+            <a:r>
+              <a:rPr>
+                <a:solidFill>
+                  <a:srgbClr val="003B4F"/>
+                </a:solidFill>
+                <a:latin typeface="Courier"/>
+              </a:rPr>
+              <a:t>() </a:t>
+            </a:r>
+            <a:r>
+              <a:rPr>
+                <a:solidFill>
+                  <a:srgbClr val="5E5E5E"/>
+                </a:solidFill>
+                <a:latin typeface="Courier"/>
+              </a:rPr>
+              <a:t>+</a:t>
+            </a:r>
+            <a:br/>
+            <a:r>
+              <a:rPr>
+                <a:solidFill>
+                  <a:srgbClr val="003B4F"/>
+                </a:solidFill>
+                <a:latin typeface="Courier"/>
+              </a:rPr>
+              <a:t>  </a:t>
+            </a:r>
+            <a:r>
+              <a:rPr>
+                <a:solidFill>
+                  <a:srgbClr val="4758AB"/>
+                </a:solidFill>
+                <a:latin typeface="Courier"/>
+              </a:rPr>
+              <a:t>labs</a:t>
+            </a:r>
+            <a:r>
+              <a:rPr>
+                <a:solidFill>
+                  <a:srgbClr val="003B4F"/>
+                </a:solidFill>
+                <a:latin typeface="Courier"/>
+              </a:rPr>
+              <a:t>(</a:t>
+            </a:r>
+            <a:r>
+              <a:rPr>
+                <a:solidFill>
+                  <a:srgbClr val="657422"/>
+                </a:solidFill>
+                <a:latin typeface="Courier"/>
+              </a:rPr>
+              <a:t>title =</a:t>
+            </a:r>
+            <a:r>
+              <a:rPr>
+                <a:solidFill>
+                  <a:srgbClr val="003B4F"/>
+                </a:solidFill>
+                <a:latin typeface="Courier"/>
+              </a:rPr>
+              <a:t> </a:t>
+            </a:r>
+            <a:r>
+              <a:rPr>
+                <a:solidFill>
+                  <a:srgbClr val="20794D"/>
+                </a:solidFill>
+                <a:latin typeface="Courier"/>
+              </a:rPr>
+              <a:t>"Modified Data with Violations"</a:t>
+            </a:r>
+            <a:r>
+              <a:rPr>
+                <a:solidFill>
+                  <a:srgbClr val="003B4F"/>
+                </a:solidFill>
+                <a:latin typeface="Courier"/>
+              </a:rPr>
+              <a:t>,</a:t>
+            </a:r>
+            <a:br/>
+            <a:r>
+              <a:rPr>
+                <a:solidFill>
+                  <a:srgbClr val="003B4F"/>
+                </a:solidFill>
+                <a:latin typeface="Courier"/>
+              </a:rPr>
+              <a:t>       </a:t>
+            </a:r>
+            <a:r>
+              <a:rPr>
+                <a:solidFill>
+                  <a:srgbClr val="657422"/>
+                </a:solidFill>
+                <a:latin typeface="Courier"/>
+              </a:rPr>
+              <a:t>subtitle =</a:t>
+            </a:r>
+            <a:r>
+              <a:rPr>
+                <a:solidFill>
+                  <a:srgbClr val="003B4F"/>
+                </a:solidFill>
+                <a:latin typeface="Courier"/>
+              </a:rPr>
+              <a:t> </a:t>
+            </a:r>
+            <a:r>
+              <a:rPr>
+                <a:solidFill>
+                  <a:srgbClr val="20794D"/>
+                </a:solidFill>
+                <a:latin typeface="Courier"/>
+              </a:rPr>
+              <a:t>"Median with IQR"</a:t>
+            </a:r>
+            <a:r>
+              <a:rPr>
+                <a:solidFill>
+                  <a:srgbClr val="003B4F"/>
+                </a:solidFill>
+                <a:latin typeface="Courier"/>
+              </a:rPr>
+              <a:t>,</a:t>
+            </a:r>
+            <a:br/>
+            <a:r>
+              <a:rPr>
+                <a:solidFill>
+                  <a:srgbClr val="003B4F"/>
+                </a:solidFill>
+                <a:latin typeface="Courier"/>
+              </a:rPr>
+              <a:t>       </a:t>
+            </a:r>
+            <a:r>
+              <a:rPr>
+                <a:solidFill>
+                  <a:srgbClr val="657422"/>
+                </a:solidFill>
+                <a:latin typeface="Courier"/>
+              </a:rPr>
+              <a:t>x =</a:t>
+            </a:r>
+            <a:r>
+              <a:rPr>
+                <a:solidFill>
+                  <a:srgbClr val="003B4F"/>
+                </a:solidFill>
+                <a:latin typeface="Courier"/>
+              </a:rPr>
+              <a:t> </a:t>
+            </a:r>
+            <a:r>
+              <a:rPr>
+                <a:solidFill>
+                  <a:srgbClr val="20794D"/>
+                </a:solidFill>
+                <a:latin typeface="Courier"/>
+              </a:rPr>
+              <a:t>"Light Treatment"</a:t>
+            </a:r>
+            <a:r>
+              <a:rPr>
+                <a:solidFill>
+                  <a:srgbClr val="003B4F"/>
+                </a:solidFill>
+                <a:latin typeface="Courier"/>
+              </a:rPr>
+              <a:t>,</a:t>
+            </a:r>
+            <a:br/>
+            <a:r>
+              <a:rPr>
+                <a:solidFill>
+                  <a:srgbClr val="003B4F"/>
+                </a:solidFill>
+                <a:latin typeface="Courier"/>
+              </a:rPr>
+              <a:t>       </a:t>
+            </a:r>
+            <a:r>
+              <a:rPr>
+                <a:solidFill>
+                  <a:srgbClr val="657422"/>
+                </a:solidFill>
+                <a:latin typeface="Courier"/>
+              </a:rPr>
+              <a:t>y =</a:t>
+            </a:r>
+            <a:r>
+              <a:rPr>
+                <a:solidFill>
+                  <a:srgbClr val="003B4F"/>
+                </a:solidFill>
+                <a:latin typeface="Courier"/>
+              </a:rPr>
+              <a:t> </a:t>
+            </a:r>
+            <a:r>
+              <a:rPr>
+                <a:solidFill>
+                  <a:srgbClr val="20794D"/>
+                </a:solidFill>
+                <a:latin typeface="Courier"/>
+              </a:rPr>
+              <a:t>"Phase Shift (hours)"</a:t>
+            </a:r>
+            <a:r>
+              <a:rPr>
+                <a:solidFill>
+                  <a:srgbClr val="003B4F"/>
+                </a:solidFill>
+                <a:latin typeface="Courier"/>
+              </a:rPr>
+              <a:t>) </a:t>
             </a:r>
           </a:p>
         </p:txBody>
@@ -13948,629 +14213,6 @@
           </a:ln>
         </p:spPr>
       </p:pic>
-      <p:sp>
-        <p:nvSpPr>
-          <p:cNvPr id="6" name="Content Placeholder 5"/>
-          <p:cNvSpPr>
-            <a:spLocks noGrp="1"/>
-          </p:cNvSpPr>
-          <p:nvPr>
-            <p:ph idx="4" sz="quarter"/>
-          </p:nvPr>
-        </p:nvSpPr>
-        <p:spPr/>
-        <p:txBody>
-          <a:bodyPr/>
-          <a:lstStyle/>
-          <a:p>
-            <a:pPr lvl="0" indent="0">
-              <a:buNone/>
-            </a:pPr>
-            <a:r>
-              <a:rPr>
-                <a:solidFill>
-                  <a:srgbClr val="003B4F"/>
-                </a:solidFill>
-                <a:latin typeface="Courier"/>
-              </a:rPr>
-              <a:t>  </a:t>
-            </a:r>
-            <a:r>
-              <a:rPr>
-                <a:solidFill>
-                  <a:srgbClr val="4758AB"/>
-                </a:solidFill>
-                <a:latin typeface="Courier"/>
-              </a:rPr>
-              <a:t>theme_minimal</a:t>
-            </a:r>
-            <a:r>
-              <a:rPr>
-                <a:solidFill>
-                  <a:srgbClr val="003B4F"/>
-                </a:solidFill>
-                <a:latin typeface="Courier"/>
-              </a:rPr>
-              <a:t>() </a:t>
-            </a:r>
-            <a:r>
-              <a:rPr>
-                <a:solidFill>
-                  <a:srgbClr val="5E5E5E"/>
-                </a:solidFill>
-                <a:latin typeface="Courier"/>
-              </a:rPr>
-              <a:t>+</a:t>
-            </a:r>
-            <a:br/>
-            <a:r>
-              <a:rPr>
-                <a:solidFill>
-                  <a:srgbClr val="003B4F"/>
-                </a:solidFill>
-                <a:latin typeface="Courier"/>
-              </a:rPr>
-              <a:t>  </a:t>
-            </a:r>
-            <a:r>
-              <a:rPr>
-                <a:solidFill>
-                  <a:srgbClr val="4758AB"/>
-                </a:solidFill>
-                <a:latin typeface="Courier"/>
-              </a:rPr>
-              <a:t>labs</a:t>
-            </a:r>
-            <a:r>
-              <a:rPr>
-                <a:solidFill>
-                  <a:srgbClr val="003B4F"/>
-                </a:solidFill>
-                <a:latin typeface="Courier"/>
-              </a:rPr>
-              <a:t>(</a:t>
-            </a:r>
-            <a:r>
-              <a:rPr>
-                <a:solidFill>
-                  <a:srgbClr val="657422"/>
-                </a:solidFill>
-                <a:latin typeface="Courier"/>
-              </a:rPr>
-              <a:t>title =</a:t>
-            </a:r>
-            <a:r>
-              <a:rPr>
-                <a:solidFill>
-                  <a:srgbClr val="003B4F"/>
-                </a:solidFill>
-                <a:latin typeface="Courier"/>
-              </a:rPr>
-              <a:t> </a:t>
-            </a:r>
-            <a:r>
-              <a:rPr>
-                <a:solidFill>
-                  <a:srgbClr val="20794D"/>
-                </a:solidFill>
-                <a:latin typeface="Courier"/>
-              </a:rPr>
-              <a:t>"Modified Data with Violations"</a:t>
-            </a:r>
-            <a:r>
-              <a:rPr>
-                <a:solidFill>
-                  <a:srgbClr val="003B4F"/>
-                </a:solidFill>
-                <a:latin typeface="Courier"/>
-              </a:rPr>
-              <a:t>,</a:t>
-            </a:r>
-            <a:br/>
-            <a:r>
-              <a:rPr>
-                <a:solidFill>
-                  <a:srgbClr val="003B4F"/>
-                </a:solidFill>
-                <a:latin typeface="Courier"/>
-              </a:rPr>
-              <a:t>       </a:t>
-            </a:r>
-            <a:r>
-              <a:rPr>
-                <a:solidFill>
-                  <a:srgbClr val="657422"/>
-                </a:solidFill>
-                <a:latin typeface="Courier"/>
-              </a:rPr>
-              <a:t>subtitle =</a:t>
-            </a:r>
-            <a:r>
-              <a:rPr>
-                <a:solidFill>
-                  <a:srgbClr val="003B4F"/>
-                </a:solidFill>
-                <a:latin typeface="Courier"/>
-              </a:rPr>
-              <a:t> </a:t>
-            </a:r>
-            <a:r>
-              <a:rPr>
-                <a:solidFill>
-                  <a:srgbClr val="20794D"/>
-                </a:solidFill>
-                <a:latin typeface="Courier"/>
-              </a:rPr>
-              <a:t>"Median with IQR"</a:t>
-            </a:r>
-            <a:r>
-              <a:rPr>
-                <a:solidFill>
-                  <a:srgbClr val="003B4F"/>
-                </a:solidFill>
-                <a:latin typeface="Courier"/>
-              </a:rPr>
-              <a:t>,</a:t>
-            </a:r>
-            <a:br/>
-            <a:r>
-              <a:rPr>
-                <a:solidFill>
-                  <a:srgbClr val="003B4F"/>
-                </a:solidFill>
-                <a:latin typeface="Courier"/>
-              </a:rPr>
-              <a:t>       </a:t>
-            </a:r>
-            <a:r>
-              <a:rPr>
-                <a:solidFill>
-                  <a:srgbClr val="657422"/>
-                </a:solidFill>
-                <a:latin typeface="Courier"/>
-              </a:rPr>
-              <a:t>x =</a:t>
-            </a:r>
-            <a:r>
-              <a:rPr>
-                <a:solidFill>
-                  <a:srgbClr val="003B4F"/>
-                </a:solidFill>
-                <a:latin typeface="Courier"/>
-              </a:rPr>
-              <a:t> </a:t>
-            </a:r>
-            <a:r>
-              <a:rPr>
-                <a:solidFill>
-                  <a:srgbClr val="20794D"/>
-                </a:solidFill>
-                <a:latin typeface="Courier"/>
-              </a:rPr>
-              <a:t>"Light Treatment"</a:t>
-            </a:r>
-            <a:r>
-              <a:rPr>
-                <a:solidFill>
-                  <a:srgbClr val="003B4F"/>
-                </a:solidFill>
-                <a:latin typeface="Courier"/>
-              </a:rPr>
-              <a:t>,</a:t>
-            </a:r>
-            <a:br/>
-            <a:r>
-              <a:rPr>
-                <a:solidFill>
-                  <a:srgbClr val="003B4F"/>
-                </a:solidFill>
-                <a:latin typeface="Courier"/>
-              </a:rPr>
-              <a:t>       </a:t>
-            </a:r>
-            <a:r>
-              <a:rPr>
-                <a:solidFill>
-                  <a:srgbClr val="657422"/>
-                </a:solidFill>
-                <a:latin typeface="Courier"/>
-              </a:rPr>
-              <a:t>y =</a:t>
-            </a:r>
-            <a:r>
-              <a:rPr>
-                <a:solidFill>
-                  <a:srgbClr val="003B4F"/>
-                </a:solidFill>
-                <a:latin typeface="Courier"/>
-              </a:rPr>
-              <a:t> </a:t>
-            </a:r>
-            <a:r>
-              <a:rPr>
-                <a:solidFill>
-                  <a:srgbClr val="20794D"/>
-                </a:solidFill>
-                <a:latin typeface="Courier"/>
-              </a:rPr>
-              <a:t>"Phase Shift (hours)"</a:t>
-            </a:r>
-            <a:r>
-              <a:rPr>
-                <a:solidFill>
-                  <a:srgbClr val="003B4F"/>
-                </a:solidFill>
-                <a:latin typeface="Courier"/>
-              </a:rPr>
-              <a:t>) </a:t>
-            </a:r>
-          </a:p>
-          <a:p>
-            <a:pPr lvl="0" indent="0">
-              <a:buNone/>
-            </a:pPr>
-            <a:r>
-              <a:rPr>
-                <a:latin typeface="Courier"/>
-              </a:rPr>
-              <a:t>&lt;theme&gt; List of 147
- $ line                            : &lt;ggplot2::element_line&gt;
-  ..@ colour       : chr "black"
-  ..@ linewidth    : num 0.5
-  ..@ linetype     : num 1
-  ..@ lineend      : chr "butt"
-  ..@ linejoin     : chr "round"
-  ..@ arrow        : logi FALSE
-  ..@ arrow.fill   : chr "black"
-  ..@ inherit.blank: logi TRUE
- $ rect                            : &lt;ggplot2::element_rect&gt;
-  ..@ fill         : chr "white"
-  ..@ colour       : chr "black"
-  ..@ linewidth    : num 0.5
-  ..@ linetype     : num 1
-  ..@ linejoin     : chr "round"
-  ..@ inherit.blank: logi TRUE
- $ text                            : &lt;ggplot2::element_text&gt;
-  ..@ family       : chr ""
-  ..@ face         : chr "plain"
-  ..@ italic       : chr NA
-  ..@ fontweight   : num NA
-  ..@ fontwidth    : num NA
-  ..@ colour       : chr "black"
-  ..@ size         : num 11
-  ..@ hjust        : num 0.5
-  ..@ vjust        : num 0.5
-  ..@ angle        : num 0
-  ..@ lineheight   : num 0.9
-  ..@ margin       : &lt;ggplot2::margin&gt; num [1:4] 0 0 0 0
-  ..@ debug        : logi FALSE
-  ..@ inherit.blank: logi TRUE
- $ title                           : chr "Modified Data with Violations"
- $ point                           : &lt;ggplot2::element_point&gt;
-  ..@ colour       : chr "black"
-  ..@ shape        : num 19
-  ..@ size         : num 1.5
-  ..@ fill         : chr "white"
-  ..@ stroke       : num 0.5
-  ..@ inherit.blank: logi TRUE
- $ polygon                         : &lt;ggplot2::element_polygon&gt;
-  ..@ fill         : chr "white"
-  ..@ colour       : chr "black"
-  ..@ linewidth    : num 0.5
-  ..@ linetype     : num 1
-  ..@ linejoin     : chr "round"
-  ..@ inherit.blank: logi TRUE
- $ geom                            : &lt;ggplot2::element_geom&gt;
-  ..@ ink        : chr "black"
-  ..@ paper      : chr "white"
-  ..@ accent     : chr "#3366FF"
-  ..@ linewidth  : num 0.5
-  ..@ borderwidth: num 0.5
-  ..@ linetype   : int 1
-  ..@ bordertype : int 1
-  ..@ family     : chr ""
-  ..@ fontsize   : num 3.87
-  ..@ pointsize  : num 1.5
-  ..@ pointshape : num 19
-  ..@ colour     : NULL
-  ..@ fill       : NULL
- $ spacing                         : 'simpleUnit' num 5.5points
-  ..- attr(*, "unit")= int 8
- $ margins                         : &lt;ggplot2::margin&gt; num [1:4] 5.5 5.5 5.5 5.5
- $ aspect.ratio                    : NULL
- $ axis.title                      : NULL
- $ axis.title.x                    : &lt;ggplot2::element_text&gt;
-  ..@ family       : NULL
-  ..@ face         : NULL
-  ..@ italic       : chr NA
-  ..@ fontweight   : num NA
-  ..@ fontwidth    : num NA
-  ..@ colour       : NULL
-  ..@ size         : NULL
-  ..@ hjust        : NULL
-  ..@ vjust        : num 1
-  ..@ angle        : NULL
-  ..@ lineheight   : NULL
-  ..@ margin       : &lt;ggplot2::margin&gt; num [1:4] 2.75 0 0 0
-  ..@ debug        : NULL
-  ..@ inherit.blank: logi TRUE
- $ axis.title.x.top                : &lt;ggplot2::element_text&gt;
-  ..@ family       : NULL
-  ..@ face         : NULL
-  ..@ italic       : chr NA
-  ..@ fontweight   : num NA
-  ..@ fontwidth    : num NA
-  ..@ colour       : NULL
-  ..@ size         : NULL
-  ..@ hjust        : NULL
-  ..@ vjust        : num 0
-  ..@ angle        : NULL
-  ..@ lineheight   : NULL
-  ..@ margin       : &lt;ggplot2::margin&gt; num [1:4] 0 0 2.75 0
-  ..@ debug        : NULL
-  ..@ inherit.blank: logi TRUE
- $ axis.title.x.bottom             : NULL
- $ axis.title.y                    : &lt;ggplot2::element_text&gt;
-  ..@ family       : NULL
-  ..@ face         : NULL
-  ..@ italic       : chr NA
-  ..@ fontweight   : num NA
-  ..@ fontwidth    : num NA
-  ..@ colour       : NULL
-  ..@ size         : NULL
-  ..@ hjust        : NULL
-  ..@ vjust        : num 1
-  ..@ angle        : num 90
-  ..@ lineheight   : NULL
-  ..@ margin       : &lt;ggplot2::margin&gt; num [1:4] 0 2.75 0 0
-  ..@ debug        : NULL
-  ..@ inherit.blank: logi TRUE
- $ axis.title.y.left               : NULL
- $ axis.title.y.right              : &lt;ggplot2::element_text&gt;
-  ..@ family       : NULL
-  ..@ face         : NULL
-  ..@ italic       : chr NA
-  ..@ fontweight   : num NA
-  ..@ fontwidth    : num NA
-  ..@ colour       : NULL
-  ..@ size         : NULL
-  ..@ hjust        : NULL
-  ..@ vjust        : num 1
-  ..@ angle        : num -90
-  ..@ lineheight   : NULL
-  ..@ margin       : &lt;ggplot2::margin&gt; num [1:4] 0 0 0 2.75
-  ..@ debug        : NULL
-  ..@ inherit.blank: logi TRUE
- $ axis.text                       : &lt;ggplot2::element_text&gt;
-  ..@ family       : NULL
-  ..@ face         : NULL
-  ..@ italic       : chr NA
-  ..@ fontweight   : num NA
-  ..@ fontwidth    : num NA
-  ..@ colour       : chr "#4D4D4DFF"
-  ..@ size         : 'rel' num 0.8
-  ..@ hjust        : NULL
-  ..@ vjust        : NULL
-  ..@ angle        : NULL
-  ..@ lineheight   : NULL
-  ..@ margin       : NULL
-  ..@ debug        : NULL
-  ..@ inherit.blank: logi TRUE
- $ axis.text.x                     : &lt;ggplot2::element_text&gt;
-  ..@ family       : NULL
-  ..@ face         : NULL
-  ..@ italic       : chr NA
-  ..@ fontweight   : num NA
-  ..@ fontwidth    : num NA
-  ..@ colour       : NULL
-  ..@ size         : NULL
-  ..@ hjust        : NULL
-  ..@ vjust        : num 1
-  ..@ angle        : NULL
-  ..@ lineheight   : NULL
-  ..@ margin       : &lt;ggplot2::margin&gt; num [1:4] 2.2 0 0 0
-  ..@ debug        : NULL
-  ..@ inherit.blank: logi TRUE
- $ axis.text.x.top                 : &lt;ggplot2::element_text&gt;
-  ..@ family       : NULL
-  ..@ face         : NULL
-  ..@ italic       : chr NA
-  ..@ fontweight   : num NA
-  ..@ fontwidth    : num NA
-  ..@ colour       : NULL
-  ..@ size         : NULL
-  ..@ hjust        : NULL
-  ..@ vjust        : NULL
-  ..@ angle        : NULL
-  ..@ lineheight   : NULL
-  ..@ margin       : &lt;ggplot2::margin&gt; num [1:4] 0 0 4.95 0
-  ..@ debug        : NULL
-  ..@ inherit.blank: logi TRUE
- $ axis.text.x.bottom              : &lt;ggplot2::element_text&gt;
-  ..@ family       : NULL
-  ..@ face         : NULL
-  ..@ italic       : chr NA
-  ..@ fontweight   : num NA
-  ..@ fontwidth    : num NA
-  ..@ colour       : NULL
-  ..@ size         : NULL
-  ..@ hjust        : NULL
-  ..@ vjust        : NULL
-  ..@ angle        : NULL
-  ..@ lineheight   : NULL
-  ..@ margin       : &lt;ggplot2::margin&gt; num [1:4] 4.95 0 0 0
-  ..@ debug        : NULL
-  ..@ inherit.blank: logi TRUE
- $ axis.text.y                     : &lt;ggplot2::element_text&gt;
-  ..@ family       : NULL
-  ..@ face         : NULL
-  ..@ italic       : chr NA
-  ..@ fontweight   : num NA
-  ..@ fontwidth    : num NA
-  ..@ colour       : NULL
-  ..@ size         : NULL
-  ..@ hjust        : num 1
-  ..@ vjust        : NULL
-  ..@ angle        : NULL
-  ..@ lineheight   : NULL
-  ..@ margin       : &lt;ggplot2::margin&gt; num [1:4] 0 2.2 0 0
-  ..@ debug        : NULL
-  ..@ inherit.blank: logi TRUE
- $ axis.text.y.left                : &lt;ggplot2::element_text&gt;
-  ..@ family       : NULL
-  ..@ face         : NULL
-  ..@ italic       : chr NA
-  ..@ fontweight   : num NA
-  ..@ fontwidth    : num NA
-  ..@ colour       : NULL
-  ..@ size         : NULL
-  ..@ hjust        : NULL
-  ..@ vjust        : NULL
-  ..@ angle        : NULL
-  ..@ lineheight   : NULL
-  ..@ margin       : &lt;ggplot2::margin&gt; num [1:4] 0 4.95 0 0
-  ..@ debug        : NULL
-  ..@ inherit.blank: logi TRUE
- $ axis.text.y.right               : &lt;ggplot2::element_text&gt;
-  ..@ family       : NULL
-  ..@ face         : NULL
-  ..@ italic       : chr NA
-  ..@ fontweight   : num NA
-  ..@ fontwidth    : num NA
-  ..@ colour       : NULL
-  ..@ size         : NULL
-  ..@ hjust        : NULL
-  ..@ vjust        : NULL
-  ..@ angle        : NULL
-  ..@ lineheight   : NULL
-  ..@ margin       : &lt;ggplot2::margin&gt; num [1:4] 0 0 0 4.95
-  ..@ debug        : NULL
-  ..@ inherit.blank: logi TRUE
- $ axis.text.theta                 : NULL
- $ axis.text.r                     : &lt;ggplot2::element_text&gt;
-  ..@ family       : NULL
-  ..@ face         : NULL
-  ..@ italic       : chr NA
-  ..@ fontweight   : num NA
-  ..@ fontwidth    : num NA
-  ..@ colour       : NULL
-  ..@ size         : NULL
-  ..@ hjust        : num 0.5
-  ..@ vjust        : NULL
-  ..@ angle        : NULL
-  ..@ lineheight   : NULL
-  ..@ margin       : &lt;ggplot2::margin&gt; num [1:4] 0 2.2 0 2.2
-  ..@ debug        : NULL
-  ..@ inherit.blank: logi TRUE
- $ axis.ticks                      : &lt;ggplot2::element_blank&gt;
- $ axis.ticks.x                    : NULL
- $ axis.ticks.x.top                : NULL
- $ axis.ticks.x.bottom             : NULL
- $ axis.ticks.y                    : NULL
- $ axis.ticks.y.left               : NULL
- $ axis.ticks.y.right              : NULL
- $ axis.ticks.theta                : NULL
- $ axis.ticks.r                    : NULL
- $ axis.minor.ticks.x.top          : NULL
- $ axis.minor.ticks.x.bottom       : NULL
- $ axis.minor.ticks.y.left         : NULL
- $ axis.minor.ticks.y.right        : NULL
- $ axis.minor.ticks.theta          : NULL
- $ axis.minor.ticks.r              : NULL
- $ axis.ticks.length               : 'rel' num 0.5
- $ axis.ticks.length.x             : NULL
- $ axis.ticks.length.x.top         : NULL
- $ axis.ticks.length.x.bottom      : NULL
- $ axis.ticks.length.y             : NULL
- $ axis.ticks.length.y.left        : NULL
- $ axis.ticks.length.y.right       : NULL
- $ axis.ticks.length.theta         : NULL
- $ axis.ticks.length.r             : NULL
- $ axis.minor.ticks.length         : 'rel' num 0.75
- $ axis.minor.ticks.length.x       : NULL
- $ axis.minor.ticks.length.x.top   : NULL
- $ axis.minor.ticks.length.x.bottom: NULL
- $ axis.minor.ticks.length.y       : NULL
- $ axis.minor.ticks.length.y.left  : NULL
- $ axis.minor.ticks.length.y.right : NULL
- $ axis.minor.ticks.length.theta   : NULL
- $ axis.minor.ticks.length.r       : NULL
- $ axis.line                       : &lt;ggplot2::element_blank&gt;
- $ axis.line.x                     : NULL
- $ axis.line.x.top                 : NULL
- $ axis.line.x.bottom              : NULL
- $ axis.line.y                     : NULL
- $ axis.line.y.left                : NULL
- $ axis.line.y.right               : NULL
- $ axis.line.theta                 : NULL
- $ axis.line.r                     : NULL
- $ legend.background               : &lt;ggplot2::element_blank&gt;
- $ legend.margin                   : NULL
- $ legend.spacing                  : 'rel' num 2
- $ legend.spacing.x                : NULL
- $ legend.spacing.y                : NULL
- $ legend.key                      : &lt;ggplot2::element_blank&gt;
- $ legend.key.size                 : 'simpleUnit' num 1.2lines
-  ..- attr(*, "unit")= int 3
- $ legend.key.height               : NULL
- $ legend.key.width                : NULL
- $ legend.key.spacing              : NULL
- $ legend.key.spacing.x            : NULL
- $ legend.key.spacing.y            : NULL
- $ legend.key.justification        : NULL
- $ legend.frame                    : NULL
- $ legend.ticks                    : NULL
- $ legend.ticks.length             : 'rel' num 0.2
- $ legend.axis.line                : NULL
- $ legend.text                     : &lt;ggplot2::element_text&gt;
-  ..@ family       : NULL
-  ..@ face         : NULL
-  ..@ italic       : chr NA
-  ..@ fontweight   : num NA
-  ..@ fontwidth    : num NA
-  ..@ colour       : NULL
-  ..@ size         : 'rel' num 0.8
-  ..@ hjust        : NULL
-  ..@ vjust        : NULL
-  ..@ angle        : NULL
-  ..@ lineheight   : NULL
-  ..@ margin       : NULL
-  ..@ debug        : NULL
-  ..@ inherit.blank: logi TRUE
- $ legend.text.position            : NULL
- $ legend.title                    : &lt;ggplot2::element_text&gt;
-  ..@ family       : NULL
-  ..@ face         : NULL
-  ..@ italic       : chr NA
-  ..@ fontweight   : num NA
-  ..@ fontwidth    : num NA
-  ..@ colour       : NULL
-  ..@ size         : NULL
-  ..@ hjust        : num 0
-  ..@ vjust        : NULL
-  ..@ angle        : NULL
-  ..@ lineheight   : NULL
-  ..@ margin       : NULL
-  ..@ debug        : NULL
-  ..@ inherit.blank: logi TRUE
- $ legend.title.position           : NULL
- $ legend.position                 : chr "right"
- $ legend.position.inside          : NULL
- $ legend.direction                : NULL
- $ legend.byrow                    : NULL
- $ legend.justification            : chr "center"
- $ legend.justification.top        : NULL
- $ legend.justification.bottom     : NULL
- $ legend.justification.left       : NULL
- $ legend.justification.right      : NULL
- $ legend.justification.inside     : NULL
-  [list output truncated]
- @ complete: logi TRUE
- @ validate: logi TRUE</a:t>
-            </a:r>
-          </a:p>
-        </p:txBody>
-      </p:sp>
     </p:spTree>
   </p:cSld>
 </p:sld>
@@ -15605,16 +15247,38 @@
             </a:r>
           </a:p>
           <a:p>
-            <a:pPr lvl="0" indent="0" marL="0">
-              <a:buNone/>
-            </a:pPr>
+            <a:pPr lvl="0"/>
             <a:r>
               <a:rPr b="1"/>
               <a:t>Key observations:</a:t>
             </a:r>
-            <a:r>
-              <a:rPr/>
-              <a:t> - Both tests still detect differences - Kruskal-Wallis more robust to violations - Parametric test may give misleading results when assumptions violated - Non-parametric test maintains validity</a:t>
+          </a:p>
+          <a:p>
+            <a:pPr lvl="1"/>
+            <a:r>
+              <a:rPr/>
+              <a:t>- Both tests still detect differences</a:t>
+            </a:r>
+          </a:p>
+          <a:p>
+            <a:pPr lvl="1"/>
+            <a:r>
+              <a:rPr/>
+              <a:t>- Kruskal-Wallis more robust to violations</a:t>
+            </a:r>
+          </a:p>
+          <a:p>
+            <a:pPr lvl="1"/>
+            <a:r>
+              <a:rPr/>
+              <a:t>- Parametric test may give misleading results when assumptions violated</a:t>
+            </a:r>
+          </a:p>
+          <a:p>
+            <a:pPr lvl="1"/>
+            <a:r>
+              <a:rPr/>
+              <a:t>- Non-parametric test maintains validity</a:t>
             </a:r>
           </a:p>
         </p:txBody>
@@ -15959,29 +15623,45 @@
             </a:r>
           </a:p>
           <a:p>
-            <a:pPr lvl="0" indent="0" marL="0">
-              <a:buNone/>
-            </a:pPr>
+            <a:pPr lvl="0"/>
             <a:r>
               <a:rPr b="1"/>
               <a:t>Interpretation of p-values:</a:t>
             </a:r>
-            <a:r>
-              <a:rPr/>
-              <a:t> - Control vs Eyes: p = 0.024 (significant) - Control vs Knees: p = 1.000 (not significant) - Eyes vs Knees: p = 0.078 (not significant)</a:t>
-            </a:r>
-          </a:p>
-          <a:p>
-            <a:pPr lvl="0" indent="0" marL="0">
-              <a:buNone/>
-            </a:pPr>
+          </a:p>
+          <a:p>
+            <a:pPr lvl="1"/>
+            <a:r>
+              <a:rPr/>
+              <a:t>- Control vs Eyes: p = 0.024 (significant)</a:t>
+            </a:r>
+          </a:p>
+          <a:p>
+            <a:pPr lvl="1"/>
+            <a:r>
+              <a:rPr/>
+              <a:t>- Control vs Knees: p = 1.000 (not significant)</a:t>
+            </a:r>
+          </a:p>
+          <a:p>
+            <a:pPr lvl="1"/>
+            <a:r>
+              <a:rPr/>
+              <a:t>- Eyes vs Knees: p = 0.078 (not significant)</a:t>
+            </a:r>
+          </a:p>
+          <a:p>
+            <a:pPr lvl="0"/>
             <a:r>
               <a:rPr b="1"/>
               <a:t>Common adjustment methods:</a:t>
             </a:r>
-            <a:r>
-              <a:rPr/>
-              <a:t> - </a:t>
+          </a:p>
+          <a:p>
+            <a:pPr lvl="1"/>
+            <a:r>
+              <a:rPr/>
+              <a:t>- </a:t>
             </a:r>
             <a:r>
               <a:rPr>
@@ -15991,7 +15671,14 @@
             </a:r>
             <a:r>
               <a:rPr/>
-              <a:t>: Most conservative - </a:t>
+              <a:t>: Most conservative</a:t>
+            </a:r>
+          </a:p>
+          <a:p>
+            <a:pPr lvl="1"/>
+            <a:r>
+              <a:rPr/>
+              <a:t>- </a:t>
             </a:r>
             <a:r>
               <a:rPr>
@@ -16001,7 +15688,14 @@
             </a:r>
             <a:r>
               <a:rPr/>
-              <a:t>: Less conservative than Bonferroni - </a:t>
+              <a:t>: Less conservative than Bonferroni</a:t>
+            </a:r>
+          </a:p>
+          <a:p>
+            <a:pPr lvl="1"/>
+            <a:r>
+              <a:rPr/>
+              <a:t>- </a:t>
             </a:r>
             <a:r>
               <a:rPr>
@@ -16011,7 +15705,14 @@
             </a:r>
             <a:r>
               <a:rPr/>
-              <a:t>: Benjamini-Hochberg (controls false discovery rate) - </a:t>
+              <a:t>: Benjamini-Hochberg (controls false discovery rate)</a:t>
+            </a:r>
+          </a:p>
+          <a:p>
+            <a:pPr lvl="1"/>
+            <a:r>
+              <a:rPr/>
+              <a:t>- </a:t>
             </a:r>
             <a:r>
               <a:rPr>
@@ -17238,22 +16939,42 @@
             </a:r>
           </a:p>
           <a:p>
-            <a:pPr lvl="0" indent="0" marL="0">
-              <a:buNone/>
-            </a:pPr>
+            <a:pPr lvl="0"/>
             <a:r>
               <a:rPr b="1"/>
               <a:t>Advantages of Dunn’s test:</a:t>
             </a:r>
-            <a:r>
-              <a:rPr/>
-              <a:t> - Designed specifically for Kruskal-Wallis - Provides Z-statistics in addition to p-values - Multiple adjustment methods available - More appropriate than multiple Wilcoxon tests</a:t>
-            </a:r>
-          </a:p>
-          <a:p>
-            <a:pPr lvl="0" indent="0" marL="0">
-              <a:buNone/>
-            </a:pPr>
+          </a:p>
+          <a:p>
+            <a:pPr lvl="1"/>
+            <a:r>
+              <a:rPr/>
+              <a:t>Designed specifically for Kruskal-Wallis</a:t>
+            </a:r>
+          </a:p>
+          <a:p>
+            <a:pPr lvl="1"/>
+            <a:r>
+              <a:rPr/>
+              <a:t>Provides Z-statistics in addition to p-values</a:t>
+            </a:r>
+          </a:p>
+          <a:p>
+            <a:pPr lvl="1"/>
+            <a:r>
+              <a:rPr/>
+              <a:t>Multiple adjustment methods available</a:t>
+            </a:r>
+          </a:p>
+          <a:p>
+            <a:pPr lvl="1"/>
+            <a:r>
+              <a:rPr/>
+              <a:t>More appropriate than multiple Wilcoxon tests</a:t>
+            </a:r>
+          </a:p>
+          <a:p>
+            <a:pPr lvl="0"/>
             <a:r>
               <a:rPr/>
               <a:t>Z-statistic is a standardized test statistic that tells you how many standard deviations an observation or difference is from the expected value (usually zero, meaning “no difference”).</a:t>
@@ -17458,16 +17179,31 @@
             </a:r>
           </a:p>
           <a:p>
-            <a:pPr lvl="0" indent="0" marL="0">
-              <a:buNone/>
-            </a:pPr>
+            <a:pPr lvl="0"/>
             <a:r>
               <a:rPr b="1"/>
               <a:t>Interpreting Z-statistics:</a:t>
             </a:r>
-            <a:r>
-              <a:rPr/>
-              <a:t> - Large |Z| values indicate bigger differences - Z &gt; 1.96 approximately equivalent to p &lt; 0.05 - Sign indicates direction of difference</a:t>
+          </a:p>
+          <a:p>
+            <a:pPr lvl="1"/>
+            <a:r>
+              <a:rPr/>
+              <a:t>- Large |Z| values indicate bigger differences</a:t>
+            </a:r>
+          </a:p>
+          <a:p>
+            <a:pPr lvl="1"/>
+            <a:r>
+              <a:rPr/>
+              <a:t>- Z &gt; 1.96 approximately equivalent to p &lt; 0.05</a:t>
+            </a:r>
+          </a:p>
+          <a:p>
+            <a:pPr lvl="1"/>
+            <a:r>
+              <a:rPr/>
+              <a:t>- Sign indicates direction of difference</a:t>
             </a:r>
           </a:p>
         </p:txBody>

--- a/docs/ecostats_lectures/lecture_11/11_01_lecture_powerpoint.pptx
+++ b/docs/ecostats_lectures/lecture_11/11_01_lecture_powerpoint.pptx
@@ -46,6 +46,7 @@
     <p:sldId id="294" r:id="rId40"/>
     <p:sldId id="295" r:id="rId41"/>
     <p:sldId id="296" r:id="rId42"/>
+    <p:sldId id="297" r:id="rId43"/>
   </p:sldIdLst>
   <p:sldSz cx="9144000" cy="5143500" type="screen16x9"/>
   <p:notesSz cx="6858000" cy="9144000"/>
@@ -12152,51 +12153,49 @@
                 </a:r>
               </a:p>
               <a:p>
-                <a:pPr lvl="0" indent="0" marL="0">
-                  <a:buNone/>
-                </a:pPr>
+                <a:pPr lvl="0"/>
                 <a:r>
                   <a:rPr b="1"/>
                   <a:t>Most common non-parametric alternative to one-way ANOVA</a:t>
                 </a:r>
               </a:p>
               <a:p>
-                <a:pPr lvl="0"/>
+                <a:pPr lvl="1"/>
                 <a:r>
                   <a:rPr b="1"/>
                   <a:t>What it does:</a:t>
                 </a:r>
               </a:p>
               <a:p>
-                <a:pPr lvl="1"/>
+                <a:pPr lvl="2"/>
                 <a:r>
                   <a:rPr/>
                   <a:t>Ranks all observations from smallest to largest</a:t>
                 </a:r>
               </a:p>
               <a:p>
-                <a:pPr lvl="1"/>
+                <a:pPr lvl="2"/>
                 <a:r>
                   <a:rPr/>
                   <a:t>Compares the sum of ranks between groups</a:t>
                 </a:r>
               </a:p>
               <a:p>
-                <a:pPr lvl="1"/>
+                <a:pPr lvl="2"/>
                 <a:r>
                   <a:rPr/>
                   <a:t>Tests if groups come from the same distribution</a:t>
                 </a:r>
               </a:p>
               <a:p>
-                <a:pPr lvl="0"/>
+                <a:pPr lvl="1"/>
                 <a:r>
                   <a:rPr b="1"/>
                   <a:t>Hypotheses:</a:t>
                 </a:r>
               </a:p>
               <a:p>
-                <a:pPr lvl="1"/>
+                <a:pPr lvl="2"/>
                 <a:r>
                   <a:rPr b="1"/>
                   <a:t>H₀</a:t>
@@ -12207,7 +12206,7 @@
                 </a:r>
               </a:p>
               <a:p>
-                <a:pPr lvl="1"/>
+                <a:pPr lvl="2"/>
                 <a:r>
                   <a:rPr b="1"/>
                   <a:t>H₁</a:t>
@@ -12218,219 +12217,215 @@
                 </a:r>
               </a:p>
               <a:p>
-                <a:pPr lvl="0"/>
+                <a:pPr lvl="1"/>
                 <a:r>
                   <a:rPr b="1"/>
                   <a:t>Test statistic (H):</a:t>
                 </a:r>
-              </a:p>
-              <a:p>
-                <a:pPr lvl="0"/>
+                <a:r>
+                  <a:rPr/>
+                  <a:t> </a:t>
+                </a:r>
                 <a14:m>
-                  <m:oMathPara xmlns:m="http://schemas.openxmlformats.org/officeDocument/2006/math">
-                    <m:oMathParaPr>
-                      <m:jc m:val="center"/>
-                    </m:oMathParaPr>
-                    <m:oMath>
-                      <m:r>
-                        <m:t>H</m:t>
-                      </m:r>
-                      <m:r>
-                        <m:rPr>
-                          <m:sty m:val="p"/>
-                        </m:rPr>
-                        <m:t>=</m:t>
-                      </m:r>
-                      <m:f>
-                        <m:fPr>
-                          <m:type m:val="bar"/>
-                        </m:fPr>
-                        <m:num>
-                          <m:r>
-                            <m:t>12</m:t>
-                          </m:r>
-                        </m:num>
-                        <m:den>
-                          <m:r>
-                            <m:t>N</m:t>
-                          </m:r>
-                          <m:d>
-                            <m:dPr>
-                              <m:begChr m:val="("/>
-                              <m:sepChr m:val=""/>
-                              <m:endChr m:val=")"/>
-                              <m:grow/>
-                            </m:dPr>
-                            <m:e>
-                              <m:r>
-                                <m:t>N</m:t>
-                              </m:r>
-                              <m:r>
-                                <m:rPr>
-                                  <m:sty m:val="p"/>
-                                </m:rPr>
-                                <m:t>+</m:t>
-                              </m:r>
-                              <m:r>
-                                <m:t>1</m:t>
-                              </m:r>
-                            </m:e>
-                          </m:d>
-                        </m:den>
-                      </m:f>
-                      <m:nary>
-                        <m:naryPr>
-                          <m:chr m:val="∑"/>
-                          <m:limLoc m:val="undOvr"/>
-                          <m:subHide m:val="off"/>
-                          <m:supHide m:val="off"/>
-                        </m:naryPr>
-                        <m:sub>
-                          <m:r>
-                            <m:t>i</m:t>
-                          </m:r>
-                          <m:r>
-                            <m:rPr>
-                              <m:sty m:val="p"/>
-                            </m:rPr>
-                            <m:t>=</m:t>
-                          </m:r>
-                          <m:r>
-                            <m:t>1</m:t>
-                          </m:r>
-                        </m:sub>
-                        <m:sup>
-                          <m:r>
-                            <m:t>k</m:t>
-                          </m:r>
-                        </m:sup>
-                        <m:e>
-                          <m:sSub>
-                            <m:e>
-                              <m:r>
-                                <m:t>n</m:t>
-                              </m:r>
-                            </m:e>
-                            <m:sub>
-                              <m:r>
-                                <m:t>i</m:t>
-                              </m:r>
-                            </m:sub>
-                          </m:sSub>
-                        </m:e>
-                      </m:nary>
-                      <m:sSup>
-                        <m:e>
-                          <m:d>
-                            <m:dPr>
-                              <m:begChr m:val="("/>
-                              <m:sepChr m:val=""/>
-                              <m:endChr m:val=")"/>
-                              <m:grow/>
-                            </m:dPr>
-                            <m:e>
-                              <m:sSub>
-                                <m:e>
-                                  <m:acc>
-                                    <m:accPr>
-                                      <m:chr m:val="‾"/>
-                                    </m:accPr>
-                                    <m:e>
-                                      <m:r>
-                                        <m:t>R</m:t>
-                                      </m:r>
-                                    </m:e>
-                                  </m:acc>
-                                </m:e>
-                                <m:sub>
-                                  <m:r>
-                                    <m:t>i</m:t>
-                                  </m:r>
-                                </m:sub>
-                              </m:sSub>
-                              <m:r>
-                                <m:rPr>
-                                  <m:sty m:val="p"/>
-                                </m:rPr>
-                                <m:t>−</m:t>
-                              </m:r>
-                              <m:acc>
-                                <m:accPr>
-                                  <m:chr m:val="‾"/>
-                                </m:accPr>
-                                <m:e>
-                                  <m:r>
-                                    <m:t>R</m:t>
-                                  </m:r>
-                                </m:e>
-                              </m:acc>
-                            </m:e>
-                          </m:d>
-                        </m:e>
-                        <m:sup>
-                          <m:r>
-                            <m:t>2</m:t>
-                          </m:r>
-                        </m:sup>
-                      </m:sSup>
-                      <m:r>
-                        <m:rPr>
-                          <m:sty m:val="p"/>
-                        </m:rPr>
-                        <m:t>−</m:t>
-                      </m:r>
-                      <m:r>
-                        <m:t>3</m:t>
-                      </m:r>
-                      <m:d>
-                        <m:dPr>
-                          <m:begChr m:val="("/>
-                          <m:sepChr m:val=""/>
-                          <m:endChr m:val=")"/>
-                          <m:grow/>
-                        </m:dPr>
-                        <m:e>
-                          <m:r>
-                            <m:t>N</m:t>
-                          </m:r>
-                          <m:r>
-                            <m:rPr>
-                              <m:sty m:val="p"/>
-                            </m:rPr>
-                            <m:t>+</m:t>
-                          </m:r>
-                          <m:r>
-                            <m:t>1</m:t>
-                          </m:r>
-                        </m:e>
-                      </m:d>
-                    </m:oMath>
-                  </m:oMathPara>
+                  <m:oMath xmlns:m="http://schemas.openxmlformats.org/officeDocument/2006/math">
+                    <m:r>
+                      <m:t>H</m:t>
+                    </m:r>
+                    <m:r>
+                      <m:rPr>
+                        <m:sty m:val="p"/>
+                      </m:rPr>
+                      <m:t>=</m:t>
+                    </m:r>
+                    <m:f>
+                      <m:fPr>
+                        <m:type m:val="bar"/>
+                      </m:fPr>
+                      <m:num>
+                        <m:r>
+                          <m:t>12</m:t>
+                        </m:r>
+                      </m:num>
+                      <m:den>
+                        <m:r>
+                          <m:t>N</m:t>
+                        </m:r>
+                        <m:d>
+                          <m:dPr>
+                            <m:begChr m:val="("/>
+                            <m:sepChr m:val=""/>
+                            <m:endChr m:val=")"/>
+                            <m:grow/>
+                          </m:dPr>
+                          <m:e>
+                            <m:r>
+                              <m:t>N</m:t>
+                            </m:r>
+                            <m:r>
+                              <m:rPr>
+                                <m:sty m:val="p"/>
+                              </m:rPr>
+                              <m:t>+</m:t>
+                            </m:r>
+                            <m:r>
+                              <m:t>1</m:t>
+                            </m:r>
+                          </m:e>
+                        </m:d>
+                      </m:den>
+                    </m:f>
+                    <m:nary>
+                      <m:naryPr>
+                        <m:chr m:val="∑"/>
+                        <m:limLoc m:val="undOvr"/>
+                        <m:subHide m:val="off"/>
+                        <m:supHide m:val="off"/>
+                      </m:naryPr>
+                      <m:sub>
+                        <m:r>
+                          <m:t>i</m:t>
+                        </m:r>
+                        <m:r>
+                          <m:rPr>
+                            <m:sty m:val="p"/>
+                          </m:rPr>
+                          <m:t>=</m:t>
+                        </m:r>
+                        <m:r>
+                          <m:t>1</m:t>
+                        </m:r>
+                      </m:sub>
+                      <m:sup>
+                        <m:r>
+                          <m:t>k</m:t>
+                        </m:r>
+                      </m:sup>
+                      <m:e>
+                        <m:sSub>
+                          <m:e>
+                            <m:r>
+                              <m:t>n</m:t>
+                            </m:r>
+                          </m:e>
+                          <m:sub>
+                            <m:r>
+                              <m:t>i</m:t>
+                            </m:r>
+                          </m:sub>
+                        </m:sSub>
+                      </m:e>
+                    </m:nary>
+                    <m:sSup>
+                      <m:e>
+                        <m:d>
+                          <m:dPr>
+                            <m:begChr m:val="("/>
+                            <m:sepChr m:val=""/>
+                            <m:endChr m:val=")"/>
+                            <m:grow/>
+                          </m:dPr>
+                          <m:e>
+                            <m:sSub>
+                              <m:e>
+                                <m:acc>
+                                  <m:accPr>
+                                    <m:chr m:val="‾"/>
+                                  </m:accPr>
+                                  <m:e>
+                                    <m:r>
+                                      <m:t>R</m:t>
+                                    </m:r>
+                                  </m:e>
+                                </m:acc>
+                              </m:e>
+                              <m:sub>
+                                <m:r>
+                                  <m:t>i</m:t>
+                                </m:r>
+                              </m:sub>
+                            </m:sSub>
+                            <m:r>
+                              <m:rPr>
+                                <m:sty m:val="p"/>
+                              </m:rPr>
+                              <m:t>−</m:t>
+                            </m:r>
+                            <m:acc>
+                              <m:accPr>
+                                <m:chr m:val="‾"/>
+                              </m:accPr>
+                              <m:e>
+                                <m:r>
+                                  <m:t>R</m:t>
+                                </m:r>
+                              </m:e>
+                            </m:acc>
+                          </m:e>
+                        </m:d>
+                      </m:e>
+                      <m:sup>
+                        <m:r>
+                          <m:t>2</m:t>
+                        </m:r>
+                      </m:sup>
+                    </m:sSup>
+                    <m:r>
+                      <m:rPr>
+                        <m:sty m:val="p"/>
+                      </m:rPr>
+                      <m:t>−</m:t>
+                    </m:r>
+                    <m:r>
+                      <m:t>3</m:t>
+                    </m:r>
+                    <m:d>
+                      <m:dPr>
+                        <m:begChr m:val="("/>
+                        <m:sepChr m:val=""/>
+                        <m:endChr m:val=")"/>
+                        <m:grow/>
+                      </m:dPr>
+                      <m:e>
+                        <m:r>
+                          <m:t>N</m:t>
+                        </m:r>
+                        <m:r>
+                          <m:rPr>
+                            <m:sty m:val="p"/>
+                          </m:rPr>
+                          <m:t>+</m:t>
+                        </m:r>
+                        <m:r>
+                          <m:t>1</m:t>
+                        </m:r>
+                      </m:e>
+                    </m:d>
+                  </m:oMath>
                 </a14:m>
               </a:p>
               <a:p>
-                <a:pPr lvl="0"/>
+                <a:pPr lvl="1"/>
                 <a:r>
                   <a:rPr/>
                   <a:t>Where:</a:t>
                 </a:r>
               </a:p>
               <a:p>
-                <a:pPr lvl="1"/>
+                <a:pPr lvl="2"/>
                 <a:r>
                   <a:rPr/>
                   <a:t>N = total sample size</a:t>
                 </a:r>
               </a:p>
               <a:p>
-                <a:pPr lvl="1"/>
+                <a:pPr lvl="2"/>
                 <a:r>
                   <a:rPr/>
                   <a:t>k = number of groups</a:t>
                 </a:r>
               </a:p>
               <a:p>
-                <a:pPr lvl="1"/>
+                <a:pPr lvl="2"/>
                 <a14:m>
                   <m:oMath xmlns:m="http://schemas.openxmlformats.org/officeDocument/2006/math">
                     <m:sSub>
@@ -12460,7 +12455,7 @@
                 </a:r>
               </a:p>
               <a:p>
-                <a:pPr lvl="1"/>
+                <a:pPr lvl="2"/>
                 <a14:m>
                   <m:oMath xmlns:m="http://schemas.openxmlformats.org/officeDocument/2006/math">
                     <m:acc>
@@ -12481,21 +12476,21 @@
                 </a:r>
               </a:p>
               <a:p>
-                <a:pPr lvl="1"/>
+                <a:pPr lvl="2"/>
                 <a:r>
                   <a:rPr/>
                   <a:t>nᵢ = sample size for group i</a:t>
                 </a:r>
               </a:p>
               <a:p>
-                <a:pPr lvl="1"/>
+                <a:pPr lvl="2"/>
                 <a:r>
                   <a:rPr/>
                   <a:t>constant 12 comes from the variance of ranks in a uniform distribution</a:t>
                 </a:r>
               </a:p>
               <a:p>
-                <a:pPr lvl="0"/>
+                <a:pPr lvl="1"/>
                 <a:r>
                   <a:rPr b="1"/>
                   <a:t>Distribution:</a:t>
@@ -12669,9 +12664,12 @@
         </p:nvSpPr>
         <p:spPr>
           <a:xfrm>
-            <a:off x="139485" y="78119"/>
-            <a:ext cx="8229600" cy="607682"/>
+            <a:off x="0" y="0"/>
+            <a:ext cx="9144000" cy="602780"/>
           </a:xfrm>
+          <a:solidFill>
+            <a:srgbClr val="70121D"/>
+          </a:solidFill>
         </p:spPr>
         <p:txBody>
           <a:bodyPr/>
@@ -12689,12 +12687,12 @@
       </p:sp>
       <p:sp>
         <p:nvSpPr>
-          <p:cNvPr id="3" name="Text Placeholder 2"/>
+          <p:cNvPr id="3" name="Content Placeholder 2"/>
           <p:cNvSpPr>
             <a:spLocks noGrp="1"/>
           </p:cNvSpPr>
           <p:nvPr>
-            <p:ph idx="1" type="body"/>
+            <p:ph idx="1" sz="half"/>
           </p:nvPr>
         </p:nvSpPr>
         <p:spPr/>
@@ -13410,775 +13408,6 @@
             <a:r>
               <a:rPr/>
               <a:t>- Created unequal variances and non-normality</a:t>
-            </a:r>
-          </a:p>
-        </p:txBody>
-      </p:sp>
-      <p:sp>
-        <p:nvSpPr>
-          <p:cNvPr id="5" name="Text Placeholder 4"/>
-          <p:cNvSpPr>
-            <a:spLocks noGrp="1"/>
-          </p:cNvSpPr>
-          <p:nvPr>
-            <p:ph idx="3" sz="quarter" type="body"/>
-          </p:nvPr>
-        </p:nvSpPr>
-        <p:spPr/>
-        <p:txBody>
-          <a:bodyPr/>
-          <a:lstStyle/>
-          <a:p>
-            <a:pPr lvl="0" indent="0">
-              <a:buNone/>
-            </a:pPr>
-            <a:r>
-              <a:rPr>
-                <a:solidFill>
-                  <a:srgbClr val="4758AB"/>
-                </a:solidFill>
-                <a:latin typeface="Courier"/>
-              </a:rPr>
-              <a:t>ggplot</a:t>
-            </a:r>
-            <a:r>
-              <a:rPr>
-                <a:solidFill>
-                  <a:srgbClr val="003B4F"/>
-                </a:solidFill>
-                <a:latin typeface="Courier"/>
-              </a:rPr>
-              <a:t>(violated_circ_df, </a:t>
-            </a:r>
-            <a:br/>
-            <a:r>
-              <a:rPr>
-                <a:solidFill>
-                  <a:srgbClr val="003B4F"/>
-                </a:solidFill>
-                <a:latin typeface="Courier"/>
-              </a:rPr>
-              <a:t>       </a:t>
-            </a:r>
-            <a:r>
-              <a:rPr>
-                <a:solidFill>
-                  <a:srgbClr val="4758AB"/>
-                </a:solidFill>
-                <a:latin typeface="Courier"/>
-              </a:rPr>
-              <a:t>aes</a:t>
-            </a:r>
-            <a:r>
-              <a:rPr>
-                <a:solidFill>
-                  <a:srgbClr val="003B4F"/>
-                </a:solidFill>
-                <a:latin typeface="Courier"/>
-              </a:rPr>
-              <a:t>(</a:t>
-            </a:r>
-            <a:r>
-              <a:rPr>
-                <a:solidFill>
-                  <a:srgbClr val="657422"/>
-                </a:solidFill>
-                <a:latin typeface="Courier"/>
-              </a:rPr>
-              <a:t>x =</a:t>
-            </a:r>
-            <a:r>
-              <a:rPr>
-                <a:solidFill>
-                  <a:srgbClr val="003B4F"/>
-                </a:solidFill>
-                <a:latin typeface="Courier"/>
-              </a:rPr>
-              <a:t> treatment, </a:t>
-            </a:r>
-            <a:r>
-              <a:rPr>
-                <a:solidFill>
-                  <a:srgbClr val="657422"/>
-                </a:solidFill>
-                <a:latin typeface="Courier"/>
-              </a:rPr>
-              <a:t>y =</a:t>
-            </a:r>
-            <a:r>
-              <a:rPr>
-                <a:solidFill>
-                  <a:srgbClr val="003B4F"/>
-                </a:solidFill>
-                <a:latin typeface="Courier"/>
-              </a:rPr>
-              <a:t> phase_shift_violated, </a:t>
-            </a:r>
-            <a:br/>
-            <a:r>
-              <a:rPr>
-                <a:solidFill>
-                  <a:srgbClr val="003B4F"/>
-                </a:solidFill>
-                <a:latin typeface="Courier"/>
-              </a:rPr>
-              <a:t>           </a:t>
-            </a:r>
-            <a:r>
-              <a:rPr>
-                <a:solidFill>
-                  <a:srgbClr val="657422"/>
-                </a:solidFill>
-                <a:latin typeface="Courier"/>
-              </a:rPr>
-              <a:t>color =</a:t>
-            </a:r>
-            <a:r>
-              <a:rPr>
-                <a:solidFill>
-                  <a:srgbClr val="003B4F"/>
-                </a:solidFill>
-                <a:latin typeface="Courier"/>
-              </a:rPr>
-              <a:t> treatment)) </a:t>
-            </a:r>
-            <a:r>
-              <a:rPr>
-                <a:solidFill>
-                  <a:srgbClr val="5E5E5E"/>
-                </a:solidFill>
-                <a:latin typeface="Courier"/>
-              </a:rPr>
-              <a:t>+</a:t>
-            </a:r>
-            <a:br/>
-            <a:r>
-              <a:rPr>
-                <a:solidFill>
-                  <a:srgbClr val="003B4F"/>
-                </a:solidFill>
-                <a:latin typeface="Courier"/>
-              </a:rPr>
-              <a:t>  </a:t>
-            </a:r>
-            <a:r>
-              <a:rPr>
-                <a:solidFill>
-                  <a:srgbClr val="4758AB"/>
-                </a:solidFill>
-                <a:latin typeface="Courier"/>
-              </a:rPr>
-              <a:t>geom_jitter</a:t>
-            </a:r>
-            <a:r>
-              <a:rPr>
-                <a:solidFill>
-                  <a:srgbClr val="003B4F"/>
-                </a:solidFill>
-                <a:latin typeface="Courier"/>
-              </a:rPr>
-              <a:t>(</a:t>
-            </a:r>
-            <a:r>
-              <a:rPr>
-                <a:solidFill>
-                  <a:srgbClr val="657422"/>
-                </a:solidFill>
-                <a:latin typeface="Courier"/>
-              </a:rPr>
-              <a:t>width =</a:t>
-            </a:r>
-            <a:r>
-              <a:rPr>
-                <a:solidFill>
-                  <a:srgbClr val="003B4F"/>
-                </a:solidFill>
-                <a:latin typeface="Courier"/>
-              </a:rPr>
-              <a:t> </a:t>
-            </a:r>
-            <a:r>
-              <a:rPr>
-                <a:solidFill>
-                  <a:srgbClr val="AD0000"/>
-                </a:solidFill>
-                <a:latin typeface="Courier"/>
-              </a:rPr>
-              <a:t>0.2</a:t>
-            </a:r>
-            <a:r>
-              <a:rPr>
-                <a:solidFill>
-                  <a:srgbClr val="003B4F"/>
-                </a:solidFill>
-                <a:latin typeface="Courier"/>
-              </a:rPr>
-              <a:t>, </a:t>
-            </a:r>
-            <a:r>
-              <a:rPr>
-                <a:solidFill>
-                  <a:srgbClr val="657422"/>
-                </a:solidFill>
-                <a:latin typeface="Courier"/>
-              </a:rPr>
-              <a:t>alpha =</a:t>
-            </a:r>
-            <a:r>
-              <a:rPr>
-                <a:solidFill>
-                  <a:srgbClr val="003B4F"/>
-                </a:solidFill>
-                <a:latin typeface="Courier"/>
-              </a:rPr>
-              <a:t> </a:t>
-            </a:r>
-            <a:r>
-              <a:rPr>
-                <a:solidFill>
-                  <a:srgbClr val="AD0000"/>
-                </a:solidFill>
-                <a:latin typeface="Courier"/>
-              </a:rPr>
-              <a:t>0.7</a:t>
-            </a:r>
-            <a:r>
-              <a:rPr>
-                <a:solidFill>
-                  <a:srgbClr val="003B4F"/>
-                </a:solidFill>
-                <a:latin typeface="Courier"/>
-              </a:rPr>
-              <a:t>, </a:t>
-            </a:r>
-            <a:r>
-              <a:rPr>
-                <a:solidFill>
-                  <a:srgbClr val="657422"/>
-                </a:solidFill>
-                <a:latin typeface="Courier"/>
-              </a:rPr>
-              <a:t>size =</a:t>
-            </a:r>
-            <a:r>
-              <a:rPr>
-                <a:solidFill>
-                  <a:srgbClr val="003B4F"/>
-                </a:solidFill>
-                <a:latin typeface="Courier"/>
-              </a:rPr>
-              <a:t> </a:t>
-            </a:r>
-            <a:r>
-              <a:rPr>
-                <a:solidFill>
-                  <a:srgbClr val="AD0000"/>
-                </a:solidFill>
-                <a:latin typeface="Courier"/>
-              </a:rPr>
-              <a:t>3</a:t>
-            </a:r>
-            <a:r>
-              <a:rPr>
-                <a:solidFill>
-                  <a:srgbClr val="003B4F"/>
-                </a:solidFill>
-                <a:latin typeface="Courier"/>
-              </a:rPr>
-              <a:t>) </a:t>
-            </a:r>
-            <a:r>
-              <a:rPr>
-                <a:solidFill>
-                  <a:srgbClr val="5E5E5E"/>
-                </a:solidFill>
-                <a:latin typeface="Courier"/>
-              </a:rPr>
-              <a:t>+</a:t>
-            </a:r>
-            <a:br/>
-            <a:r>
-              <a:rPr>
-                <a:solidFill>
-                  <a:srgbClr val="003B4F"/>
-                </a:solidFill>
-                <a:latin typeface="Courier"/>
-              </a:rPr>
-              <a:t>  </a:t>
-            </a:r>
-            <a:r>
-              <a:rPr>
-                <a:solidFill>
-                  <a:srgbClr val="4758AB"/>
-                </a:solidFill>
-                <a:latin typeface="Courier"/>
-              </a:rPr>
-              <a:t>geom_boxplot</a:t>
-            </a:r>
-            <a:r>
-              <a:rPr>
-                <a:solidFill>
-                  <a:srgbClr val="003B4F"/>
-                </a:solidFill>
-                <a:latin typeface="Courier"/>
-              </a:rPr>
-              <a:t>(</a:t>
-            </a:r>
-            <a:r>
-              <a:rPr>
-                <a:solidFill>
-                  <a:srgbClr val="657422"/>
-                </a:solidFill>
-                <a:latin typeface="Courier"/>
-              </a:rPr>
-              <a:t>alpha =</a:t>
-            </a:r>
-            <a:r>
-              <a:rPr>
-                <a:solidFill>
-                  <a:srgbClr val="003B4F"/>
-                </a:solidFill>
-                <a:latin typeface="Courier"/>
-              </a:rPr>
-              <a:t> </a:t>
-            </a:r>
-            <a:r>
-              <a:rPr>
-                <a:solidFill>
-                  <a:srgbClr val="AD0000"/>
-                </a:solidFill>
-                <a:latin typeface="Courier"/>
-              </a:rPr>
-              <a:t>0.3</a:t>
-            </a:r>
-            <a:r>
-              <a:rPr>
-                <a:solidFill>
-                  <a:srgbClr val="003B4F"/>
-                </a:solidFill>
-                <a:latin typeface="Courier"/>
-              </a:rPr>
-              <a:t>, </a:t>
-            </a:r>
-            <a:r>
-              <a:rPr>
-                <a:solidFill>
-                  <a:srgbClr val="657422"/>
-                </a:solidFill>
-                <a:latin typeface="Courier"/>
-              </a:rPr>
-              <a:t>outlier.shape =</a:t>
-            </a:r>
-            <a:r>
-              <a:rPr>
-                <a:solidFill>
-                  <a:srgbClr val="003B4F"/>
-                </a:solidFill>
-                <a:latin typeface="Courier"/>
-              </a:rPr>
-              <a:t> </a:t>
-            </a:r>
-            <a:r>
-              <a:rPr>
-                <a:solidFill>
-                  <a:srgbClr val="8F5902"/>
-                </a:solidFill>
-                <a:latin typeface="Courier"/>
-              </a:rPr>
-              <a:t>NA</a:t>
-            </a:r>
-            <a:r>
-              <a:rPr>
-                <a:solidFill>
-                  <a:srgbClr val="003B4F"/>
-                </a:solidFill>
-                <a:latin typeface="Courier"/>
-              </a:rPr>
-              <a:t>) </a:t>
-            </a:r>
-            <a:r>
-              <a:rPr>
-                <a:solidFill>
-                  <a:srgbClr val="5E5E5E"/>
-                </a:solidFill>
-                <a:latin typeface="Courier"/>
-              </a:rPr>
-              <a:t>+</a:t>
-            </a:r>
-            <a:br/>
-            <a:r>
-              <a:rPr>
-                <a:solidFill>
-                  <a:srgbClr val="4758AB"/>
-                </a:solidFill>
-                <a:latin typeface="Courier"/>
-              </a:rPr>
-              <a:t>geom_jitter</a:t>
-            </a:r>
-            <a:r>
-              <a:rPr>
-                <a:solidFill>
-                  <a:srgbClr val="003B4F"/>
-                </a:solidFill>
-                <a:latin typeface="Courier"/>
-              </a:rPr>
-              <a:t>(</a:t>
-            </a:r>
-            <a:r>
-              <a:rPr>
-                <a:solidFill>
-                  <a:srgbClr val="657422"/>
-                </a:solidFill>
-                <a:latin typeface="Courier"/>
-              </a:rPr>
-              <a:t>width =</a:t>
-            </a:r>
-            <a:r>
-              <a:rPr>
-                <a:solidFill>
-                  <a:srgbClr val="003B4F"/>
-                </a:solidFill>
-                <a:latin typeface="Courier"/>
-              </a:rPr>
-              <a:t> </a:t>
-            </a:r>
-            <a:r>
-              <a:rPr>
-                <a:solidFill>
-                  <a:srgbClr val="AD0000"/>
-                </a:solidFill>
-                <a:latin typeface="Courier"/>
-              </a:rPr>
-              <a:t>0.2</a:t>
-            </a:r>
-            <a:r>
-              <a:rPr>
-                <a:solidFill>
-                  <a:srgbClr val="003B4F"/>
-                </a:solidFill>
-                <a:latin typeface="Courier"/>
-              </a:rPr>
-              <a:t>, </a:t>
-            </a:r>
-            <a:r>
-              <a:rPr>
-                <a:solidFill>
-                  <a:srgbClr val="657422"/>
-                </a:solidFill>
-                <a:latin typeface="Courier"/>
-              </a:rPr>
-              <a:t>alpha =</a:t>
-            </a:r>
-            <a:r>
-              <a:rPr>
-                <a:solidFill>
-                  <a:srgbClr val="003B4F"/>
-                </a:solidFill>
-                <a:latin typeface="Courier"/>
-              </a:rPr>
-              <a:t> </a:t>
-            </a:r>
-            <a:r>
-              <a:rPr>
-                <a:solidFill>
-                  <a:srgbClr val="AD0000"/>
-                </a:solidFill>
-                <a:latin typeface="Courier"/>
-              </a:rPr>
-              <a:t>0.7</a:t>
-            </a:r>
-            <a:r>
-              <a:rPr>
-                <a:solidFill>
-                  <a:srgbClr val="003B4F"/>
-                </a:solidFill>
-                <a:latin typeface="Courier"/>
-              </a:rPr>
-              <a:t>, </a:t>
-            </a:r>
-            <a:r>
-              <a:rPr>
-                <a:solidFill>
-                  <a:srgbClr val="657422"/>
-                </a:solidFill>
-                <a:latin typeface="Courier"/>
-              </a:rPr>
-              <a:t>size =</a:t>
-            </a:r>
-            <a:r>
-              <a:rPr>
-                <a:solidFill>
-                  <a:srgbClr val="003B4F"/>
-                </a:solidFill>
-                <a:latin typeface="Courier"/>
-              </a:rPr>
-              <a:t> </a:t>
-            </a:r>
-            <a:r>
-              <a:rPr>
-                <a:solidFill>
-                  <a:srgbClr val="AD0000"/>
-                </a:solidFill>
-                <a:latin typeface="Courier"/>
-              </a:rPr>
-              <a:t>3</a:t>
-            </a:r>
-            <a:r>
-              <a:rPr>
-                <a:solidFill>
-                  <a:srgbClr val="003B4F"/>
-                </a:solidFill>
-                <a:latin typeface="Courier"/>
-              </a:rPr>
-              <a:t>)</a:t>
-            </a:r>
-            <a:r>
-              <a:rPr>
-                <a:solidFill>
-                  <a:srgbClr val="5E5E5E"/>
-                </a:solidFill>
-                <a:latin typeface="Courier"/>
-              </a:rPr>
-              <a:t>+</a:t>
-            </a:r>
-            <a:br/>
-            <a:r>
-              <a:rPr>
-                <a:solidFill>
-                  <a:srgbClr val="003B4F"/>
-                </a:solidFill>
-                <a:latin typeface="Courier"/>
-              </a:rPr>
-              <a:t>  </a:t>
-            </a:r>
-            <a:r>
-              <a:rPr>
-                <a:solidFill>
-                  <a:srgbClr val="4758AB"/>
-                </a:solidFill>
-                <a:latin typeface="Courier"/>
-              </a:rPr>
-              <a:t>theme_minimal</a:t>
-            </a:r>
-            <a:r>
-              <a:rPr>
-                <a:solidFill>
-                  <a:srgbClr val="003B4F"/>
-                </a:solidFill>
-                <a:latin typeface="Courier"/>
-              </a:rPr>
-              <a:t>() </a:t>
-            </a:r>
-            <a:r>
-              <a:rPr>
-                <a:solidFill>
-                  <a:srgbClr val="5E5E5E"/>
-                </a:solidFill>
-                <a:latin typeface="Courier"/>
-              </a:rPr>
-              <a:t>+</a:t>
-            </a:r>
-            <a:br/>
-            <a:r>
-              <a:rPr>
-                <a:solidFill>
-                  <a:srgbClr val="003B4F"/>
-                </a:solidFill>
-                <a:latin typeface="Courier"/>
-              </a:rPr>
-              <a:t>  </a:t>
-            </a:r>
-            <a:r>
-              <a:rPr>
-                <a:solidFill>
-                  <a:srgbClr val="4758AB"/>
-                </a:solidFill>
-                <a:latin typeface="Courier"/>
-              </a:rPr>
-              <a:t>labs</a:t>
-            </a:r>
-            <a:r>
-              <a:rPr>
-                <a:solidFill>
-                  <a:srgbClr val="003B4F"/>
-                </a:solidFill>
-                <a:latin typeface="Courier"/>
-              </a:rPr>
-              <a:t>(</a:t>
-            </a:r>
-            <a:r>
-              <a:rPr>
-                <a:solidFill>
-                  <a:srgbClr val="657422"/>
-                </a:solidFill>
-                <a:latin typeface="Courier"/>
-              </a:rPr>
-              <a:t>title =</a:t>
-            </a:r>
-            <a:r>
-              <a:rPr>
-                <a:solidFill>
-                  <a:srgbClr val="003B4F"/>
-                </a:solidFill>
-                <a:latin typeface="Courier"/>
-              </a:rPr>
-              <a:t> </a:t>
-            </a:r>
-            <a:r>
-              <a:rPr>
-                <a:solidFill>
-                  <a:srgbClr val="20794D"/>
-                </a:solidFill>
-                <a:latin typeface="Courier"/>
-              </a:rPr>
-              <a:t>"Modified Data with Violations"</a:t>
-            </a:r>
-            <a:r>
-              <a:rPr>
-                <a:solidFill>
-                  <a:srgbClr val="003B4F"/>
-                </a:solidFill>
-                <a:latin typeface="Courier"/>
-              </a:rPr>
-              <a:t>,</a:t>
-            </a:r>
-            <a:br/>
-            <a:r>
-              <a:rPr>
-                <a:solidFill>
-                  <a:srgbClr val="003B4F"/>
-                </a:solidFill>
-                <a:latin typeface="Courier"/>
-              </a:rPr>
-              <a:t>       </a:t>
-            </a:r>
-            <a:r>
-              <a:rPr>
-                <a:solidFill>
-                  <a:srgbClr val="657422"/>
-                </a:solidFill>
-                <a:latin typeface="Courier"/>
-              </a:rPr>
-              <a:t>subtitle =</a:t>
-            </a:r>
-            <a:r>
-              <a:rPr>
-                <a:solidFill>
-                  <a:srgbClr val="003B4F"/>
-                </a:solidFill>
-                <a:latin typeface="Courier"/>
-              </a:rPr>
-              <a:t> </a:t>
-            </a:r>
-            <a:r>
-              <a:rPr>
-                <a:solidFill>
-                  <a:srgbClr val="20794D"/>
-                </a:solidFill>
-                <a:latin typeface="Courier"/>
-              </a:rPr>
-              <a:t>"Median with IQR"</a:t>
-            </a:r>
-            <a:r>
-              <a:rPr>
-                <a:solidFill>
-                  <a:srgbClr val="003B4F"/>
-                </a:solidFill>
-                <a:latin typeface="Courier"/>
-              </a:rPr>
-              <a:t>,</a:t>
-            </a:r>
-            <a:br/>
-            <a:r>
-              <a:rPr>
-                <a:solidFill>
-                  <a:srgbClr val="003B4F"/>
-                </a:solidFill>
-                <a:latin typeface="Courier"/>
-              </a:rPr>
-              <a:t>       </a:t>
-            </a:r>
-            <a:r>
-              <a:rPr>
-                <a:solidFill>
-                  <a:srgbClr val="657422"/>
-                </a:solidFill>
-                <a:latin typeface="Courier"/>
-              </a:rPr>
-              <a:t>x =</a:t>
-            </a:r>
-            <a:r>
-              <a:rPr>
-                <a:solidFill>
-                  <a:srgbClr val="003B4F"/>
-                </a:solidFill>
-                <a:latin typeface="Courier"/>
-              </a:rPr>
-              <a:t> </a:t>
-            </a:r>
-            <a:r>
-              <a:rPr>
-                <a:solidFill>
-                  <a:srgbClr val="20794D"/>
-                </a:solidFill>
-                <a:latin typeface="Courier"/>
-              </a:rPr>
-              <a:t>"Light Treatment"</a:t>
-            </a:r>
-            <a:r>
-              <a:rPr>
-                <a:solidFill>
-                  <a:srgbClr val="003B4F"/>
-                </a:solidFill>
-                <a:latin typeface="Courier"/>
-              </a:rPr>
-              <a:t>,</a:t>
-            </a:r>
-            <a:br/>
-            <a:r>
-              <a:rPr>
-                <a:solidFill>
-                  <a:srgbClr val="003B4F"/>
-                </a:solidFill>
-                <a:latin typeface="Courier"/>
-              </a:rPr>
-              <a:t>       </a:t>
-            </a:r>
-            <a:r>
-              <a:rPr>
-                <a:solidFill>
-                  <a:srgbClr val="657422"/>
-                </a:solidFill>
-                <a:latin typeface="Courier"/>
-              </a:rPr>
-              <a:t>y =</a:t>
-            </a:r>
-            <a:r>
-              <a:rPr>
-                <a:solidFill>
-                  <a:srgbClr val="003B4F"/>
-                </a:solidFill>
-                <a:latin typeface="Courier"/>
-              </a:rPr>
-              <a:t> </a:t>
-            </a:r>
-            <a:r>
-              <a:rPr>
-                <a:solidFill>
-                  <a:srgbClr val="20794D"/>
-                </a:solidFill>
-                <a:latin typeface="Courier"/>
-              </a:rPr>
-              <a:t>"Phase Shift (hours)"</a:t>
-            </a:r>
-            <a:r>
-              <a:rPr>
-                <a:solidFill>
-                  <a:srgbClr val="003B4F"/>
-                </a:solidFill>
-                <a:latin typeface="Courier"/>
-              </a:rPr>
-              <a:t>) </a:t>
             </a:r>
           </a:p>
         </p:txBody>
@@ -14199,8 +13428,8 @@
         </p:blipFill>
         <p:spPr bwMode="auto">
           <a:xfrm>
-            <a:off x="4749800" y="1689100"/>
-            <a:ext cx="4038600" cy="2489200"/>
+            <a:off x="6121400" y="2044700"/>
+            <a:ext cx="2781300" cy="1714500"/>
           </a:xfrm>
           <a:prstGeom prst="rect">
             <a:avLst/>
@@ -14310,57 +13539,6 @@
             </a:pPr>
             <a:r>
               <a:rPr>
-                <a:solidFill>
-                  <a:srgbClr val="5E5E5E"/>
-                </a:solidFill>
-                <a:latin typeface="Courier"/>
-              </a:rPr>
-              <a:t># Shapiro-Wilk test on residuals</a:t>
-            </a:r>
-            <a:br/>
-            <a:r>
-              <a:rPr>
-                <a:solidFill>
-                  <a:srgbClr val="4758AB"/>
-                </a:solidFill>
-                <a:latin typeface="Courier"/>
-              </a:rPr>
-              <a:t>shapiro.test</a:t>
-            </a:r>
-            <a:r>
-              <a:rPr>
-                <a:solidFill>
-                  <a:srgbClr val="003B4F"/>
-                </a:solidFill>
-                <a:latin typeface="Courier"/>
-              </a:rPr>
-              <a:t>(</a:t>
-            </a:r>
-            <a:r>
-              <a:rPr>
-                <a:solidFill>
-                  <a:srgbClr val="4758AB"/>
-                </a:solidFill>
-                <a:latin typeface="Courier"/>
-              </a:rPr>
-              <a:t>resid</a:t>
-            </a:r>
-            <a:r>
-              <a:rPr>
-                <a:solidFill>
-                  <a:srgbClr val="003B4F"/>
-                </a:solidFill>
-                <a:latin typeface="Courier"/>
-              </a:rPr>
-              <a:t>(violated_model))</a:t>
-            </a:r>
-          </a:p>
-          <a:p>
-            <a:pPr lvl="0" indent="0">
-              <a:buNone/>
-            </a:pPr>
-            <a:r>
-              <a:rPr>
                 <a:latin typeface="Courier"/>
               </a:rPr>
               <a:t>
@@ -14435,9 +13613,7 @@
             </a:r>
           </a:p>
           <a:p>
-            <a:pPr lvl="0" indent="0" marL="0">
-              <a:buNone/>
-            </a:pPr>
+            <a:pPr lvl="0"/>
             <a:r>
               <a:rPr b="1"/>
               <a:t>Clear violation:</a:t>
@@ -14445,85 +13621,6 @@
             <a:r>
               <a:rPr/>
               <a:t> p &lt; 0.05, unequal variances evident</a:t>
-            </a:r>
-          </a:p>
-          <a:p>
-            <a:pPr lvl="0" indent="0">
-              <a:buNone/>
-            </a:pPr>
-            <a:r>
-              <a:rPr>
-                <a:solidFill>
-                  <a:srgbClr val="5E5E5E"/>
-                </a:solidFill>
-                <a:latin typeface="Courier"/>
-              </a:rPr>
-              <a:t># Levene's test</a:t>
-            </a:r>
-            <a:br/>
-            <a:r>
-              <a:rPr>
-                <a:solidFill>
-                  <a:srgbClr val="4758AB"/>
-                </a:solidFill>
-                <a:latin typeface="Courier"/>
-              </a:rPr>
-              <a:t>leveneTest</a:t>
-            </a:r>
-            <a:r>
-              <a:rPr>
-                <a:solidFill>
-                  <a:srgbClr val="003B4F"/>
-                </a:solidFill>
-                <a:latin typeface="Courier"/>
-              </a:rPr>
-              <a:t>(phase_shift_violated </a:t>
-            </a:r>
-            <a:r>
-              <a:rPr>
-                <a:solidFill>
-                  <a:srgbClr val="5E5E5E"/>
-                </a:solidFill>
-                <a:latin typeface="Courier"/>
-              </a:rPr>
-              <a:t>~</a:t>
-            </a:r>
-            <a:r>
-              <a:rPr>
-                <a:solidFill>
-                  <a:srgbClr val="003B4F"/>
-                </a:solidFill>
-                <a:latin typeface="Courier"/>
-              </a:rPr>
-              <a:t> treatment, </a:t>
-            </a:r>
-            <a:br/>
-            <a:r>
-              <a:rPr>
-                <a:solidFill>
-                  <a:srgbClr val="003B4F"/>
-                </a:solidFill>
-                <a:latin typeface="Courier"/>
-              </a:rPr>
-              <a:t>           </a:t>
-            </a:r>
-            <a:r>
-              <a:rPr>
-                <a:solidFill>
-                  <a:srgbClr val="657422"/>
-                </a:solidFill>
-                <a:latin typeface="Courier"/>
-              </a:rPr>
-              <a:t>data =</a:t>
-            </a:r>
-            <a:r>
-              <a:rPr>
-                <a:solidFill>
-                  <a:srgbClr val="003B4F"/>
-                </a:solidFill>
-                <a:latin typeface="Courier"/>
-              </a:rPr>
-              <a:t> violated_circ_df)</a:t>
             </a:r>
           </a:p>
           <a:p>
@@ -14754,19 +13851,8 @@
                 </a:solidFill>
                 <a:latin typeface="Courier"/>
               </a:rPr>
-              <a:t> circ_data</a:t>
-            </a:r>
-            <a:br/>
-            <a:r>
-              <a:rPr>
-                <a:solidFill>
-                  <a:srgbClr val="003B4F"/>
-                </a:solidFill>
-                <a:latin typeface="Courier"/>
-              </a:rPr>
-              <a:t>)</a:t>
-            </a:r>
-            <a:br/>
+              <a:t> circ_data)</a:t>
+            </a:r>
             <a:br/>
             <a:r>
               <a:rPr>
@@ -14822,29 +13908,6 @@
             <a:r>
               <a:rPr b="1"/>
               <a:t>Compare to parametric ANOVA:</a:t>
-            </a:r>
-          </a:p>
-          <a:p>
-            <a:pPr lvl="0" indent="0">
-              <a:buNone/>
-            </a:pPr>
-            <a:r>
-              <a:rPr>
-                <a:solidFill>
-                  <a:srgbClr val="4758AB"/>
-                </a:solidFill>
-                <a:latin typeface="Courier"/>
-              </a:rPr>
-              <a:t>anova</a:t>
-            </a:r>
-            <a:r>
-              <a:rPr>
-                <a:solidFill>
-                  <a:srgbClr val="003B4F"/>
-                </a:solidFill>
-                <a:latin typeface="Courier"/>
-              </a:rPr>
-              <a:t>(circ_model)</a:t>
             </a:r>
           </a:p>
           <a:p>
@@ -15159,19 +14222,8 @@
                 </a:solidFill>
                 <a:latin typeface="Courier"/>
               </a:rPr>
-              <a:t> violated_circ_df</a:t>
-            </a:r>
-            <a:br/>
-            <a:r>
-              <a:rPr>
-                <a:solidFill>
-                  <a:srgbClr val="003B4F"/>
-                </a:solidFill>
-                <a:latin typeface="Courier"/>
-              </a:rPr>
-              <a:t>)</a:t>
-            </a:r>
-            <a:br/>
+              <a:t> violated_circ_df)</a:t>
+            </a:r>
             <a:br/>
             <a:r>
               <a:rPr>
@@ -15195,38 +14247,6 @@
     Kruskal-Wallis rank sum test
 data:  phase_shift_violated by treatment
 Kruskal-Wallis chi-squared = 6.8453, df = 2, p-value = 0.03263</a:t>
-            </a:r>
-          </a:p>
-          <a:p>
-            <a:pPr lvl="0" indent="0" marL="0">
-              <a:buNone/>
-            </a:pPr>
-            <a:r>
-              <a:rPr b="1"/>
-              <a:t>Compare parametric ANOVA on same violated data:</a:t>
-            </a:r>
-          </a:p>
-          <a:p>
-            <a:pPr lvl="0" indent="0">
-              <a:buNone/>
-            </a:pPr>
-            <a:r>
-              <a:rPr>
-                <a:solidFill>
-                  <a:srgbClr val="4758AB"/>
-                </a:solidFill>
-                <a:latin typeface="Courier"/>
-              </a:rPr>
-              <a:t>anova</a:t>
-            </a:r>
-            <a:r>
-              <a:rPr>
-                <a:solidFill>
-                  <a:srgbClr val="003B4F"/>
-                </a:solidFill>
-                <a:latin typeface="Courier"/>
-              </a:rPr>
-              <a:t>(violated_model)</a:t>
             </a:r>
           </a:p>
           <a:p>
@@ -15257,28 +14277,28 @@
             <a:pPr lvl="1"/>
             <a:r>
               <a:rPr/>
-              <a:t>- Both tests still detect differences</a:t>
+              <a:t>Both tests still detect differences</a:t>
             </a:r>
           </a:p>
           <a:p>
             <a:pPr lvl="1"/>
             <a:r>
               <a:rPr/>
-              <a:t>- Kruskal-Wallis more robust to violations</a:t>
+              <a:t>Kruskal-Wallis more robust to violations</a:t>
             </a:r>
           </a:p>
           <a:p>
             <a:pPr lvl="1"/>
             <a:r>
               <a:rPr/>
-              <a:t>- Parametric test may give misleading results when assumptions violated</a:t>
+              <a:t>Parametric test may give misleading results when assumptions violated</a:t>
             </a:r>
           </a:p>
           <a:p>
             <a:pPr lvl="1"/>
             <a:r>
               <a:rPr/>
-              <a:t>- Non-parametric test maintains validity</a:t>
+              <a:t>Non-parametric test maintains validity</a:t>
             </a:r>
           </a:p>
         </p:txBody>
@@ -15401,208 +14421,6 @@
             <a:r>
               <a:rPr b="1"/>
               <a:t>Just like ANOVA, we need post-hoc tests to identify which groups differ:</a:t>
-            </a:r>
-          </a:p>
-          <a:p>
-            <a:pPr lvl="0" indent="0">
-              <a:buNone/>
-            </a:pPr>
-            <a:r>
-              <a:rPr>
-                <a:solidFill>
-                  <a:srgbClr val="5E5E5E"/>
-                </a:solidFill>
-                <a:latin typeface="Courier"/>
-              </a:rPr>
-              <a:t># Pairwise Wilcoxon rank sum tests with </a:t>
-            </a:r>
-            <a:br/>
-            <a:r>
-              <a:rPr>
-                <a:solidFill>
-                  <a:srgbClr val="5E5E5E"/>
-                </a:solidFill>
-                <a:latin typeface="Courier"/>
-              </a:rPr>
-              <a:t># Bonferroni correction</a:t>
-            </a:r>
-            <a:br/>
-            <a:r>
-              <a:rPr>
-                <a:solidFill>
-                  <a:srgbClr val="003B4F"/>
-                </a:solidFill>
-                <a:latin typeface="Courier"/>
-              </a:rPr>
-              <a:t>pairwise_original_result &lt;- </a:t>
-            </a:r>
-            <a:r>
-              <a:rPr>
-                <a:solidFill>
-                  <a:srgbClr val="4758AB"/>
-                </a:solidFill>
-                <a:latin typeface="Courier"/>
-              </a:rPr>
-              <a:t>pairwise.wilcox.test</a:t>
-            </a:r>
-            <a:r>
-              <a:rPr>
-                <a:solidFill>
-                  <a:srgbClr val="003B4F"/>
-                </a:solidFill>
-                <a:latin typeface="Courier"/>
-              </a:rPr>
-              <a:t>(</a:t>
-            </a:r>
-            <a:br/>
-            <a:r>
-              <a:rPr>
-                <a:solidFill>
-                  <a:srgbClr val="003B4F"/>
-                </a:solidFill>
-                <a:latin typeface="Courier"/>
-              </a:rPr>
-              <a:t>  </a:t>
-            </a:r>
-            <a:r>
-              <a:rPr>
-                <a:solidFill>
-                  <a:srgbClr val="657422"/>
-                </a:solidFill>
-                <a:latin typeface="Courier"/>
-              </a:rPr>
-              <a:t>x =</a:t>
-            </a:r>
-            <a:r>
-              <a:rPr>
-                <a:solidFill>
-                  <a:srgbClr val="003B4F"/>
-                </a:solidFill>
-                <a:latin typeface="Courier"/>
-              </a:rPr>
-              <a:t> nonparam_circ_df</a:t>
-            </a:r>
-            <a:r>
-              <a:rPr>
-                <a:solidFill>
-                  <a:srgbClr val="5E5E5E"/>
-                </a:solidFill>
-                <a:latin typeface="Courier"/>
-              </a:rPr>
-              <a:t>$</a:t>
-            </a:r>
-            <a:r>
-              <a:rPr>
-                <a:solidFill>
-                  <a:srgbClr val="003B4F"/>
-                </a:solidFill>
-                <a:latin typeface="Courier"/>
-              </a:rPr>
-              <a:t>phase_shift,</a:t>
-            </a:r>
-            <a:br/>
-            <a:r>
-              <a:rPr>
-                <a:solidFill>
-                  <a:srgbClr val="003B4F"/>
-                </a:solidFill>
-                <a:latin typeface="Courier"/>
-              </a:rPr>
-              <a:t>  </a:t>
-            </a:r>
-            <a:r>
-              <a:rPr>
-                <a:solidFill>
-                  <a:srgbClr val="657422"/>
-                </a:solidFill>
-                <a:latin typeface="Courier"/>
-              </a:rPr>
-              <a:t>g =</a:t>
-            </a:r>
-            <a:r>
-              <a:rPr>
-                <a:solidFill>
-                  <a:srgbClr val="003B4F"/>
-                </a:solidFill>
-                <a:latin typeface="Courier"/>
-              </a:rPr>
-              <a:t> nonparam_circ_df</a:t>
-            </a:r>
-            <a:r>
-              <a:rPr>
-                <a:solidFill>
-                  <a:srgbClr val="5E5E5E"/>
-                </a:solidFill>
-                <a:latin typeface="Courier"/>
-              </a:rPr>
-              <a:t>$</a:t>
-            </a:r>
-            <a:r>
-              <a:rPr>
-                <a:solidFill>
-                  <a:srgbClr val="003B4F"/>
-                </a:solidFill>
-                <a:latin typeface="Courier"/>
-              </a:rPr>
-              <a:t>treatment,</a:t>
-            </a:r>
-            <a:br/>
-            <a:r>
-              <a:rPr>
-                <a:solidFill>
-                  <a:srgbClr val="003B4F"/>
-                </a:solidFill>
-                <a:latin typeface="Courier"/>
-              </a:rPr>
-              <a:t>  </a:t>
-            </a:r>
-            <a:r>
-              <a:rPr>
-                <a:solidFill>
-                  <a:srgbClr val="657422"/>
-                </a:solidFill>
-                <a:latin typeface="Courier"/>
-              </a:rPr>
-              <a:t>p.adjust.method =</a:t>
-            </a:r>
-            <a:r>
-              <a:rPr>
-                <a:solidFill>
-                  <a:srgbClr val="003B4F"/>
-                </a:solidFill>
-                <a:latin typeface="Courier"/>
-              </a:rPr>
-              <a:t> </a:t>
-            </a:r>
-            <a:r>
-              <a:rPr>
-                <a:solidFill>
-                  <a:srgbClr val="20794D"/>
-                </a:solidFill>
-                <a:latin typeface="Courier"/>
-              </a:rPr>
-              <a:t>"bonferroni"</a:t>
-            </a:r>
-            <a:br/>
-            <a:r>
-              <a:rPr>
-                <a:solidFill>
-                  <a:srgbClr val="003B4F"/>
-                </a:solidFill>
-                <a:latin typeface="Courier"/>
-              </a:rPr>
-              <a:t>)</a:t>
-            </a:r>
-            <a:br/>
-            <a:br/>
-            <a:r>
-              <a:rPr>
-                <a:solidFill>
-                  <a:srgbClr val="003B4F"/>
-                </a:solidFill>
-                <a:latin typeface="Courier"/>
-              </a:rPr>
-              <a:t>pairwise_original_result</a:t>
             </a:r>
           </a:p>
           <a:p>
@@ -16755,31 +15573,95 @@
             <a:r>
               <a:rPr>
                 <a:solidFill>
+                  <a:srgbClr val="5E5E5E"/>
+                </a:solidFill>
+                <a:latin typeface="Courier"/>
+              </a:rPr>
+              <a:t># Dunn's test on original data</a:t>
+            </a:r>
+            <a:br/>
+            <a:r>
+              <a:rPr>
+                <a:solidFill>
+                  <a:srgbClr val="003B4F"/>
+                </a:solidFill>
+                <a:latin typeface="Courier"/>
+              </a:rPr>
+              <a:t>dunn_original_result &lt;- </a:t>
+            </a:r>
+            <a:r>
+              <a:rPr>
+                <a:solidFill>
                   <a:srgbClr val="4758AB"/>
                 </a:solidFill>
                 <a:latin typeface="Courier"/>
               </a:rPr>
-              <a:t>library</a:t>
-            </a:r>
-            <a:r>
-              <a:rPr>
-                <a:solidFill>
-                  <a:srgbClr val="003B4F"/>
-                </a:solidFill>
-                <a:latin typeface="Courier"/>
-              </a:rPr>
-              <a:t>(FSA)</a:t>
+              <a:t>dunnTest</a:t>
+            </a:r>
+            <a:r>
+              <a:rPr>
+                <a:solidFill>
+                  <a:srgbClr val="003B4F"/>
+                </a:solidFill>
+                <a:latin typeface="Courier"/>
+              </a:rPr>
+              <a:t>(</a:t>
             </a:r>
             <a:br/>
+            <a:r>
+              <a:rPr>
+                <a:solidFill>
+                  <a:srgbClr val="003B4F"/>
+                </a:solidFill>
+                <a:latin typeface="Courier"/>
+              </a:rPr>
+              <a:t>  phase_shift </a:t>
+            </a:r>
+            <a:r>
+              <a:rPr>
+                <a:solidFill>
+                  <a:srgbClr val="5E5E5E"/>
+                </a:solidFill>
+                <a:latin typeface="Courier"/>
+              </a:rPr>
+              <a:t>~</a:t>
+            </a:r>
+            <a:r>
+              <a:rPr>
+                <a:solidFill>
+                  <a:srgbClr val="003B4F"/>
+                </a:solidFill>
+                <a:latin typeface="Courier"/>
+              </a:rPr>
+              <a:t> treatment,</a:t>
+            </a:r>
             <a:br/>
             <a:r>
               <a:rPr>
                 <a:solidFill>
-                  <a:srgbClr val="5E5E5E"/>
-                </a:solidFill>
-                <a:latin typeface="Courier"/>
-              </a:rPr>
-              <a:t># Dunn's test on original data</a:t>
+                  <a:srgbClr val="003B4F"/>
+                </a:solidFill>
+                <a:latin typeface="Courier"/>
+              </a:rPr>
+              <a:t>  </a:t>
+            </a:r>
+            <a:r>
+              <a:rPr>
+                <a:solidFill>
+                  <a:srgbClr val="657422"/>
+                </a:solidFill>
+                <a:latin typeface="Courier"/>
+              </a:rPr>
+              <a:t>data =</a:t>
+            </a:r>
+            <a:r>
+              <a:rPr>
+                <a:solidFill>
+                  <a:srgbClr val="003B4F"/>
+                </a:solidFill>
+                <a:latin typeface="Courier"/>
+              </a:rPr>
+              <a:t> circ_data,</a:t>
             </a:r>
             <a:br/>
             <a:r>
@@ -16789,62 +15671,6 @@
                 </a:solidFill>
                 <a:latin typeface="Courier"/>
               </a:rPr>
-              <a:t>dunn_original_result &lt;- </a:t>
-            </a:r>
-            <a:r>
-              <a:rPr>
-                <a:solidFill>
-                  <a:srgbClr val="4758AB"/>
-                </a:solidFill>
-                <a:latin typeface="Courier"/>
-              </a:rPr>
-              <a:t>dunnTest</a:t>
-            </a:r>
-            <a:r>
-              <a:rPr>
-                <a:solidFill>
-                  <a:srgbClr val="003B4F"/>
-                </a:solidFill>
-                <a:latin typeface="Courier"/>
-              </a:rPr>
-              <a:t>(</a:t>
-            </a:r>
-            <a:br/>
-            <a:r>
-              <a:rPr>
-                <a:solidFill>
-                  <a:srgbClr val="003B4F"/>
-                </a:solidFill>
-                <a:latin typeface="Courier"/>
-              </a:rPr>
-              <a:t>  phase_shift </a:t>
-            </a:r>
-            <a:r>
-              <a:rPr>
-                <a:solidFill>
-                  <a:srgbClr val="5E5E5E"/>
-                </a:solidFill>
-                <a:latin typeface="Courier"/>
-              </a:rPr>
-              <a:t>~</a:t>
-            </a:r>
-            <a:r>
-              <a:rPr>
-                <a:solidFill>
-                  <a:srgbClr val="003B4F"/>
-                </a:solidFill>
-                <a:latin typeface="Courier"/>
-              </a:rPr>
-              <a:t> treatment,</a:t>
-            </a:r>
-            <a:br/>
-            <a:r>
-              <a:rPr>
-                <a:solidFill>
-                  <a:srgbClr val="003B4F"/>
-                </a:solidFill>
-                <a:latin typeface="Courier"/>
-              </a:rPr>
               <a:t>  </a:t>
             </a:r>
             <a:r>
@@ -16854,34 +15680,6 @@
                 </a:solidFill>
                 <a:latin typeface="Courier"/>
               </a:rPr>
-              <a:t>data =</a:t>
-            </a:r>
-            <a:r>
-              <a:rPr>
-                <a:solidFill>
-                  <a:srgbClr val="003B4F"/>
-                </a:solidFill>
-                <a:latin typeface="Courier"/>
-              </a:rPr>
-              <a:t> circ_data,</a:t>
-            </a:r>
-            <a:br/>
-            <a:r>
-              <a:rPr>
-                <a:solidFill>
-                  <a:srgbClr val="003B4F"/>
-                </a:solidFill>
-                <a:latin typeface="Courier"/>
-              </a:rPr>
-              <a:t>  </a:t>
-            </a:r>
-            <a:r>
-              <a:rPr>
-                <a:solidFill>
-                  <a:srgbClr val="657422"/>
-                </a:solidFill>
-                <a:latin typeface="Courier"/>
-              </a:rPr>
               <a:t>method =</a:t>
             </a:r>
             <a:r>
@@ -16902,7 +15700,6 @@
               </a:rPr>
               <a:t>"bonferroni"</a:t>
             </a:r>
-            <a:br/>
             <a:r>
               <a:rPr>
                 <a:solidFill>
@@ -16912,7 +15709,6 @@
               </a:rPr>
               <a:t>)</a:t>
             </a:r>
-            <a:br/>
             <a:br/>
             <a:r>
               <a:rPr>
@@ -17243,11 +16039,8 @@
         <p:spPr>
           <a:xfrm>
             <a:off x="0" y="0"/>
-            <a:ext cx="9144000" cy="602780"/>
+            <a:ext cx="9144000" cy="582780"/>
           </a:xfrm>
-          <a:solidFill>
-            <a:srgbClr val="70121D"/>
-          </a:solidFill>
         </p:spPr>
         <p:txBody>
           <a:bodyPr/>
@@ -17270,7 +16063,7 @@
             <a:spLocks noGrp="1"/>
           </p:cNvSpPr>
           <p:nvPr>
-            <p:ph idx="1" sz="half"/>
+            <p:ph idx="1"/>
           </p:nvPr>
         </p:nvSpPr>
         <p:spPr/>
@@ -17331,7 +16124,7 @@
             </a:pPr>
             <a:r>
               <a:rPr/>
-              <a:t>Test statistic (H) and degrees of freedom</a:t>
+              <a:t>Test statistic (H) and degrees of freedom, P-value, Effect size</a:t>
             </a:r>
           </a:p>
           <a:p>
@@ -17340,7 +16133,7 @@
             </a:pPr>
             <a:r>
               <a:rPr/>
-              <a:t>P-value</a:t>
+              <a:t>Post-hoc test results</a:t>
             </a:r>
           </a:p>
           <a:p>
@@ -17349,24 +16142,6 @@
             </a:pPr>
             <a:r>
               <a:rPr/>
-              <a:t>Effect size</a:t>
-            </a:r>
-          </a:p>
-          <a:p>
-            <a:pPr lvl="0" indent="-342900" marL="342900">
-              <a:buAutoNum type="arabicPeriod"/>
-            </a:pPr>
-            <a:r>
-              <a:rPr/>
-              <a:t>Post-hoc test results</a:t>
-            </a:r>
-          </a:p>
-          <a:p>
-            <a:pPr lvl="0" indent="-342900" marL="342900">
-              <a:buAutoNum type="arabicPeriod"/>
-            </a:pPr>
-            <a:r>
-              <a:rPr/>
               <a:t>Conclusion</a:t>
             </a:r>
           </a:p>
@@ -17378,26 +16153,73 @@
               <a:rPr b="1"/>
               <a:t>Example write-up:</a:t>
             </a:r>
-          </a:p>
+            <a:r>
+              <a:rPr/>
+              <a:t> “A Kruskal-Wallis test was conducted to compare the effect of light treatment on circadian rhythm phase shift across three groups: Control (n = 8), Knees (n = 7), and Eyes (n = 7). Median phase shifts were -0.48 hours (IQR = 0.84) for Control, -0.29 hours (IQR = 1.04) for Knees, and -1.48 hours (IQR = 0.66) for Eyes. The test revealed a statistically significant difference in phase shift between the groups, H(2) = 8.66, p = 0.013, ε² = 0.37. Post-hoc pairwise comparisons using Dunn’s test with Bonferroni correction indicated that the Eyes treatment differed significantly from Control (p = 0.024), but no other pairwise differences were significant. These results suggest that light exposure to the eyes has a different effect on circadian rhythm than light to other body parts.”</a:t>
+            </a:r>
+          </a:p>
+        </p:txBody>
+      </p:sp>
+    </p:spTree>
+  </p:cSld>
+</p:sld>
+</file>
+
+<file path=ppt/slides/slide42.xml><?xml version="1.0" encoding="utf-8"?>
+<p:sld xmlns:a="http://schemas.openxmlformats.org/drawingml/2006/main" xmlns:r="http://schemas.openxmlformats.org/officeDocument/2006/relationships" xmlns:p="http://schemas.openxmlformats.org/presentationml/2006/main">
+  <p:cSld>
+    <p:spTree>
+      <p:nvGrpSpPr>
+        <p:cNvPr id="1" name=""/>
+        <p:cNvGrpSpPr/>
+        <p:nvPr/>
+      </p:nvGrpSpPr>
+      <p:grpSpPr>
+        <a:xfrm>
+          <a:off x="0" y="0"/>
+          <a:ext cx="0" cy="0"/>
+          <a:chOff x="0" y="0"/>
+          <a:chExt cx="0" cy="0"/>
+        </a:xfrm>
+      </p:grpSpPr>
+      <p:sp>
+        <p:nvSpPr>
+          <p:cNvPr id="2" name="Title 1"/>
+          <p:cNvSpPr>
+            <a:spLocks noGrp="1"/>
+          </p:cNvSpPr>
+          <p:nvPr>
+            <p:ph type="title"/>
+          </p:nvPr>
+        </p:nvSpPr>
+        <p:spPr>
+          <a:xfrm>
+            <a:off x="0" y="0"/>
+            <a:ext cx="9144000" cy="582780"/>
+          </a:xfrm>
+        </p:spPr>
+        <p:txBody>
+          <a:bodyPr/>
+          <a:lstStyle/>
           <a:p>
             <a:pPr lvl="0" indent="0" marL="0">
               <a:buNone/>
             </a:pPr>
             <a:r>
               <a:rPr/>
-              <a:t>“A Kruskal-Wallis test was conducted to compare the effect of light treatment on circadian rhythm phase shift across three groups: Control (n = 8), Knees (n = 7), and Eyes (n = 7). Median phase shifts were -0.48 hours (IQR = 0.84) for Control, -0.29 hours (IQR = 1.04) for Knees, and -1.48 hours (IQR = 0.66) for Eyes. The test revealed a statistically significant difference in phase shift between the groups, H(2) = 8.66, p = 0.013, ε² = 0.37. Post-hoc pairwise comparisons using Dunn’s test with Bonferroni correction indicated that the Eyes treatment differed significantly from Control (p = 0.024), but no other pairwise differences were significant. These results suggest that light exposure to the eyes has a different effect on circadian rhythm than light to other body parts.”</a:t>
+              <a:t>APA Style Reporting</a:t>
             </a:r>
           </a:p>
         </p:txBody>
       </p:sp>
       <p:sp>
         <p:nvSpPr>
-          <p:cNvPr id="4" name="Content Placeholder 3"/>
+          <p:cNvPr id="3" name="Content Placeholder 2"/>
           <p:cNvSpPr>
             <a:spLocks noGrp="1"/>
           </p:cNvSpPr>
           <p:nvPr>
-            <p:ph idx="2" sz="half"/>
+            <p:ph idx="1"/>
           </p:nvPr>
         </p:nvSpPr>
         <p:spPr/>
@@ -17406,18 +16228,6 @@
           <a:lstStyle/>
           <a:p>
             <a:pPr lvl="0" indent="0" marL="0">
-              <a:spcBef>
-                <a:spcPts val="3000"/>
-              </a:spcBef>
-              <a:buNone/>
-            </a:pPr>
-            <a:r>
-              <a:rPr b="1"/>
-              <a:t>APA Style Reporting</a:t>
-            </a:r>
-          </a:p>
-          <a:p>
-            <a:pPr lvl="0" indent="0" marL="0">
               <a:buNone/>
             </a:pPr>
             <a:r>
@@ -17451,7 +16261,9 @@
               <a:rPr>
                 <a:latin typeface="Courier"/>
               </a:rPr>
-              <a:t>Table 1. Descriptive Statistics for Phase Shift by Treatment</a:t>
+              <a:t>Table 1. Descriptive Statistics for Phase Shift by Treatment
+Note. IQR = interquartile range.
+ Kruskal-Wallis H(2) = 8.66, p = .013</a:t>
             </a:r>
           </a:p>
           <a:p>
@@ -17471,29 +16283,6 @@
             </a:r>
           </a:p>
           <a:p>
-            <a:pPr lvl="0" indent="0">
-              <a:buNone/>
-            </a:pPr>
-            <a:r>
-              <a:rPr>
-                <a:latin typeface="Courier"/>
-              </a:rPr>
-              <a:t>
-Note. IQR = interquartile range.</a:t>
-            </a:r>
-          </a:p>
-          <a:p>
-            <a:pPr lvl="0" indent="0">
-              <a:buNone/>
-            </a:pPr>
-            <a:r>
-              <a:rPr>
-                <a:latin typeface="Courier"/>
-              </a:rPr>
-              <a:t>Kruskal-Wallis H(2) = 8.66, p = .013, ε² = .37</a:t>
-            </a:r>
-          </a:p>
-          <a:p>
             <a:pPr lvl="0" indent="0" marL="0">
               <a:buNone/>
             </a:pPr>
@@ -17506,28 +16295,14 @@
             <a:pPr lvl="0"/>
             <a:r>
               <a:rPr/>
-              <a:t>✗ Reporting means instead of medians</a:t>
+              <a:t>✗ Reporting means instead of medians &amp; Using SD instead of IQR</a:t>
             </a:r>
           </a:p>
           <a:p>
             <a:pPr lvl="0"/>
             <a:r>
               <a:rPr/>
-              <a:t>✗ Using SD instead of IQR</a:t>
-            </a:r>
-          </a:p>
-          <a:p>
-            <a:pPr lvl="0"/>
-            <a:r>
-              <a:rPr/>
               <a:t>✗ Not mentioning it’s a non-parametric test</a:t>
-            </a:r>
-          </a:p>
-          <a:p>
-            <a:pPr lvl="0"/>
-            <a:r>
-              <a:rPr/>
-              <a:t>✗ Forgetting effect size</a:t>
             </a:r>
           </a:p>
           <a:p>
